--- a/outputs/sbom-practice-talk.pptx
+++ b/outputs/sbom-practice-talk.pptx
@@ -5,37 +5,38 @@
     <p:sldMasterId id="2147483648" r:id="rId1"/>
   </p:sldMasterIdLst>
   <p:notesMasterIdLst>
-    <p:notesMasterId r:id="rId30"/>
+    <p:notesMasterId r:id="rId31"/>
   </p:notesMasterIdLst>
   <p:sldIdLst>
     <p:sldId id="256" r:id="rId2"/>
     <p:sldId id="257" r:id="rId3"/>
-    <p:sldId id="258" r:id="rId4"/>
-    <p:sldId id="283" r:id="rId5"/>
-    <p:sldId id="259" r:id="rId6"/>
-    <p:sldId id="260" r:id="rId7"/>
-    <p:sldId id="261" r:id="rId8"/>
-    <p:sldId id="262" r:id="rId9"/>
-    <p:sldId id="263" r:id="rId10"/>
-    <p:sldId id="264" r:id="rId11"/>
-    <p:sldId id="265" r:id="rId12"/>
-    <p:sldId id="266" r:id="rId13"/>
-    <p:sldId id="267" r:id="rId14"/>
-    <p:sldId id="268" r:id="rId15"/>
-    <p:sldId id="269" r:id="rId16"/>
-    <p:sldId id="270" r:id="rId17"/>
-    <p:sldId id="271" r:id="rId18"/>
-    <p:sldId id="272" r:id="rId19"/>
-    <p:sldId id="273" r:id="rId20"/>
-    <p:sldId id="274" r:id="rId21"/>
-    <p:sldId id="275" r:id="rId22"/>
-    <p:sldId id="276" r:id="rId23"/>
-    <p:sldId id="277" r:id="rId24"/>
-    <p:sldId id="278" r:id="rId25"/>
-    <p:sldId id="279" r:id="rId26"/>
-    <p:sldId id="280" r:id="rId27"/>
-    <p:sldId id="281" r:id="rId28"/>
-    <p:sldId id="282" r:id="rId29"/>
+    <p:sldId id="284" r:id="rId4"/>
+    <p:sldId id="258" r:id="rId5"/>
+    <p:sldId id="283" r:id="rId6"/>
+    <p:sldId id="259" r:id="rId7"/>
+    <p:sldId id="260" r:id="rId8"/>
+    <p:sldId id="261" r:id="rId9"/>
+    <p:sldId id="262" r:id="rId10"/>
+    <p:sldId id="263" r:id="rId11"/>
+    <p:sldId id="264" r:id="rId12"/>
+    <p:sldId id="265" r:id="rId13"/>
+    <p:sldId id="266" r:id="rId14"/>
+    <p:sldId id="267" r:id="rId15"/>
+    <p:sldId id="268" r:id="rId16"/>
+    <p:sldId id="269" r:id="rId17"/>
+    <p:sldId id="270" r:id="rId18"/>
+    <p:sldId id="271" r:id="rId19"/>
+    <p:sldId id="272" r:id="rId20"/>
+    <p:sldId id="273" r:id="rId21"/>
+    <p:sldId id="274" r:id="rId22"/>
+    <p:sldId id="275" r:id="rId23"/>
+    <p:sldId id="276" r:id="rId24"/>
+    <p:sldId id="277" r:id="rId25"/>
+    <p:sldId id="278" r:id="rId26"/>
+    <p:sldId id="279" r:id="rId27"/>
+    <p:sldId id="280" r:id="rId28"/>
+    <p:sldId id="281" r:id="rId29"/>
+    <p:sldId id="282" r:id="rId30"/>
   </p:sldIdLst>
   <p:sldSz cx="12192000" cy="6858000"/>
   <p:notesSz cx="6858000" cy="12192000"/>
@@ -138,6 +139,7 @@
           <p14:sldIdLst>
             <p14:sldId id="256"/>
             <p14:sldId id="257"/>
+            <p14:sldId id="284"/>
           </p14:sldIdLst>
         </p14:section>
         <p14:section name="01 概念" id="{41E2EB8E-6A97-B885-D3AF-3A6D3936822E}">
@@ -471,7 +473,7 @@
           <a:p>
             <a:fld id="{F7021451-1387-4CA6-816F-3879F97B5CBC}" type="slidenum">
               <a:rPr lang="en-US"/>
-              <a:t>11</a:t>
+              <a:t>12</a:t>
             </a:fld>
             <a:endParaRPr lang="en-US"/>
           </a:p>
@@ -558,7 +560,7 @@
           <a:p>
             <a:fld id="{F7021451-1387-4CA6-816F-3879F97B5CBC}" type="slidenum">
               <a:rPr lang="en-US"/>
-              <a:t>12</a:t>
+              <a:t>13</a:t>
             </a:fld>
             <a:endParaRPr lang="en-US"/>
           </a:p>
@@ -645,7 +647,7 @@
           <a:p>
             <a:fld id="{F7021451-1387-4CA6-816F-3879F97B5CBC}" type="slidenum">
               <a:rPr lang="en-US"/>
-              <a:t>13</a:t>
+              <a:t>14</a:t>
             </a:fld>
             <a:endParaRPr lang="en-US"/>
           </a:p>
@@ -732,7 +734,7 @@
           <a:p>
             <a:fld id="{F7021451-1387-4CA6-816F-3879F97B5CBC}" type="slidenum">
               <a:rPr lang="en-US"/>
-              <a:t>14</a:t>
+              <a:t>15</a:t>
             </a:fld>
             <a:endParaRPr lang="en-US"/>
           </a:p>
@@ -819,7 +821,7 @@
           <a:p>
             <a:fld id="{F7021451-1387-4CA6-816F-3879F97B5CBC}" type="slidenum">
               <a:rPr lang="en-US"/>
-              <a:t>15</a:t>
+              <a:t>16</a:t>
             </a:fld>
             <a:endParaRPr lang="en-US"/>
           </a:p>
@@ -906,7 +908,7 @@
           <a:p>
             <a:fld id="{F7021451-1387-4CA6-816F-3879F97B5CBC}" type="slidenum">
               <a:rPr lang="en-US"/>
-              <a:t>16</a:t>
+              <a:t>17</a:t>
             </a:fld>
             <a:endParaRPr lang="en-US"/>
           </a:p>
@@ -993,7 +995,7 @@
           <a:p>
             <a:fld id="{F7021451-1387-4CA6-816F-3879F97B5CBC}" type="slidenum">
               <a:rPr lang="en-US"/>
-              <a:t>17</a:t>
+              <a:t>18</a:t>
             </a:fld>
             <a:endParaRPr lang="en-US"/>
           </a:p>
@@ -1080,7 +1082,7 @@
           <a:p>
             <a:fld id="{F7021451-1387-4CA6-816F-3879F97B5CBC}" type="slidenum">
               <a:rPr lang="en-US"/>
-              <a:t>18</a:t>
+              <a:t>19</a:t>
             </a:fld>
             <a:endParaRPr lang="en-US"/>
           </a:p>
@@ -1167,7 +1169,7 @@
           <a:p>
             <a:fld id="{F7021451-1387-4CA6-816F-3879F97B5CBC}" type="slidenum">
               <a:rPr lang="en-US"/>
-              <a:t>19</a:t>
+              <a:t>20</a:t>
             </a:fld>
             <a:endParaRPr lang="en-US"/>
           </a:p>
@@ -1254,7 +1256,7 @@
           <a:p>
             <a:fld id="{F7021451-1387-4CA6-816F-3879F97B5CBC}" type="slidenum">
               <a:rPr lang="en-US"/>
-              <a:t>20</a:t>
+              <a:t>21</a:t>
             </a:fld>
             <a:endParaRPr lang="en-US"/>
           </a:p>
@@ -1428,7 +1430,7 @@
           <a:p>
             <a:fld id="{F7021451-1387-4CA6-816F-3879F97B5CBC}" type="slidenum">
               <a:rPr lang="en-US"/>
-              <a:t>21</a:t>
+              <a:t>22</a:t>
             </a:fld>
             <a:endParaRPr lang="en-US"/>
           </a:p>
@@ -1515,7 +1517,7 @@
           <a:p>
             <a:fld id="{F7021451-1387-4CA6-816F-3879F97B5CBC}" type="slidenum">
               <a:rPr lang="en-US"/>
-              <a:t>22</a:t>
+              <a:t>23</a:t>
             </a:fld>
             <a:endParaRPr lang="en-US"/>
           </a:p>
@@ -1602,7 +1604,7 @@
           <a:p>
             <a:fld id="{F7021451-1387-4CA6-816F-3879F97B5CBC}" type="slidenum">
               <a:rPr lang="en-US"/>
-              <a:t>23</a:t>
+              <a:t>24</a:t>
             </a:fld>
             <a:endParaRPr lang="en-US"/>
           </a:p>
@@ -1689,7 +1691,7 @@
           <a:p>
             <a:fld id="{F7021451-1387-4CA6-816F-3879F97B5CBC}" type="slidenum">
               <a:rPr lang="en-US"/>
-              <a:t>24</a:t>
+              <a:t>25</a:t>
             </a:fld>
             <a:endParaRPr lang="en-US"/>
           </a:p>
@@ -1776,7 +1778,7 @@
           <a:p>
             <a:fld id="{F7021451-1387-4CA6-816F-3879F97B5CBC}" type="slidenum">
               <a:rPr lang="en-US"/>
-              <a:t>25</a:t>
+              <a:t>26</a:t>
             </a:fld>
             <a:endParaRPr lang="en-US"/>
           </a:p>
@@ -1863,7 +1865,7 @@
           <a:p>
             <a:fld id="{F7021451-1387-4CA6-816F-3879F97B5CBC}" type="slidenum">
               <a:rPr lang="en-US"/>
-              <a:t>26</a:t>
+              <a:t>27</a:t>
             </a:fld>
             <a:endParaRPr lang="en-US"/>
           </a:p>
@@ -1950,7 +1952,7 @@
           <a:p>
             <a:fld id="{F7021451-1387-4CA6-816F-3879F97B5CBC}" type="slidenum">
               <a:rPr lang="en-US"/>
-              <a:t>27</a:t>
+              <a:t>28</a:t>
             </a:fld>
             <a:endParaRPr lang="en-US"/>
           </a:p>
@@ -2037,7 +2039,7 @@
           <a:p>
             <a:fld id="{F7021451-1387-4CA6-816F-3879F97B5CBC}" type="slidenum">
               <a:rPr lang="en-US"/>
-              <a:t>28</a:t>
+              <a:t>29</a:t>
             </a:fld>
             <a:endParaRPr lang="en-US"/>
           </a:p>
@@ -2124,7 +2126,7 @@
           <a:p>
             <a:fld id="{F7021451-1387-4CA6-816F-3879F97B5CBC}" type="slidenum">
               <a:rPr lang="en-US"/>
-              <a:t>3</a:t>
+              <a:t>4</a:t>
             </a:fld>
             <a:endParaRPr lang="en-US"/>
           </a:p>
@@ -2211,7 +2213,7 @@
           <a:p>
             <a:fld id="{F7021451-1387-4CA6-816F-3879F97B5CBC}" type="slidenum">
               <a:rPr lang="en-US"/>
-              <a:t>5</a:t>
+              <a:t>6</a:t>
             </a:fld>
             <a:endParaRPr lang="en-US"/>
           </a:p>
@@ -2298,7 +2300,7 @@
           <a:p>
             <a:fld id="{F7021451-1387-4CA6-816F-3879F97B5CBC}" type="slidenum">
               <a:rPr lang="en-US"/>
-              <a:t>6</a:t>
+              <a:t>7</a:t>
             </a:fld>
             <a:endParaRPr lang="en-US"/>
           </a:p>
@@ -2385,7 +2387,7 @@
           <a:p>
             <a:fld id="{F7021451-1387-4CA6-816F-3879F97B5CBC}" type="slidenum">
               <a:rPr lang="en-US"/>
-              <a:t>7</a:t>
+              <a:t>8</a:t>
             </a:fld>
             <a:endParaRPr lang="en-US"/>
           </a:p>
@@ -2472,7 +2474,7 @@
           <a:p>
             <a:fld id="{F7021451-1387-4CA6-816F-3879F97B5CBC}" type="slidenum">
               <a:rPr lang="en-US"/>
-              <a:t>8</a:t>
+              <a:t>9</a:t>
             </a:fld>
             <a:endParaRPr lang="en-US"/>
           </a:p>
@@ -2559,7 +2561,7 @@
           <a:p>
             <a:fld id="{F7021451-1387-4CA6-816F-3879F97B5CBC}" type="slidenum">
               <a:rPr lang="en-US"/>
-              <a:t>9</a:t>
+              <a:t>10</a:t>
             </a:fld>
             <a:endParaRPr lang="en-US"/>
           </a:p>
@@ -2646,7 +2648,7 @@
           <a:p>
             <a:fld id="{F7021451-1387-4CA6-816F-3879F97B5CBC}" type="slidenum">
               <a:rPr lang="en-US"/>
-              <a:t>10</a:t>
+              <a:t>11</a:t>
             </a:fld>
             <a:endParaRPr lang="en-US"/>
           </a:p>
@@ -3047,7 +3049,7 @@
           </a:prstGeom>
           <a:extLst>
             <a:ext uri="{C572A759-6A51-4108-AA02-DFA0A04FC94B}">
-              <ma14:wrappingTextBoxFlag xmlns:ma14="http://schemas.microsoft.com/office/mac/drawingml/2011/main" xmlns="" val="0"/>
+              <ma14:wrappingTextBoxFlag xmlns="" xmlns:ma14="http://schemas.microsoft.com/office/mac/drawingml/2011/main" val="0"/>
             </a:ext>
           </a:extLst>
         </p:spPr>
@@ -3166,7 +3168,7 @@
           </a:prstGeom>
           <a:extLst>
             <a:ext uri="{C572A759-6A51-4108-AA02-DFA0A04FC94B}">
-              <ma14:wrappingTextBoxFlag xmlns:ma14="http://schemas.microsoft.com/office/mac/drawingml/2011/main" xmlns="" val="0"/>
+              <ma14:wrappingTextBoxFlag xmlns="" xmlns:ma14="http://schemas.microsoft.com/office/mac/drawingml/2011/main" val="0"/>
             </a:ext>
           </a:extLst>
         </p:spPr>
@@ -3241,7 +3243,7 @@
           </a:prstGeom>
           <a:extLst>
             <a:ext uri="{C572A759-6A51-4108-AA02-DFA0A04FC94B}">
-              <ma14:wrappingTextBoxFlag xmlns:ma14="http://schemas.microsoft.com/office/mac/drawingml/2011/main" xmlns="" val="0"/>
+              <ma14:wrappingTextBoxFlag xmlns="" xmlns:ma14="http://schemas.microsoft.com/office/mac/drawingml/2011/main" val="0"/>
             </a:ext>
           </a:extLst>
         </p:spPr>
@@ -3724,6 +3726,1077 @@
 
 <file path=ppt/slides/slide10.xml><?xml version="1.0" encoding="utf-8"?>
 <p:sld xmlns:a="http://schemas.openxmlformats.org/drawingml/2006/main" xmlns:r="http://schemas.openxmlformats.org/officeDocument/2006/relationships" xmlns:p="http://schemas.openxmlformats.org/presentationml/2006/main">
+  <p:cSld name="Slide 8">
+    <p:spTree>
+      <p:nvGrpSpPr>
+        <p:cNvPr id="1" name=""/>
+        <p:cNvGrpSpPr/>
+        <p:nvPr/>
+      </p:nvGrpSpPr>
+      <p:grpSpPr>
+        <a:xfrm>
+          <a:off x="0" y="0"/>
+          <a:ext cx="0" cy="0"/>
+          <a:chOff x="0" y="0"/>
+          <a:chExt cx="0" cy="0"/>
+        </a:xfrm>
+      </p:grpSpPr>
+      <p:sp>
+        <p:nvSpPr>
+          <p:cNvPr id="2" name="Text 0"/>
+          <p:cNvSpPr>
+            <a:spLocks noGrp="1"/>
+          </p:cNvSpPr>
+          <p:nvPr>
+            <p:ph type="title" idx="100" hasCustomPrompt="1"/>
+          </p:nvPr>
+        </p:nvSpPr>
+        <p:spPr>
+          <a:xfrm>
+            <a:off x="548640" y="320040"/>
+            <a:ext cx="11064240" cy="777240"/>
+          </a:xfrm>
+          <a:prstGeom prst="rect">
+            <a:avLst/>
+          </a:prstGeom>
+          <a:noFill/>
+          <a:ln/>
+        </p:spPr>
+        <p:txBody>
+          <a:bodyPr wrap="square" lIns="0" tIns="0" rIns="0" bIns="0" rtlCol="0" anchor="ctr"/>
+          <a:lstStyle/>
+          <a:p>
+            <a:pPr marL="0" indent="0" algn="l">
+              <a:buNone/>
+            </a:pPr>
+            <a:r>
+              <a:rPr lang="en-US" altLang="zh-TW" sz="3200" b="1" dirty="0">
+                <a:solidFill>
+                  <a:srgbClr val="FF0000"/>
+                </a:solidFill>
+              </a:rPr>
+              <a:t>※</a:t>
+            </a:r>
+            <a:r>
+              <a:rPr lang="en-US" altLang="zh-TW" sz="3200" b="1" dirty="0">
+                <a:solidFill>
+                  <a:schemeClr val="tx2"/>
+                </a:solidFill>
+              </a:rPr>
+              <a:t> </a:t>
+            </a:r>
+            <a:r>
+              <a:rPr lang="en-US" sz="3200" b="1" dirty="0" err="1">
+                <a:solidFill>
+                  <a:schemeClr val="tx2"/>
+                </a:solidFill>
+              </a:rPr>
+              <a:t>比對靠什麼：purl</a:t>
+            </a:r>
+            <a:r>
+              <a:rPr lang="en-US" sz="3200" b="1" dirty="0">
+                <a:solidFill>
+                  <a:schemeClr val="tx2"/>
+                </a:solidFill>
+              </a:rPr>
+              <a:t> 對上 CVE</a:t>
+            </a:r>
+            <a:endParaRPr lang="en-US" sz="3200" dirty="0"/>
+          </a:p>
+        </p:txBody>
+      </p:sp>
+      <p:sp>
+        <p:nvSpPr>
+          <p:cNvPr id="3" name="card-114"/>
+          <p:cNvSpPr/>
+          <p:nvPr/>
+        </p:nvSpPr>
+        <p:spPr>
+          <a:xfrm>
+            <a:off x="548640" y="1371600"/>
+            <a:ext cx="11064240" cy="2057400"/>
+          </a:xfrm>
+          <a:prstGeom prst="roundRect">
+            <a:avLst>
+              <a:gd name="adj" fmla="val 5333"/>
+            </a:avLst>
+          </a:prstGeom>
+          <a:solidFill>
+            <a:schemeClr val="bg2"/>
+          </a:solidFill>
+          <a:ln/>
+        </p:spPr>
+        <p:txBody>
+          <a:bodyPr/>
+          <a:lstStyle/>
+          <a:p>
+            <a:endParaRPr lang="zh-TW" altLang="en-US"/>
+          </a:p>
+        </p:txBody>
+      </p:sp>
+      <p:sp>
+        <p:nvSpPr>
+          <p:cNvPr id="4" name="txt-115"/>
+          <p:cNvSpPr txBox="1"/>
+          <p:nvPr/>
+        </p:nvSpPr>
+        <p:spPr>
+          <a:xfrm>
+            <a:off x="822960" y="1508760"/>
+            <a:ext cx="7315200" cy="365760"/>
+          </a:xfrm>
+          <a:prstGeom prst="rect">
+            <a:avLst/>
+          </a:prstGeom>
+          <a:noFill/>
+          <a:ln/>
+        </p:spPr>
+        <p:txBody>
+          <a:bodyPr wrap="square" lIns="0" tIns="0" rIns="0" bIns="0" rtlCol="0" anchor="t"/>
+          <a:lstStyle/>
+          <a:p>
+            <a:pPr marL="0" indent="0">
+              <a:buNone/>
+            </a:pPr>
+            <a:r>
+              <a:rPr lang="en-US" sz="1600" b="1" dirty="0">
+                <a:solidFill>
+                  <a:schemeClr val="tx2"/>
+                </a:solidFill>
+              </a:rPr>
+              <a:t>purl（Package URL）</a:t>
+            </a:r>
+            <a:r>
+              <a:rPr lang="en-US" sz="1600" dirty="0">
+                <a:solidFill>
+                  <a:schemeClr val="tx2"/>
+                </a:solidFill>
+              </a:rPr>
+              <a:t>：元件的身分證</a:t>
+            </a:r>
+            <a:endParaRPr lang="en-US" sz="1600" dirty="0"/>
+          </a:p>
+        </p:txBody>
+      </p:sp>
+      <p:sp>
+        <p:nvSpPr>
+          <p:cNvPr id="5" name="txt-116"/>
+          <p:cNvSpPr txBox="1"/>
+          <p:nvPr/>
+        </p:nvSpPr>
+        <p:spPr>
+          <a:xfrm>
+            <a:off x="822960" y="1965960"/>
+            <a:ext cx="6858000" cy="640080"/>
+          </a:xfrm>
+          <a:prstGeom prst="rect">
+            <a:avLst/>
+          </a:prstGeom>
+          <a:noFill/>
+          <a:ln/>
+        </p:spPr>
+        <p:txBody>
+          <a:bodyPr wrap="square" lIns="0" tIns="0" rIns="0" bIns="0" rtlCol="0" anchor="ctr"/>
+          <a:lstStyle/>
+          <a:p>
+            <a:pPr marL="0" indent="0">
+              <a:buNone/>
+            </a:pPr>
+            <a:r>
+              <a:rPr lang="en-US" sz="2800" b="1" dirty="0">
+                <a:solidFill>
+                  <a:srgbClr val="0F3B3A"/>
+                </a:solidFill>
+                <a:latin typeface="Courier New" pitchFamily="34" charset="0"/>
+                <a:ea typeface="Courier New" pitchFamily="34" charset="-122"/>
+                <a:cs typeface="Courier New" pitchFamily="34" charset="-120"/>
+              </a:rPr>
+              <a:t>pkg:</a:t>
+            </a:r>
+            <a:r>
+              <a:rPr lang="en-US" sz="2800" b="1" dirty="0">
+                <a:solidFill>
+                  <a:srgbClr val="3D5A80"/>
+                </a:solidFill>
+                <a:latin typeface="Courier New" pitchFamily="34" charset="0"/>
+                <a:ea typeface="Courier New" pitchFamily="34" charset="-122"/>
+                <a:cs typeface="Courier New" pitchFamily="34" charset="-120"/>
+              </a:rPr>
+              <a:t>nuget</a:t>
+            </a:r>
+            <a:r>
+              <a:rPr lang="en-US" sz="2800" b="1" dirty="0">
+                <a:solidFill>
+                  <a:srgbClr val="0F3B3A"/>
+                </a:solidFill>
+                <a:latin typeface="Courier New" pitchFamily="34" charset="0"/>
+                <a:ea typeface="Courier New" pitchFamily="34" charset="-122"/>
+                <a:cs typeface="Courier New" pitchFamily="34" charset="-120"/>
+              </a:rPr>
+              <a:t>/</a:t>
+            </a:r>
+            <a:r>
+              <a:rPr lang="en-US" sz="2800" b="1" dirty="0">
+                <a:solidFill>
+                  <a:srgbClr val="0E7C6B"/>
+                </a:solidFill>
+                <a:latin typeface="Courier New" pitchFamily="34" charset="0"/>
+                <a:ea typeface="Courier New" pitchFamily="34" charset="-122"/>
+                <a:cs typeface="Courier New" pitchFamily="34" charset="-120"/>
+              </a:rPr>
+              <a:t>Newtonsoft.Json</a:t>
+            </a:r>
+            <a:r>
+              <a:rPr lang="en-US" sz="2800" b="1" dirty="0">
+                <a:solidFill>
+                  <a:srgbClr val="0F3B3A"/>
+                </a:solidFill>
+                <a:latin typeface="Courier New" pitchFamily="34" charset="0"/>
+                <a:ea typeface="Courier New" pitchFamily="34" charset="-122"/>
+                <a:cs typeface="Courier New" pitchFamily="34" charset="-120"/>
+              </a:rPr>
+              <a:t>@</a:t>
+            </a:r>
+            <a:r>
+              <a:rPr lang="en-US" sz="2800" b="1" dirty="0">
+                <a:solidFill>
+                  <a:srgbClr val="B7791F"/>
+                </a:solidFill>
+                <a:latin typeface="Courier New" pitchFamily="34" charset="0"/>
+                <a:ea typeface="Courier New" pitchFamily="34" charset="-122"/>
+                <a:cs typeface="Courier New" pitchFamily="34" charset="-120"/>
+              </a:rPr>
+              <a:t>13.0.3</a:t>
+            </a:r>
+            <a:endParaRPr lang="en-US" sz="2800" dirty="0"/>
+          </a:p>
+        </p:txBody>
+      </p:sp>
+      <p:sp>
+        <p:nvSpPr>
+          <p:cNvPr id="6" name="txt-117"/>
+          <p:cNvSpPr txBox="1"/>
+          <p:nvPr/>
+        </p:nvSpPr>
+        <p:spPr>
+          <a:xfrm>
+            <a:off x="822960" y="2697480"/>
+            <a:ext cx="6858000" cy="365760"/>
+          </a:xfrm>
+          <a:prstGeom prst="rect">
+            <a:avLst/>
+          </a:prstGeom>
+          <a:noFill/>
+          <a:ln/>
+        </p:spPr>
+        <p:txBody>
+          <a:bodyPr wrap="square" lIns="0" tIns="0" rIns="0" bIns="0" rtlCol="0" anchor="t"/>
+          <a:lstStyle/>
+          <a:p>
+            <a:pPr marL="0" indent="0">
+              <a:buNone/>
+            </a:pPr>
+            <a:r>
+              <a:rPr lang="en-US" sz="1400" b="1" dirty="0">
+                <a:solidFill>
+                  <a:srgbClr val="3D5A80"/>
+                </a:solidFill>
+              </a:rPr>
+              <a:t>type</a:t>
+            </a:r>
+            <a:r>
+              <a:rPr lang="en-US" sz="1400" dirty="0">
+                <a:solidFill>
+                  <a:schemeClr val="accent6"/>
+                </a:solidFill>
+              </a:rPr>
+              <a:t> 生態系　　</a:t>
+            </a:r>
+            <a:r>
+              <a:rPr lang="en-US" sz="1400" b="1" dirty="0">
+                <a:solidFill>
+                  <a:srgbClr val="0E7C6B"/>
+                </a:solidFill>
+              </a:rPr>
+              <a:t>name</a:t>
+            </a:r>
+            <a:r>
+              <a:rPr lang="en-US" sz="1400" dirty="0">
+                <a:solidFill>
+                  <a:schemeClr val="accent6"/>
+                </a:solidFill>
+              </a:rPr>
+              <a:t> 套件名稱　　</a:t>
+            </a:r>
+            <a:r>
+              <a:rPr lang="en-US" sz="1400" b="1" dirty="0">
+                <a:solidFill>
+                  <a:srgbClr val="B7791F"/>
+                </a:solidFill>
+              </a:rPr>
+              <a:t>version</a:t>
+            </a:r>
+            <a:r>
+              <a:rPr lang="en-US" sz="1400" dirty="0">
+                <a:solidFill>
+                  <a:schemeClr val="accent6"/>
+                </a:solidFill>
+              </a:rPr>
+              <a:t> 版本</a:t>
+            </a:r>
+            <a:endParaRPr lang="en-US" sz="1400" dirty="0"/>
+          </a:p>
+        </p:txBody>
+      </p:sp>
+      <p:sp>
+        <p:nvSpPr>
+          <p:cNvPr id="7" name="txt-118"/>
+          <p:cNvSpPr txBox="1"/>
+          <p:nvPr/>
+        </p:nvSpPr>
+        <p:spPr>
+          <a:xfrm>
+            <a:off x="7863840" y="1965960"/>
+            <a:ext cx="3474720" cy="1097280"/>
+          </a:xfrm>
+          <a:prstGeom prst="rect">
+            <a:avLst/>
+          </a:prstGeom>
+          <a:noFill/>
+          <a:ln/>
+        </p:spPr>
+        <p:txBody>
+          <a:bodyPr wrap="square" lIns="0" tIns="0" rIns="0" bIns="0" rtlCol="0" anchor="ctr"/>
+          <a:lstStyle/>
+          <a:p>
+            <a:pPr marL="0" indent="0">
+              <a:buNone/>
+            </a:pPr>
+            <a:r>
+              <a:rPr lang="en-US" sz="1300" dirty="0">
+                <a:solidFill>
+                  <a:schemeClr val="accent6"/>
+                </a:solidFill>
+              </a:rPr>
+              <a:t>完整結構還可帶 namespace、?qualifiers、#subpath；空白等字元需百分比編碼</a:t>
+            </a:r>
+            <a:endParaRPr lang="en-US" sz="1300" dirty="0"/>
+          </a:p>
+        </p:txBody>
+      </p:sp>
+      <p:sp>
+        <p:nvSpPr>
+          <p:cNvPr id="8" name="iconbg-119"/>
+          <p:cNvSpPr/>
+          <p:nvPr/>
+        </p:nvSpPr>
+        <p:spPr>
+          <a:xfrm>
+            <a:off x="1417320" y="3749040"/>
+            <a:ext cx="777240" cy="777240"/>
+          </a:xfrm>
+          <a:prstGeom prst="ellipse">
+            <a:avLst/>
+          </a:prstGeom>
+          <a:solidFill>
+            <a:srgbClr val="0E7C6B"/>
+          </a:solidFill>
+          <a:ln/>
+        </p:spPr>
+        <p:txBody>
+          <a:bodyPr/>
+          <a:lstStyle/>
+          <a:p>
+            <a:endParaRPr lang="zh-TW" altLang="en-US"/>
+          </a:p>
+        </p:txBody>
+      </p:sp>
+      <p:pic>
+        <p:nvPicPr>
+          <p:cNvPr id="9" name="icon-120" descr="preencoded.png"/>
+          <p:cNvPicPr>
+            <a:picLocks noChangeAspect="1"/>
+          </p:cNvPicPr>
+          <p:nvPr/>
+        </p:nvPicPr>
+        <p:blipFill>
+          <a:blip r:embed="rId3"/>
+          <a:stretch>
+            <a:fillRect/>
+          </a:stretch>
+        </p:blipFill>
+        <p:spPr>
+          <a:xfrm>
+            <a:off x="1611630" y="3943350"/>
+            <a:ext cx="388620" cy="388620"/>
+          </a:xfrm>
+          <a:prstGeom prst="rect">
+            <a:avLst/>
+          </a:prstGeom>
+        </p:spPr>
+      </p:pic>
+      <p:sp>
+        <p:nvSpPr>
+          <p:cNvPr id="10" name="txt-121"/>
+          <p:cNvSpPr txBox="1"/>
+          <p:nvPr/>
+        </p:nvSpPr>
+        <p:spPr>
+          <a:xfrm>
+            <a:off x="548640" y="4617720"/>
+            <a:ext cx="2514600" cy="365760"/>
+          </a:xfrm>
+          <a:prstGeom prst="rect">
+            <a:avLst/>
+          </a:prstGeom>
+          <a:noFill/>
+          <a:ln/>
+        </p:spPr>
+        <p:txBody>
+          <a:bodyPr wrap="square" lIns="0" tIns="0" rIns="0" bIns="0" rtlCol="0" anchor="t"/>
+          <a:lstStyle/>
+          <a:p>
+            <a:pPr marL="0" indent="0" algn="ctr">
+              <a:buNone/>
+            </a:pPr>
+            <a:r>
+              <a:rPr lang="en-US" sz="1600" b="1" dirty="0">
+                <a:solidFill>
+                  <a:schemeClr val="tx2"/>
+                </a:solidFill>
+              </a:rPr>
+              <a:t>SBOM 元件</a:t>
+            </a:r>
+            <a:endParaRPr lang="en-US" sz="1600" dirty="0"/>
+          </a:p>
+        </p:txBody>
+      </p:sp>
+      <p:sp>
+        <p:nvSpPr>
+          <p:cNvPr id="11" name="txt-122"/>
+          <p:cNvSpPr txBox="1"/>
+          <p:nvPr/>
+        </p:nvSpPr>
+        <p:spPr>
+          <a:xfrm>
+            <a:off x="548640" y="4983480"/>
+            <a:ext cx="2514600" cy="365760"/>
+          </a:xfrm>
+          <a:prstGeom prst="rect">
+            <a:avLst/>
+          </a:prstGeom>
+          <a:noFill/>
+          <a:ln/>
+        </p:spPr>
+        <p:txBody>
+          <a:bodyPr wrap="square" lIns="0" tIns="0" rIns="0" bIns="0" rtlCol="0" anchor="t"/>
+          <a:lstStyle/>
+          <a:p>
+            <a:pPr marL="0" indent="0" algn="ctr">
+              <a:buNone/>
+            </a:pPr>
+            <a:r>
+              <a:rPr lang="en-US" sz="1300" dirty="0">
+                <a:solidFill>
+                  <a:schemeClr val="accent6"/>
+                </a:solidFill>
+              </a:rPr>
+              <a:t>每個元件帶 purl</a:t>
+            </a:r>
+            <a:endParaRPr lang="en-US" sz="1300" dirty="0"/>
+          </a:p>
+        </p:txBody>
+      </p:sp>
+      <p:sp>
+        <p:nvSpPr>
+          <p:cNvPr id="12" name="arrow-123"/>
+          <p:cNvSpPr/>
+          <p:nvPr/>
+        </p:nvSpPr>
+        <p:spPr>
+          <a:xfrm>
+            <a:off x="2697480" y="4133088"/>
+            <a:ext cx="1005840" cy="914"/>
+          </a:xfrm>
+          <a:prstGeom prst="line">
+            <a:avLst/>
+          </a:prstGeom>
+          <a:noFill/>
+          <a:ln w="25400">
+            <a:solidFill>
+              <a:srgbClr val="5C6B73"/>
+            </a:solidFill>
+            <a:prstDash val="solid"/>
+            <a:tailEnd type="triangle"/>
+          </a:ln>
+        </p:spPr>
+        <p:txBody>
+          <a:bodyPr/>
+          <a:lstStyle/>
+          <a:p>
+            <a:endParaRPr lang="zh-TW" altLang="en-US"/>
+          </a:p>
+        </p:txBody>
+      </p:sp>
+      <p:sp>
+        <p:nvSpPr>
+          <p:cNvPr id="13" name="iconbg-124"/>
+          <p:cNvSpPr/>
+          <p:nvPr/>
+        </p:nvSpPr>
+        <p:spPr>
+          <a:xfrm>
+            <a:off x="4251960" y="3749040"/>
+            <a:ext cx="777240" cy="777240"/>
+          </a:xfrm>
+          <a:prstGeom prst="ellipse">
+            <a:avLst/>
+          </a:prstGeom>
+          <a:solidFill>
+            <a:srgbClr val="0E7C6B"/>
+          </a:solidFill>
+          <a:ln/>
+        </p:spPr>
+        <p:txBody>
+          <a:bodyPr/>
+          <a:lstStyle/>
+          <a:p>
+            <a:endParaRPr lang="zh-TW" altLang="en-US"/>
+          </a:p>
+        </p:txBody>
+      </p:sp>
+      <p:pic>
+        <p:nvPicPr>
+          <p:cNvPr id="14" name="icon-125" descr="preencoded.png"/>
+          <p:cNvPicPr>
+            <a:picLocks noChangeAspect="1"/>
+          </p:cNvPicPr>
+          <p:nvPr/>
+        </p:nvPicPr>
+        <p:blipFill>
+          <a:blip r:embed="rId4"/>
+          <a:stretch>
+            <a:fillRect/>
+          </a:stretch>
+        </p:blipFill>
+        <p:spPr>
+          <a:xfrm>
+            <a:off x="4446270" y="3943350"/>
+            <a:ext cx="388620" cy="388620"/>
+          </a:xfrm>
+          <a:prstGeom prst="rect">
+            <a:avLst/>
+          </a:prstGeom>
+        </p:spPr>
+      </p:pic>
+      <p:sp>
+        <p:nvSpPr>
+          <p:cNvPr id="15" name="txt-126"/>
+          <p:cNvSpPr txBox="1"/>
+          <p:nvPr/>
+        </p:nvSpPr>
+        <p:spPr>
+          <a:xfrm>
+            <a:off x="3383280" y="4617720"/>
+            <a:ext cx="2514600" cy="365760"/>
+          </a:xfrm>
+          <a:prstGeom prst="rect">
+            <a:avLst/>
+          </a:prstGeom>
+          <a:noFill/>
+          <a:ln/>
+        </p:spPr>
+        <p:txBody>
+          <a:bodyPr wrap="square" lIns="0" tIns="0" rIns="0" bIns="0" rtlCol="0" anchor="t"/>
+          <a:lstStyle/>
+          <a:p>
+            <a:pPr marL="0" indent="0" algn="ctr">
+              <a:buNone/>
+            </a:pPr>
+            <a:r>
+              <a:rPr lang="en-US" sz="1600" b="1" dirty="0">
+                <a:solidFill>
+                  <a:schemeClr val="tx2"/>
+                </a:solidFill>
+              </a:rPr>
+              <a:t>弱點資料庫</a:t>
+            </a:r>
+            <a:endParaRPr lang="en-US" sz="1600" dirty="0"/>
+          </a:p>
+        </p:txBody>
+      </p:sp>
+      <p:sp>
+        <p:nvSpPr>
+          <p:cNvPr id="16" name="txt-127"/>
+          <p:cNvSpPr txBox="1"/>
+          <p:nvPr/>
+        </p:nvSpPr>
+        <p:spPr>
+          <a:xfrm>
+            <a:off x="3383280" y="4983480"/>
+            <a:ext cx="2514600" cy="365760"/>
+          </a:xfrm>
+          <a:prstGeom prst="rect">
+            <a:avLst/>
+          </a:prstGeom>
+          <a:noFill/>
+          <a:ln/>
+        </p:spPr>
+        <p:txBody>
+          <a:bodyPr wrap="square" lIns="0" tIns="0" rIns="0" bIns="0" rtlCol="0" anchor="t"/>
+          <a:lstStyle/>
+          <a:p>
+            <a:pPr marL="0" indent="0" algn="ctr">
+              <a:buNone/>
+            </a:pPr>
+            <a:r>
+              <a:rPr lang="en-US" sz="1300" dirty="0">
+                <a:solidFill>
+                  <a:schemeClr val="accent6"/>
+                </a:solidFill>
+              </a:rPr>
+              <a:t>OSV、GHSA、NVD</a:t>
+            </a:r>
+            <a:endParaRPr lang="en-US" sz="1300" dirty="0"/>
+          </a:p>
+        </p:txBody>
+      </p:sp>
+      <p:sp>
+        <p:nvSpPr>
+          <p:cNvPr id="17" name="arrow-128"/>
+          <p:cNvSpPr/>
+          <p:nvPr/>
+        </p:nvSpPr>
+        <p:spPr>
+          <a:xfrm>
+            <a:off x="5532120" y="4133088"/>
+            <a:ext cx="1005840" cy="914"/>
+          </a:xfrm>
+          <a:prstGeom prst="line">
+            <a:avLst/>
+          </a:prstGeom>
+          <a:noFill/>
+          <a:ln w="25400">
+            <a:solidFill>
+              <a:srgbClr val="5C6B73"/>
+            </a:solidFill>
+            <a:prstDash val="solid"/>
+            <a:tailEnd type="triangle"/>
+          </a:ln>
+        </p:spPr>
+        <p:txBody>
+          <a:bodyPr/>
+          <a:lstStyle/>
+          <a:p>
+            <a:endParaRPr lang="zh-TW" altLang="en-US"/>
+          </a:p>
+        </p:txBody>
+      </p:sp>
+      <p:sp>
+        <p:nvSpPr>
+          <p:cNvPr id="18" name="iconbg-129"/>
+          <p:cNvSpPr/>
+          <p:nvPr/>
+        </p:nvSpPr>
+        <p:spPr>
+          <a:xfrm>
+            <a:off x="7086600" y="3749040"/>
+            <a:ext cx="777240" cy="777240"/>
+          </a:xfrm>
+          <a:prstGeom prst="ellipse">
+            <a:avLst/>
+          </a:prstGeom>
+          <a:solidFill>
+            <a:srgbClr val="0E7C6B"/>
+          </a:solidFill>
+          <a:ln/>
+        </p:spPr>
+        <p:txBody>
+          <a:bodyPr/>
+          <a:lstStyle/>
+          <a:p>
+            <a:endParaRPr lang="zh-TW" altLang="en-US"/>
+          </a:p>
+        </p:txBody>
+      </p:sp>
+      <p:pic>
+        <p:nvPicPr>
+          <p:cNvPr id="19" name="icon-130" descr="preencoded.png"/>
+          <p:cNvPicPr>
+            <a:picLocks noChangeAspect="1"/>
+          </p:cNvPicPr>
+          <p:nvPr/>
+        </p:nvPicPr>
+        <p:blipFill>
+          <a:blip r:embed="rId5"/>
+          <a:stretch>
+            <a:fillRect/>
+          </a:stretch>
+        </p:blipFill>
+        <p:spPr>
+          <a:xfrm>
+            <a:off x="7280910" y="3943350"/>
+            <a:ext cx="388620" cy="388620"/>
+          </a:xfrm>
+          <a:prstGeom prst="rect">
+            <a:avLst/>
+          </a:prstGeom>
+        </p:spPr>
+      </p:pic>
+      <p:sp>
+        <p:nvSpPr>
+          <p:cNvPr id="20" name="txt-131"/>
+          <p:cNvSpPr txBox="1"/>
+          <p:nvPr/>
+        </p:nvSpPr>
+        <p:spPr>
+          <a:xfrm>
+            <a:off x="6217920" y="4617720"/>
+            <a:ext cx="2514600" cy="365760"/>
+          </a:xfrm>
+          <a:prstGeom prst="rect">
+            <a:avLst/>
+          </a:prstGeom>
+          <a:noFill/>
+          <a:ln/>
+        </p:spPr>
+        <p:txBody>
+          <a:bodyPr wrap="square" lIns="0" tIns="0" rIns="0" bIns="0" rtlCol="0" anchor="t"/>
+          <a:lstStyle/>
+          <a:p>
+            <a:pPr marL="0" indent="0" algn="ctr">
+              <a:buNone/>
+            </a:pPr>
+            <a:r>
+              <a:rPr lang="en-US" sz="1600" b="1" dirty="0">
+                <a:solidFill>
+                  <a:schemeClr val="tx2"/>
+                </a:solidFill>
+              </a:rPr>
+              <a:t>CVE 編號</a:t>
+            </a:r>
+            <a:endParaRPr lang="en-US" sz="1600" dirty="0"/>
+          </a:p>
+        </p:txBody>
+      </p:sp>
+      <p:sp>
+        <p:nvSpPr>
+          <p:cNvPr id="21" name="txt-132"/>
+          <p:cNvSpPr txBox="1"/>
+          <p:nvPr/>
+        </p:nvSpPr>
+        <p:spPr>
+          <a:xfrm>
+            <a:off x="6217920" y="4983480"/>
+            <a:ext cx="2514600" cy="365760"/>
+          </a:xfrm>
+          <a:prstGeom prst="rect">
+            <a:avLst/>
+          </a:prstGeom>
+          <a:noFill/>
+          <a:ln/>
+        </p:spPr>
+        <p:txBody>
+          <a:bodyPr wrap="square" lIns="0" tIns="0" rIns="0" bIns="0" rtlCol="0" anchor="t"/>
+          <a:lstStyle/>
+          <a:p>
+            <a:pPr marL="0" indent="0" algn="ctr">
+              <a:buNone/>
+            </a:pPr>
+            <a:r>
+              <a:rPr lang="en-US" sz="1300" dirty="0">
+                <a:solidFill>
+                  <a:schemeClr val="accent6"/>
+                </a:solidFill>
+              </a:rPr>
+              <a:t>MITRE 營運，CNA 分派</a:t>
+            </a:r>
+            <a:endParaRPr lang="en-US" sz="1300" dirty="0"/>
+          </a:p>
+        </p:txBody>
+      </p:sp>
+      <p:sp>
+        <p:nvSpPr>
+          <p:cNvPr id="22" name="arrow-133"/>
+          <p:cNvSpPr/>
+          <p:nvPr/>
+        </p:nvSpPr>
+        <p:spPr>
+          <a:xfrm>
+            <a:off x="8366760" y="4133088"/>
+            <a:ext cx="1005840" cy="914"/>
+          </a:xfrm>
+          <a:prstGeom prst="line">
+            <a:avLst/>
+          </a:prstGeom>
+          <a:noFill/>
+          <a:ln w="25400">
+            <a:solidFill>
+              <a:srgbClr val="5C6B73"/>
+            </a:solidFill>
+            <a:prstDash val="solid"/>
+            <a:tailEnd type="triangle"/>
+          </a:ln>
+        </p:spPr>
+        <p:txBody>
+          <a:bodyPr/>
+          <a:lstStyle/>
+          <a:p>
+            <a:endParaRPr lang="zh-TW" altLang="en-US"/>
+          </a:p>
+        </p:txBody>
+      </p:sp>
+      <p:sp>
+        <p:nvSpPr>
+          <p:cNvPr id="23" name="iconbg-134"/>
+          <p:cNvSpPr/>
+          <p:nvPr/>
+        </p:nvSpPr>
+        <p:spPr>
+          <a:xfrm>
+            <a:off x="9921240" y="3749040"/>
+            <a:ext cx="777240" cy="777240"/>
+          </a:xfrm>
+          <a:prstGeom prst="ellipse">
+            <a:avLst/>
+          </a:prstGeom>
+          <a:solidFill>
+            <a:srgbClr val="E8A33D"/>
+          </a:solidFill>
+          <a:ln/>
+        </p:spPr>
+        <p:txBody>
+          <a:bodyPr/>
+          <a:lstStyle/>
+          <a:p>
+            <a:endParaRPr lang="zh-TW" altLang="en-US"/>
+          </a:p>
+        </p:txBody>
+      </p:sp>
+      <p:pic>
+        <p:nvPicPr>
+          <p:cNvPr id="24" name="icon-135" descr="preencoded.png"/>
+          <p:cNvPicPr>
+            <a:picLocks noChangeAspect="1"/>
+          </p:cNvPicPr>
+          <p:nvPr/>
+        </p:nvPicPr>
+        <p:blipFill>
+          <a:blip r:embed="rId6"/>
+          <a:stretch>
+            <a:fillRect/>
+          </a:stretch>
+        </p:blipFill>
+        <p:spPr>
+          <a:xfrm>
+            <a:off x="10115550" y="3943350"/>
+            <a:ext cx="388620" cy="388620"/>
+          </a:xfrm>
+          <a:prstGeom prst="rect">
+            <a:avLst/>
+          </a:prstGeom>
+        </p:spPr>
+      </p:pic>
+      <p:sp>
+        <p:nvSpPr>
+          <p:cNvPr id="25" name="txt-136"/>
+          <p:cNvSpPr txBox="1"/>
+          <p:nvPr/>
+        </p:nvSpPr>
+        <p:spPr>
+          <a:xfrm>
+            <a:off x="9052560" y="4617720"/>
+            <a:ext cx="2514600" cy="365760"/>
+          </a:xfrm>
+          <a:prstGeom prst="rect">
+            <a:avLst/>
+          </a:prstGeom>
+          <a:noFill/>
+          <a:ln/>
+        </p:spPr>
+        <p:txBody>
+          <a:bodyPr wrap="square" lIns="0" tIns="0" rIns="0" bIns="0" rtlCol="0" anchor="t"/>
+          <a:lstStyle/>
+          <a:p>
+            <a:pPr marL="0" indent="0" algn="ctr">
+              <a:buNone/>
+            </a:pPr>
+            <a:r>
+              <a:rPr lang="en-US" sz="1600" b="1" dirty="0">
+                <a:solidFill>
+                  <a:schemeClr val="tx2"/>
+                </a:solidFill>
+              </a:rPr>
+              <a:t>VEX 研判</a:t>
+            </a:r>
+            <a:endParaRPr lang="en-US" sz="1600" dirty="0"/>
+          </a:p>
+        </p:txBody>
+      </p:sp>
+      <p:sp>
+        <p:nvSpPr>
+          <p:cNvPr id="26" name="txt-137"/>
+          <p:cNvSpPr txBox="1"/>
+          <p:nvPr/>
+        </p:nvSpPr>
+        <p:spPr>
+          <a:xfrm>
+            <a:off x="9052560" y="4983480"/>
+            <a:ext cx="2514600" cy="365760"/>
+          </a:xfrm>
+          <a:prstGeom prst="rect">
+            <a:avLst/>
+          </a:prstGeom>
+          <a:noFill/>
+          <a:ln/>
+        </p:spPr>
+        <p:txBody>
+          <a:bodyPr wrap="square" lIns="0" tIns="0" rIns="0" bIns="0" rtlCol="0" anchor="t"/>
+          <a:lstStyle/>
+          <a:p>
+            <a:pPr marL="0" indent="0" algn="ctr">
+              <a:buNone/>
+            </a:pPr>
+            <a:r>
+              <a:rPr lang="en-US" sz="1300" dirty="0">
+                <a:solidFill>
+                  <a:schemeClr val="accent6"/>
+                </a:solidFill>
+              </a:rPr>
+              <a:t>對我是否可利用？</a:t>
+            </a:r>
+            <a:endParaRPr lang="en-US" sz="1300" dirty="0"/>
+          </a:p>
+        </p:txBody>
+      </p:sp>
+      <p:sp>
+        <p:nvSpPr>
+          <p:cNvPr id="27" name="card-138"/>
+          <p:cNvSpPr/>
+          <p:nvPr/>
+        </p:nvSpPr>
+        <p:spPr>
+          <a:xfrm>
+            <a:off x="548640" y="5532120"/>
+            <a:ext cx="11064240" cy="685800"/>
+          </a:xfrm>
+          <a:prstGeom prst="roundRect">
+            <a:avLst>
+              <a:gd name="adj" fmla="val 16000"/>
+            </a:avLst>
+          </a:prstGeom>
+          <a:solidFill>
+            <a:srgbClr val="FBEDEE"/>
+          </a:solidFill>
+          <a:ln/>
+        </p:spPr>
+        <p:txBody>
+          <a:bodyPr/>
+          <a:lstStyle/>
+          <a:p>
+            <a:endParaRPr lang="zh-TW" altLang="en-US"/>
+          </a:p>
+        </p:txBody>
+      </p:sp>
+      <p:sp>
+        <p:nvSpPr>
+          <p:cNvPr id="28" name="txt-139"/>
+          <p:cNvSpPr txBox="1"/>
+          <p:nvPr/>
+        </p:nvSpPr>
+        <p:spPr>
+          <a:xfrm>
+            <a:off x="777240" y="5532120"/>
+            <a:ext cx="10607040" cy="685800"/>
+          </a:xfrm>
+          <a:prstGeom prst="rect">
+            <a:avLst/>
+          </a:prstGeom>
+          <a:noFill/>
+          <a:ln/>
+        </p:spPr>
+        <p:txBody>
+          <a:bodyPr wrap="square" lIns="0" tIns="0" rIns="0" bIns="0" rtlCol="0" anchor="ctr"/>
+          <a:lstStyle/>
+          <a:p>
+            <a:pPr marL="0" indent="0">
+              <a:buNone/>
+            </a:pPr>
+            <a:r>
+              <a:rPr lang="en-US" sz="1400" b="1" dirty="0">
+                <a:solidFill>
+                  <a:srgbClr val="C8424F"/>
+                </a:solidFill>
+              </a:rPr>
+              <a:t>沒有 purl → 掃描器不會比對 → 「0 漏洞」不代表安全。</a:t>
+            </a:r>
+            <a:r>
+              <a:rPr lang="en-US" sz="1400" dirty="0">
+                <a:solidFill>
+                  <a:schemeClr val="tx1"/>
+                </a:solidFill>
+              </a:rPr>
+              <a:t>　實測 SBOM 中 6 個 application 元件就沒有 purl。</a:t>
+            </a:r>
+            <a:endParaRPr lang="en-US" sz="1400" dirty="0"/>
+          </a:p>
+        </p:txBody>
+      </p:sp>
+      <p:sp>
+        <p:nvSpPr>
+          <p:cNvPr id="29" name="Slide Number Placeholder 0"/>
+          <p:cNvSpPr>
+            <a:spLocks noGrp="1"/>
+          </p:cNvSpPr>
+          <p:nvPr>
+            <p:ph type="sldNum" sz="quarter" idx="4294967295"/>
+          </p:nvPr>
+        </p:nvSpPr>
+        <p:spPr>
+          <a:xfrm>
+            <a:off x="11155680" y="6400800"/>
+            <a:ext cx="457200" cy="274320"/>
+          </a:xfrm>
+          <a:prstGeom prst="rect">
+            <a:avLst/>
+          </a:prstGeom>
+          <a:extLst>
+            <a:ext uri="{C572A759-6A51-4108-AA02-DFA0A04FC94B}">
+              <ma14:wrappingTextBoxFlag xmlns="" xmlns:ma14="http://schemas.microsoft.com/office/mac/drawingml/2011/main" val="0"/>
+            </a:ext>
+          </a:extLst>
+        </p:spPr>
+        <p:txBody>
+          <a:bodyPr/>
+          <a:lstStyle>
+            <a:lvl1pPr>
+              <a:defRPr sz="1000">
+                <a:solidFill>
+                  <a:schemeClr val="accent6"/>
+                </a:solidFill>
+              </a:defRPr>
+            </a:lvl1pPr>
+          </a:lstStyle>
+          <a:p>
+            <a:pPr algn="r"/>
+            <a:fld id="{F7021451-1387-4CA6-816F-3879F97B5CBC}" type="slidenum">
+              <a:rPr lang="en-US" b="0"/>
+              <a:t>10</a:t>
+            </a:fld>
+            <a:endParaRPr lang="en-US"/>
+          </a:p>
+        </p:txBody>
+      </p:sp>
+    </p:spTree>
+  </p:cSld>
+  <p:clrMapOvr>
+    <a:masterClrMapping/>
+  </p:clrMapOvr>
+</p:sld>
+</file>
+
+<file path=ppt/slides/slide11.xml><?xml version="1.0" encoding="utf-8"?>
+<p:sld xmlns:a="http://schemas.openxmlformats.org/drawingml/2006/main" xmlns:r="http://schemas.openxmlformats.org/officeDocument/2006/relationships" xmlns:p="http://schemas.openxmlformats.org/presentationml/2006/main">
   <p:cSld name="Slide 9">
     <p:spTree>
       <p:nvGrpSpPr>
@@ -4789,7 +5862,7 @@
           </a:prstGeom>
           <a:extLst>
             <a:ext uri="{C572A759-6A51-4108-AA02-DFA0A04FC94B}">
-              <ma14:wrappingTextBoxFlag xmlns:ma14="http://schemas.microsoft.com/office/mac/drawingml/2011/main" xmlns="" val="0"/>
+              <ma14:wrappingTextBoxFlag xmlns="" xmlns:ma14="http://schemas.microsoft.com/office/mac/drawingml/2011/main" val="0"/>
             </a:ext>
           </a:extLst>
         </p:spPr>
@@ -4808,7 +5881,7 @@
             <a:pPr algn="r"/>
             <a:fld id="{F7021451-1387-4CA6-816F-3879F97B5CBC}" type="slidenum">
               <a:rPr lang="en-US" b="0"/>
-              <a:t>10</a:t>
+              <a:t>11</a:t>
             </a:fld>
             <a:endParaRPr lang="en-US"/>
           </a:p>
@@ -4822,7 +5895,7 @@
 </p:sld>
 </file>
 
-<file path=ppt/slides/slide11.xml><?xml version="1.0" encoding="utf-8"?>
+<file path=ppt/slides/slide12.xml><?xml version="1.0" encoding="utf-8"?>
 <p:sld xmlns:a="http://schemas.openxmlformats.org/drawingml/2006/main" xmlns:r="http://schemas.openxmlformats.org/officeDocument/2006/relationships" xmlns:p="http://schemas.openxmlformats.org/presentationml/2006/main">
   <p:cSld name="Slide 10">
     <p:spTree>
@@ -5642,7 +6715,29 @@
                 <a:ea typeface="Courier New" pitchFamily="34" charset="-122"/>
                 <a:cs typeface="Courier New" pitchFamily="34" charset="-120"/>
               </a:rPr>
-              <a:t>    "status": "not_affected",</a:t>
+              <a:t>    "status": </a:t>
+            </a:r>
+            <a:r>
+              <a:rPr lang="en-US" sz="1200" b="1" dirty="0">
+                <a:solidFill>
+                  <a:srgbClr val="00B0F0"/>
+                </a:solidFill>
+                <a:latin typeface="Courier New" pitchFamily="34" charset="0"/>
+                <a:ea typeface="Courier New" pitchFamily="34" charset="-122"/>
+                <a:cs typeface="Courier New" pitchFamily="34" charset="-120"/>
+              </a:rPr>
+              <a:t>"not_affected"</a:t>
+            </a:r>
+            <a:r>
+              <a:rPr lang="en-US" sz="1200" dirty="0">
+                <a:solidFill>
+                  <a:srgbClr val="E6F0EE"/>
+                </a:solidFill>
+                <a:latin typeface="Courier New" pitchFamily="34" charset="0"/>
+                <a:ea typeface="Courier New" pitchFamily="34" charset="-122"/>
+                <a:cs typeface="Courier New" pitchFamily="34" charset="-120"/>
+              </a:rPr>
+              <a:t>,</a:t>
             </a:r>
             <a:endParaRPr lang="en-US" sz="1200" dirty="0"/>
           </a:p>
@@ -5784,7 +6879,7 @@
           </a:prstGeom>
           <a:extLst>
             <a:ext uri="{C572A759-6A51-4108-AA02-DFA0A04FC94B}">
-              <ma14:wrappingTextBoxFlag xmlns:ma14="http://schemas.microsoft.com/office/mac/drawingml/2011/main" xmlns="" val="0"/>
+              <ma14:wrappingTextBoxFlag xmlns="" xmlns:ma14="http://schemas.microsoft.com/office/mac/drawingml/2011/main" val="0"/>
             </a:ext>
           </a:extLst>
         </p:spPr>
@@ -5803,7 +6898,7 @@
             <a:pPr algn="r"/>
             <a:fld id="{F7021451-1387-4CA6-816F-3879F97B5CBC}" type="slidenum">
               <a:rPr lang="en-US" b="0"/>
-              <a:t>11</a:t>
+              <a:t>12</a:t>
             </a:fld>
             <a:endParaRPr lang="en-US"/>
           </a:p>
@@ -5817,7 +6912,7 @@
 </p:sld>
 </file>
 
-<file path=ppt/slides/slide12.xml><?xml version="1.0" encoding="utf-8"?>
+<file path=ppt/slides/slide13.xml><?xml version="1.0" encoding="utf-8"?>
 <p:sld xmlns:a="http://schemas.openxmlformats.org/drawingml/2006/main" xmlns:r="http://schemas.openxmlformats.org/officeDocument/2006/relationships" xmlns:p="http://schemas.openxmlformats.org/presentationml/2006/main">
   <p:cSld name="Slide 11">
     <p:spTree>
@@ -5958,7 +7053,7 @@
 </p:sld>
 </file>
 
-<file path=ppt/slides/slide13.xml><?xml version="1.0" encoding="utf-8"?>
+<file path=ppt/slides/slide14.xml><?xml version="1.0" encoding="utf-8"?>
 <p:sld xmlns:a="http://schemas.openxmlformats.org/drawingml/2006/main" xmlns:r="http://schemas.openxmlformats.org/officeDocument/2006/relationships" xmlns:p="http://schemas.openxmlformats.org/presentationml/2006/main">
   <p:cSld name="Slide 12">
     <p:spTree>
@@ -6017,21 +7112,17 @@
                   <a:schemeClr val="tx2"/>
                 </a:solidFill>
               </a:rPr>
-              <a:t> – </a:t>
-            </a:r>
-            <a:r>
-              <a:rPr lang="en-US" altLang="zh-TW" sz="3200" b="1" dirty="0">
-                <a:solidFill>
-                  <a:srgbClr val="FF0000"/>
-                </a:solidFill>
-              </a:rPr>
+              <a:t> </a:t>
+            </a:r>
+            <a:r>
+              <a:rPr lang="en-US" dirty="0"/>
+              <a:t>– </a:t>
+            </a:r>
+            <a:r>
+              <a:rPr lang="en-US" altLang="zh-TW" dirty="0"/>
               <a:t>DevOps: CI/CD</a:t>
             </a:r>
-            <a:endParaRPr lang="en-US" sz="3200" dirty="0">
-              <a:solidFill>
-                <a:srgbClr val="FF0000"/>
-              </a:solidFill>
-            </a:endParaRPr>
+            <a:endParaRPr lang="en-US" dirty="0"/>
           </a:p>
         </p:txBody>
       </p:sp>
@@ -7587,7 +8678,7 @@
           </a:prstGeom>
           <a:extLst>
             <a:ext uri="{C572A759-6A51-4108-AA02-DFA0A04FC94B}">
-              <ma14:wrappingTextBoxFlag xmlns:ma14="http://schemas.microsoft.com/office/mac/drawingml/2011/main" xmlns="" val="0"/>
+              <ma14:wrappingTextBoxFlag xmlns="" xmlns:ma14="http://schemas.microsoft.com/office/mac/drawingml/2011/main" val="0"/>
             </a:ext>
           </a:extLst>
         </p:spPr>
@@ -7606,7 +8697,7 @@
             <a:pPr algn="r"/>
             <a:fld id="{F7021451-1387-4CA6-816F-3879F97B5CBC}" type="slidenum">
               <a:rPr lang="en-US" b="0"/>
-              <a:t>13</a:t>
+              <a:t>14</a:t>
             </a:fld>
             <a:endParaRPr lang="en-US"/>
           </a:p>
@@ -7620,7 +8711,7 @@
 </p:sld>
 </file>
 
-<file path=ppt/slides/slide14.xml><?xml version="1.0" encoding="utf-8"?>
+<file path=ppt/slides/slide15.xml><?xml version="1.0" encoding="utf-8"?>
 <p:sld xmlns:a="http://schemas.openxmlformats.org/drawingml/2006/main" xmlns:r="http://schemas.openxmlformats.org/officeDocument/2006/relationships" xmlns:p="http://schemas.openxmlformats.org/presentationml/2006/main">
   <p:cSld name="Slide 13">
     <p:spTree>
@@ -7711,7 +8802,7 @@
                   <a:schemeClr val="tx2"/>
                 </a:solidFill>
               </a:rPr>
-              <a:t>時機</a:t>
+              <a:t>實務上時機</a:t>
             </a:r>
             <a:endParaRPr lang="en-US" dirty="0"/>
           </a:p>
@@ -7822,7 +8913,7 @@
               <a:buNone/>
             </a:pPr>
             <a:r>
-              <a:rPr lang="en-US" sz="2200" b="1" dirty="0">
+              <a:rPr lang="en-US" sz="2200" b="1" dirty="0" err="1">
                 <a:solidFill>
                   <a:schemeClr val="tx2"/>
                 </a:solidFill>
@@ -8219,7 +9310,7 @@
               <a:buNone/>
             </a:pPr>
             <a:r>
-              <a:rPr lang="en-US" sz="2200" b="1" dirty="0">
+              <a:rPr lang="en-US" sz="2200" b="1" dirty="0" err="1">
                 <a:solidFill>
                   <a:schemeClr val="tx2"/>
                 </a:solidFill>
@@ -8531,7 +9622,7 @@
           </a:prstGeom>
           <a:extLst>
             <a:ext uri="{C572A759-6A51-4108-AA02-DFA0A04FC94B}">
-              <ma14:wrappingTextBoxFlag xmlns:ma14="http://schemas.microsoft.com/office/mac/drawingml/2011/main" xmlns="" val="0"/>
+              <ma14:wrappingTextBoxFlag xmlns="" xmlns:ma14="http://schemas.microsoft.com/office/mac/drawingml/2011/main" val="0"/>
             </a:ext>
           </a:extLst>
         </p:spPr>
@@ -8550,7 +9641,7 @@
             <a:pPr algn="r"/>
             <a:fld id="{F7021451-1387-4CA6-816F-3879F97B5CBC}" type="slidenum">
               <a:rPr lang="en-US" b="0"/>
-              <a:t>14</a:t>
+              <a:t>15</a:t>
             </a:fld>
             <a:endParaRPr lang="en-US"/>
           </a:p>
@@ -8564,7 +9655,7 @@
 </p:sld>
 </file>
 
-<file path=ppt/slides/slide15.xml><?xml version="1.0" encoding="utf-8"?>
+<file path=ppt/slides/slide16.xml><?xml version="1.0" encoding="utf-8"?>
 <p:sld xmlns:a="http://schemas.openxmlformats.org/drawingml/2006/main" xmlns:r="http://schemas.openxmlformats.org/officeDocument/2006/relationships" xmlns:p="http://schemas.openxmlformats.org/presentationml/2006/main">
   <p:cSld name="Slide 14">
     <p:spTree>
@@ -9449,7 +10540,7 @@
           </a:prstGeom>
           <a:extLst>
             <a:ext uri="{C572A759-6A51-4108-AA02-DFA0A04FC94B}">
-              <ma14:wrappingTextBoxFlag xmlns:ma14="http://schemas.microsoft.com/office/mac/drawingml/2011/main" xmlns="" val="0"/>
+              <ma14:wrappingTextBoxFlag xmlns="" xmlns:ma14="http://schemas.microsoft.com/office/mac/drawingml/2011/main" val="0"/>
             </a:ext>
           </a:extLst>
         </p:spPr>
@@ -9468,7 +10559,7 @@
             <a:pPr algn="r"/>
             <a:fld id="{F7021451-1387-4CA6-816F-3879F97B5CBC}" type="slidenum">
               <a:rPr lang="en-US" b="0"/>
-              <a:t>15</a:t>
+              <a:t>16</a:t>
             </a:fld>
             <a:endParaRPr lang="en-US"/>
           </a:p>
@@ -9482,7 +10573,7 @@
 </p:sld>
 </file>
 
-<file path=ppt/slides/slide16.xml><?xml version="1.0" encoding="utf-8"?>
+<file path=ppt/slides/slide17.xml><?xml version="1.0" encoding="utf-8"?>
 <p:sld xmlns:a="http://schemas.openxmlformats.org/drawingml/2006/main" xmlns:r="http://schemas.openxmlformats.org/officeDocument/2006/relationships" xmlns:p="http://schemas.openxmlformats.org/presentationml/2006/main">
   <p:cSld name="Slide 15">
     <p:spTree>
@@ -10651,7 +11742,7 @@
           </a:prstGeom>
           <a:extLst>
             <a:ext uri="{C572A759-6A51-4108-AA02-DFA0A04FC94B}">
-              <ma14:wrappingTextBoxFlag xmlns:ma14="http://schemas.microsoft.com/office/mac/drawingml/2011/main" xmlns="" val="0"/>
+              <ma14:wrappingTextBoxFlag xmlns="" xmlns:ma14="http://schemas.microsoft.com/office/mac/drawingml/2011/main" val="0"/>
             </a:ext>
           </a:extLst>
         </p:spPr>
@@ -10670,7 +11761,7 @@
             <a:pPr algn="r"/>
             <a:fld id="{F7021451-1387-4CA6-816F-3879F97B5CBC}" type="slidenum">
               <a:rPr lang="en-US" b="0"/>
-              <a:t>16</a:t>
+              <a:t>17</a:t>
             </a:fld>
             <a:endParaRPr lang="en-US"/>
           </a:p>
@@ -10684,7 +11775,7 @@
 </p:sld>
 </file>
 
-<file path=ppt/slides/slide17.xml><?xml version="1.0" encoding="utf-8"?>
+<file path=ppt/slides/slide18.xml><?xml version="1.0" encoding="utf-8"?>
 <p:sld xmlns:a="http://schemas.openxmlformats.org/drawingml/2006/main" xmlns:r="http://schemas.openxmlformats.org/officeDocument/2006/relationships" xmlns:p="http://schemas.openxmlformats.org/presentationml/2006/main">
   <p:cSld name="Slide 16">
     <p:spTree>
@@ -10737,6 +11828,22 @@
               </a:rPr>
               <a:t>放進 CI/CD</a:t>
             </a:r>
+            <a:r>
+              <a:rPr lang="zh-TW" altLang="en-US" dirty="0"/>
+              <a:t> </a:t>
+            </a:r>
+            <a:r>
+              <a:rPr lang="en-US" altLang="zh-TW" dirty="0"/>
+              <a:t>–</a:t>
+            </a:r>
+            <a:r>
+              <a:rPr lang="zh-TW" altLang="en-US" dirty="0"/>
+              <a:t> 整合 </a:t>
+            </a:r>
+            <a:r>
+              <a:rPr lang="en-US" altLang="zh-TW" dirty="0"/>
+              <a:t>DevOps</a:t>
+            </a:r>
             <a:endParaRPr lang="en-US" sz="3200" dirty="0"/>
           </a:p>
         </p:txBody>
@@ -11725,7 +12832,7 @@
           </a:prstGeom>
           <a:extLst>
             <a:ext uri="{C572A759-6A51-4108-AA02-DFA0A04FC94B}">
-              <ma14:wrappingTextBoxFlag xmlns:ma14="http://schemas.microsoft.com/office/mac/drawingml/2011/main" xmlns="" val="0"/>
+              <ma14:wrappingTextBoxFlag xmlns="" xmlns:ma14="http://schemas.microsoft.com/office/mac/drawingml/2011/main" val="0"/>
             </a:ext>
           </a:extLst>
         </p:spPr>
@@ -11744,7 +12851,7 @@
             <a:pPr algn="r"/>
             <a:fld id="{F7021451-1387-4CA6-816F-3879F97B5CBC}" type="slidenum">
               <a:rPr lang="en-US" b="0"/>
-              <a:t>17</a:t>
+              <a:t>18</a:t>
             </a:fld>
             <a:endParaRPr lang="en-US"/>
           </a:p>
@@ -11758,7 +12865,7 @@
 </p:sld>
 </file>
 
-<file path=ppt/slides/slide18.xml><?xml version="1.0" encoding="utf-8"?>
+<file path=ppt/slides/slide19.xml><?xml version="1.0" encoding="utf-8"?>
 <p:sld xmlns:a="http://schemas.openxmlformats.org/drawingml/2006/main" xmlns:r="http://schemas.openxmlformats.org/officeDocument/2006/relationships" xmlns:p="http://schemas.openxmlformats.org/presentationml/2006/main">
   <p:cSld name="Slide 17">
     <p:spTree>
@@ -11888,1624 +12995,6 @@
               <a:t>.NET 專案兩條路線的實測、前端 JS 補強，以及一路踩到的坑</a:t>
             </a:r>
             <a:endParaRPr lang="en-US" sz="1800" dirty="0"/>
-          </a:p>
-        </p:txBody>
-      </p:sp>
-    </p:spTree>
-  </p:cSld>
-  <p:clrMapOvr>
-    <a:masterClrMapping/>
-  </p:clrMapOvr>
-</p:sld>
-</file>
-
-<file path=ppt/slides/slide19.xml><?xml version="1.0" encoding="utf-8"?>
-<p:sld xmlns:a="http://schemas.openxmlformats.org/drawingml/2006/main" xmlns:r="http://schemas.openxmlformats.org/officeDocument/2006/relationships" xmlns:p="http://schemas.openxmlformats.org/presentationml/2006/main">
-  <p:cSld name="Slide 18">
-    <p:spTree>
-      <p:nvGrpSpPr>
-        <p:cNvPr id="1" name=""/>
-        <p:cNvGrpSpPr/>
-        <p:nvPr/>
-      </p:nvGrpSpPr>
-      <p:grpSpPr>
-        <a:xfrm>
-          <a:off x="0" y="0"/>
-          <a:ext cx="0" cy="0"/>
-          <a:chOff x="0" y="0"/>
-          <a:chExt cx="0" cy="0"/>
-        </a:xfrm>
-      </p:grpSpPr>
-      <p:sp>
-        <p:nvSpPr>
-          <p:cNvPr id="2" name="Text 0"/>
-          <p:cNvSpPr>
-            <a:spLocks noGrp="1"/>
-          </p:cNvSpPr>
-          <p:nvPr>
-            <p:ph type="title" idx="100" hasCustomPrompt="1"/>
-          </p:nvPr>
-        </p:nvSpPr>
-        <p:spPr>
-          <a:xfrm>
-            <a:off x="548640" y="320040"/>
-            <a:ext cx="11064240" cy="777240"/>
-          </a:xfrm>
-          <a:prstGeom prst="rect">
-            <a:avLst/>
-          </a:prstGeom>
-          <a:noFill/>
-          <a:ln/>
-        </p:spPr>
-        <p:txBody>
-          <a:bodyPr wrap="square" lIns="0" tIns="0" rIns="0" bIns="0" rtlCol="0" anchor="ctr"/>
-          <a:lstStyle/>
-          <a:p>
-            <a:pPr marL="0" indent="0" algn="l">
-              <a:buNone/>
-            </a:pPr>
-            <a:r>
-              <a:rPr lang="en-US" sz="3200" b="1" dirty="0">
-                <a:solidFill>
-                  <a:schemeClr val="tx2"/>
-                </a:solidFill>
-              </a:rPr>
-              <a:t>工具地圖</a:t>
-            </a:r>
-            <a:endParaRPr lang="en-US" sz="3200" dirty="0"/>
-          </a:p>
-        </p:txBody>
-      </p:sp>
-      <p:sp>
-        <p:nvSpPr>
-          <p:cNvPr id="3" name="card-337"/>
-          <p:cNvSpPr/>
-          <p:nvPr/>
-        </p:nvSpPr>
-        <p:spPr>
-          <a:xfrm>
-            <a:off x="548640" y="1371600"/>
-            <a:ext cx="2651760" cy="548640"/>
-          </a:xfrm>
-          <a:prstGeom prst="roundRect">
-            <a:avLst>
-              <a:gd name="adj" fmla="val 16667"/>
-            </a:avLst>
-          </a:prstGeom>
-          <a:solidFill>
-            <a:srgbClr val="0E7C6B"/>
-          </a:solidFill>
-          <a:ln/>
-        </p:spPr>
-        <p:txBody>
-          <a:bodyPr/>
-          <a:lstStyle/>
-          <a:p>
-            <a:endParaRPr lang="zh-TW" altLang="en-US"/>
-          </a:p>
-        </p:txBody>
-      </p:sp>
-      <p:sp>
-        <p:nvSpPr>
-          <p:cNvPr id="4" name="txt-338"/>
-          <p:cNvSpPr txBox="1"/>
-          <p:nvPr/>
-        </p:nvSpPr>
-        <p:spPr>
-          <a:xfrm>
-            <a:off x="548640" y="1371600"/>
-            <a:ext cx="2651760" cy="548640"/>
-          </a:xfrm>
-          <a:prstGeom prst="rect">
-            <a:avLst/>
-          </a:prstGeom>
-          <a:noFill/>
-          <a:ln/>
-        </p:spPr>
-        <p:txBody>
-          <a:bodyPr wrap="square" lIns="0" tIns="0" rIns="0" bIns="0" rtlCol="0" anchor="ctr"/>
-          <a:lstStyle/>
-          <a:p>
-            <a:pPr marL="0" indent="0" algn="ctr">
-              <a:buNone/>
-            </a:pPr>
-            <a:r>
-              <a:rPr lang="en-US" sz="1600" b="1" dirty="0">
-                <a:solidFill>
-                  <a:schemeClr val="bg1"/>
-                </a:solidFill>
-              </a:rPr>
-              <a:t>產生</a:t>
-            </a:r>
-            <a:endParaRPr lang="en-US" sz="1600" dirty="0"/>
-          </a:p>
-        </p:txBody>
-      </p:sp>
-      <p:sp>
-        <p:nvSpPr>
-          <p:cNvPr id="5" name="card-339"/>
-          <p:cNvSpPr/>
-          <p:nvPr/>
-        </p:nvSpPr>
-        <p:spPr>
-          <a:xfrm>
-            <a:off x="548640" y="2103120"/>
-            <a:ext cx="2651760" cy="713232"/>
-          </a:xfrm>
-          <a:prstGeom prst="roundRect">
-            <a:avLst>
-              <a:gd name="adj" fmla="val 10256"/>
-            </a:avLst>
-          </a:prstGeom>
-          <a:solidFill>
-            <a:srgbClr val="DCEFEA"/>
-          </a:solidFill>
-          <a:ln/>
-        </p:spPr>
-        <p:txBody>
-          <a:bodyPr/>
-          <a:lstStyle/>
-          <a:p>
-            <a:endParaRPr lang="zh-TW" altLang="en-US"/>
-          </a:p>
-        </p:txBody>
-      </p:sp>
-      <p:sp>
-        <p:nvSpPr>
-          <p:cNvPr id="6" name="txt-340"/>
-          <p:cNvSpPr txBox="1"/>
-          <p:nvPr/>
-        </p:nvSpPr>
-        <p:spPr>
-          <a:xfrm>
-            <a:off x="685800" y="2157984"/>
-            <a:ext cx="2377440" cy="320040"/>
-          </a:xfrm>
-          <a:prstGeom prst="rect">
-            <a:avLst/>
-          </a:prstGeom>
-          <a:noFill/>
-          <a:ln/>
-        </p:spPr>
-        <p:txBody>
-          <a:bodyPr wrap="square" lIns="0" tIns="0" rIns="0" bIns="0" rtlCol="0" anchor="t"/>
-          <a:lstStyle/>
-          <a:p>
-            <a:pPr marL="0" indent="0">
-              <a:buNone/>
-            </a:pPr>
-            <a:r>
-              <a:rPr lang="en-US" sz="1400" b="1" dirty="0">
-                <a:solidFill>
-                  <a:schemeClr val="tx2"/>
-                </a:solidFill>
-              </a:rPr>
-              <a:t>★ syft</a:t>
-            </a:r>
-            <a:endParaRPr lang="en-US" sz="1400" dirty="0"/>
-          </a:p>
-        </p:txBody>
-      </p:sp>
-      <p:sp>
-        <p:nvSpPr>
-          <p:cNvPr id="7" name="txt-341"/>
-          <p:cNvSpPr txBox="1"/>
-          <p:nvPr/>
-        </p:nvSpPr>
-        <p:spPr>
-          <a:xfrm>
-            <a:off x="685800" y="2468880"/>
-            <a:ext cx="2377440" cy="301752"/>
-          </a:xfrm>
-          <a:prstGeom prst="rect">
-            <a:avLst/>
-          </a:prstGeom>
-          <a:noFill/>
-          <a:ln/>
-        </p:spPr>
-        <p:txBody>
-          <a:bodyPr wrap="square" lIns="0" tIns="0" rIns="0" bIns="0" rtlCol="0" anchor="t"/>
-          <a:lstStyle/>
-          <a:p>
-            <a:pPr marL="0" indent="0">
-              <a:buNone/>
-            </a:pPr>
-            <a:r>
-              <a:rPr lang="en-US" sz="1100" dirty="0">
-                <a:solidFill>
-                  <a:schemeClr val="accent6"/>
-                </a:solidFill>
-              </a:rPr>
-              <a:t>多生態系；掃目錄／映像</a:t>
-            </a:r>
-            <a:endParaRPr lang="en-US" sz="1100" dirty="0"/>
-          </a:p>
-        </p:txBody>
-      </p:sp>
-      <p:sp>
-        <p:nvSpPr>
-          <p:cNvPr id="8" name="card-342"/>
-          <p:cNvSpPr/>
-          <p:nvPr/>
-        </p:nvSpPr>
-        <p:spPr>
-          <a:xfrm>
-            <a:off x="548640" y="2907792"/>
-            <a:ext cx="2651760" cy="713232"/>
-          </a:xfrm>
-          <a:prstGeom prst="roundRect">
-            <a:avLst>
-              <a:gd name="adj" fmla="val 10256"/>
-            </a:avLst>
-          </a:prstGeom>
-          <a:solidFill>
-            <a:srgbClr val="DCEFEA"/>
-          </a:solidFill>
-          <a:ln/>
-        </p:spPr>
-        <p:txBody>
-          <a:bodyPr/>
-          <a:lstStyle/>
-          <a:p>
-            <a:endParaRPr lang="zh-TW" altLang="en-US"/>
-          </a:p>
-        </p:txBody>
-      </p:sp>
-      <p:sp>
-        <p:nvSpPr>
-          <p:cNvPr id="9" name="txt-343"/>
-          <p:cNvSpPr txBox="1"/>
-          <p:nvPr/>
-        </p:nvSpPr>
-        <p:spPr>
-          <a:xfrm>
-            <a:off x="685800" y="2962656"/>
-            <a:ext cx="2377440" cy="320040"/>
-          </a:xfrm>
-          <a:prstGeom prst="rect">
-            <a:avLst/>
-          </a:prstGeom>
-          <a:noFill/>
-          <a:ln/>
-        </p:spPr>
-        <p:txBody>
-          <a:bodyPr wrap="square" lIns="0" tIns="0" rIns="0" bIns="0" rtlCol="0" anchor="t"/>
-          <a:lstStyle/>
-          <a:p>
-            <a:pPr marL="0" indent="0">
-              <a:buNone/>
-            </a:pPr>
-            <a:r>
-              <a:rPr lang="en-US" sz="1400" b="1" dirty="0">
-                <a:solidFill>
-                  <a:schemeClr val="tx2"/>
-                </a:solidFill>
-              </a:rPr>
-              <a:t>★ dotnet-CycloneDX</a:t>
-            </a:r>
-            <a:endParaRPr lang="en-US" sz="1400" dirty="0"/>
-          </a:p>
-        </p:txBody>
-      </p:sp>
-      <p:sp>
-        <p:nvSpPr>
-          <p:cNvPr id="10" name="txt-344"/>
-          <p:cNvSpPr txBox="1"/>
-          <p:nvPr/>
-        </p:nvSpPr>
-        <p:spPr>
-          <a:xfrm>
-            <a:off x="685800" y="3273552"/>
-            <a:ext cx="2377440" cy="301752"/>
-          </a:xfrm>
-          <a:prstGeom prst="rect">
-            <a:avLst/>
-          </a:prstGeom>
-          <a:noFill/>
-          <a:ln/>
-        </p:spPr>
-        <p:txBody>
-          <a:bodyPr wrap="square" lIns="0" tIns="0" rIns="0" bIns="0" rtlCol="0" anchor="t"/>
-          <a:lstStyle/>
-          <a:p>
-            <a:pPr marL="0" indent="0">
-              <a:buNone/>
-            </a:pPr>
-            <a:r>
-              <a:rPr lang="en-US" sz="1100" dirty="0">
-                <a:solidFill>
-                  <a:schemeClr val="accent6"/>
-                </a:solidFill>
-              </a:rPr>
-              <a:t>.NET 專案檔；含授權</a:t>
-            </a:r>
-            <a:endParaRPr lang="en-US" sz="1100" dirty="0"/>
-          </a:p>
-        </p:txBody>
-      </p:sp>
-      <p:sp>
-        <p:nvSpPr>
-          <p:cNvPr id="11" name="card-345"/>
-          <p:cNvSpPr/>
-          <p:nvPr/>
-        </p:nvSpPr>
-        <p:spPr>
-          <a:xfrm>
-            <a:off x="548640" y="3712464"/>
-            <a:ext cx="2651760" cy="713232"/>
-          </a:xfrm>
-          <a:prstGeom prst="roundRect">
-            <a:avLst>
-              <a:gd name="adj" fmla="val 10256"/>
-            </a:avLst>
-          </a:prstGeom>
-          <a:solidFill>
-            <a:schemeClr val="bg2"/>
-          </a:solidFill>
-          <a:ln/>
-        </p:spPr>
-        <p:txBody>
-          <a:bodyPr/>
-          <a:lstStyle/>
-          <a:p>
-            <a:endParaRPr lang="zh-TW" altLang="en-US"/>
-          </a:p>
-        </p:txBody>
-      </p:sp>
-      <p:sp>
-        <p:nvSpPr>
-          <p:cNvPr id="12" name="txt-346"/>
-          <p:cNvSpPr txBox="1"/>
-          <p:nvPr/>
-        </p:nvSpPr>
-        <p:spPr>
-          <a:xfrm>
-            <a:off x="685800" y="3767328"/>
-            <a:ext cx="2377440" cy="320040"/>
-          </a:xfrm>
-          <a:prstGeom prst="rect">
-            <a:avLst/>
-          </a:prstGeom>
-          <a:noFill/>
-          <a:ln/>
-        </p:spPr>
-        <p:txBody>
-          <a:bodyPr wrap="square" lIns="0" tIns="0" rIns="0" bIns="0" rtlCol="0" anchor="t"/>
-          <a:lstStyle/>
-          <a:p>
-            <a:pPr marL="0" indent="0">
-              <a:buNone/>
-            </a:pPr>
-            <a:r>
-              <a:rPr lang="en-US" sz="1400" b="1" dirty="0">
-                <a:solidFill>
-                  <a:schemeClr val="tx2"/>
-                </a:solidFill>
-              </a:rPr>
-              <a:t>cyclonedx-npm</a:t>
-            </a:r>
-            <a:endParaRPr lang="en-US" sz="1400" dirty="0"/>
-          </a:p>
-        </p:txBody>
-      </p:sp>
-      <p:sp>
-        <p:nvSpPr>
-          <p:cNvPr id="13" name="txt-347"/>
-          <p:cNvSpPr txBox="1"/>
-          <p:nvPr/>
-        </p:nvSpPr>
-        <p:spPr>
-          <a:xfrm>
-            <a:off x="685800" y="4078224"/>
-            <a:ext cx="2377440" cy="301752"/>
-          </a:xfrm>
-          <a:prstGeom prst="rect">
-            <a:avLst/>
-          </a:prstGeom>
-          <a:noFill/>
-          <a:ln/>
-        </p:spPr>
-        <p:txBody>
-          <a:bodyPr wrap="square" lIns="0" tIns="0" rIns="0" bIns="0" rtlCol="0" anchor="t"/>
-          <a:lstStyle/>
-          <a:p>
-            <a:pPr marL="0" indent="0">
-              <a:buNone/>
-            </a:pPr>
-            <a:r>
-              <a:rPr lang="en-US" sz="1100" dirty="0">
-                <a:solidFill>
-                  <a:schemeClr val="accent6"/>
-                </a:solidFill>
-              </a:rPr>
-              <a:t>npm 依賴樹／lockfile</a:t>
-            </a:r>
-            <a:endParaRPr lang="en-US" sz="1100" dirty="0"/>
-          </a:p>
-        </p:txBody>
-      </p:sp>
-      <p:sp>
-        <p:nvSpPr>
-          <p:cNvPr id="14" name="card-348"/>
-          <p:cNvSpPr/>
-          <p:nvPr/>
-        </p:nvSpPr>
-        <p:spPr>
-          <a:xfrm>
-            <a:off x="548640" y="4517136"/>
-            <a:ext cx="2651760" cy="713232"/>
-          </a:xfrm>
-          <a:prstGeom prst="roundRect">
-            <a:avLst>
-              <a:gd name="adj" fmla="val 10256"/>
-            </a:avLst>
-          </a:prstGeom>
-          <a:solidFill>
-            <a:schemeClr val="bg2"/>
-          </a:solidFill>
-          <a:ln/>
-        </p:spPr>
-        <p:txBody>
-          <a:bodyPr/>
-          <a:lstStyle/>
-          <a:p>
-            <a:endParaRPr lang="zh-TW" altLang="en-US"/>
-          </a:p>
-        </p:txBody>
-      </p:sp>
-      <p:sp>
-        <p:nvSpPr>
-          <p:cNvPr id="15" name="txt-349"/>
-          <p:cNvSpPr txBox="1"/>
-          <p:nvPr/>
-        </p:nvSpPr>
-        <p:spPr>
-          <a:xfrm>
-            <a:off x="685800" y="4572000"/>
-            <a:ext cx="2377440" cy="320040"/>
-          </a:xfrm>
-          <a:prstGeom prst="rect">
-            <a:avLst/>
-          </a:prstGeom>
-          <a:noFill/>
-          <a:ln/>
-        </p:spPr>
-        <p:txBody>
-          <a:bodyPr wrap="square" lIns="0" tIns="0" rIns="0" bIns="0" rtlCol="0" anchor="t"/>
-          <a:lstStyle/>
-          <a:p>
-            <a:pPr marL="0" indent="0">
-              <a:buNone/>
-            </a:pPr>
-            <a:r>
-              <a:rPr lang="en-US" sz="1400" b="1" dirty="0">
-                <a:solidFill>
-                  <a:schemeClr val="tx2"/>
-                </a:solidFill>
-              </a:rPr>
-              <a:t>Microsoft sbom-tool</a:t>
-            </a:r>
-            <a:endParaRPr lang="en-US" sz="1400" dirty="0"/>
-          </a:p>
-        </p:txBody>
-      </p:sp>
-      <p:sp>
-        <p:nvSpPr>
-          <p:cNvPr id="16" name="txt-350"/>
-          <p:cNvSpPr txBox="1"/>
-          <p:nvPr/>
-        </p:nvSpPr>
-        <p:spPr>
-          <a:xfrm>
-            <a:off x="685800" y="4882896"/>
-            <a:ext cx="2377440" cy="301752"/>
-          </a:xfrm>
-          <a:prstGeom prst="rect">
-            <a:avLst/>
-          </a:prstGeom>
-          <a:noFill/>
-          <a:ln/>
-        </p:spPr>
-        <p:txBody>
-          <a:bodyPr wrap="square" lIns="0" tIns="0" rIns="0" bIns="0" rtlCol="0" anchor="t"/>
-          <a:lstStyle/>
-          <a:p>
-            <a:pPr marL="0" indent="0">
-              <a:buNone/>
-            </a:pPr>
-            <a:r>
-              <a:rPr lang="en-US" sz="1100" dirty="0">
-                <a:solidFill>
-                  <a:schemeClr val="accent6"/>
-                </a:solidFill>
-              </a:rPr>
-              <a:t>只輸出 SPDX</a:t>
-            </a:r>
-            <a:endParaRPr lang="en-US" sz="1100" dirty="0"/>
-          </a:p>
-        </p:txBody>
-      </p:sp>
-      <p:sp>
-        <p:nvSpPr>
-          <p:cNvPr id="17" name="card-351"/>
-          <p:cNvSpPr/>
-          <p:nvPr/>
-        </p:nvSpPr>
-        <p:spPr>
-          <a:xfrm>
-            <a:off x="548640" y="5321808"/>
-            <a:ext cx="2651760" cy="713232"/>
-          </a:xfrm>
-          <a:prstGeom prst="roundRect">
-            <a:avLst>
-              <a:gd name="adj" fmla="val 10256"/>
-            </a:avLst>
-          </a:prstGeom>
-          <a:solidFill>
-            <a:srgbClr val="DCEFEA"/>
-          </a:solidFill>
-          <a:ln/>
-        </p:spPr>
-        <p:txBody>
-          <a:bodyPr/>
-          <a:lstStyle/>
-          <a:p>
-            <a:endParaRPr lang="zh-TW" altLang="en-US"/>
-          </a:p>
-        </p:txBody>
-      </p:sp>
-      <p:sp>
-        <p:nvSpPr>
-          <p:cNvPr id="18" name="txt-352"/>
-          <p:cNvSpPr txBox="1"/>
-          <p:nvPr/>
-        </p:nvSpPr>
-        <p:spPr>
-          <a:xfrm>
-            <a:off x="685800" y="5376672"/>
-            <a:ext cx="2377440" cy="320040"/>
-          </a:xfrm>
-          <a:prstGeom prst="rect">
-            <a:avLst/>
-          </a:prstGeom>
-          <a:noFill/>
-          <a:ln/>
-        </p:spPr>
-        <p:txBody>
-          <a:bodyPr wrap="square" lIns="0" tIns="0" rIns="0" bIns="0" rtlCol="0" anchor="t"/>
-          <a:lstStyle/>
-          <a:p>
-            <a:pPr marL="0" indent="0">
-              <a:buNone/>
-            </a:pPr>
-            <a:r>
-              <a:rPr lang="en-US" sz="1400" b="1" dirty="0">
-                <a:solidFill>
-                  <a:schemeClr val="tx2"/>
-                </a:solidFill>
-              </a:rPr>
-              <a:t>★ retire.js</a:t>
-            </a:r>
-            <a:endParaRPr lang="en-US" sz="1400" dirty="0"/>
-          </a:p>
-        </p:txBody>
-      </p:sp>
-      <p:sp>
-        <p:nvSpPr>
-          <p:cNvPr id="19" name="txt-353"/>
-          <p:cNvSpPr txBox="1"/>
-          <p:nvPr/>
-        </p:nvSpPr>
-        <p:spPr>
-          <a:xfrm>
-            <a:off x="685800" y="5687568"/>
-            <a:ext cx="2377440" cy="301752"/>
-          </a:xfrm>
-          <a:prstGeom prst="rect">
-            <a:avLst/>
-          </a:prstGeom>
-          <a:noFill/>
-          <a:ln/>
-        </p:spPr>
-        <p:txBody>
-          <a:bodyPr wrap="square" lIns="0" tIns="0" rIns="0" bIns="0" rtlCol="0" anchor="t"/>
-          <a:lstStyle/>
-          <a:p>
-            <a:pPr marL="0" indent="0">
-              <a:buNone/>
-            </a:pPr>
-            <a:r>
-              <a:rPr lang="en-US" sz="1100" dirty="0">
-                <a:solidFill>
-                  <a:schemeClr val="accent6"/>
-                </a:solidFill>
-              </a:rPr>
-              <a:t>前端 vendored JS</a:t>
-            </a:r>
-            <a:endParaRPr lang="en-US" sz="1100" dirty="0"/>
-          </a:p>
-        </p:txBody>
-      </p:sp>
-      <p:sp>
-        <p:nvSpPr>
-          <p:cNvPr id="20" name="card-354"/>
-          <p:cNvSpPr/>
-          <p:nvPr/>
-        </p:nvSpPr>
-        <p:spPr>
-          <a:xfrm>
-            <a:off x="3383280" y="1371600"/>
-            <a:ext cx="2651760" cy="548640"/>
-          </a:xfrm>
-          <a:prstGeom prst="roundRect">
-            <a:avLst>
-              <a:gd name="adj" fmla="val 16667"/>
-            </a:avLst>
-          </a:prstGeom>
-          <a:solidFill>
-            <a:srgbClr val="3D5A80"/>
-          </a:solidFill>
-          <a:ln/>
-        </p:spPr>
-        <p:txBody>
-          <a:bodyPr/>
-          <a:lstStyle/>
-          <a:p>
-            <a:endParaRPr lang="zh-TW" altLang="en-US"/>
-          </a:p>
-        </p:txBody>
-      </p:sp>
-      <p:sp>
-        <p:nvSpPr>
-          <p:cNvPr id="21" name="txt-355"/>
-          <p:cNvSpPr txBox="1"/>
-          <p:nvPr/>
-        </p:nvSpPr>
-        <p:spPr>
-          <a:xfrm>
-            <a:off x="3383280" y="1371600"/>
-            <a:ext cx="2651760" cy="548640"/>
-          </a:xfrm>
-          <a:prstGeom prst="rect">
-            <a:avLst/>
-          </a:prstGeom>
-          <a:noFill/>
-          <a:ln/>
-        </p:spPr>
-        <p:txBody>
-          <a:bodyPr wrap="square" lIns="0" tIns="0" rIns="0" bIns="0" rtlCol="0" anchor="ctr"/>
-          <a:lstStyle/>
-          <a:p>
-            <a:pPr marL="0" indent="0" algn="ctr">
-              <a:buNone/>
-            </a:pPr>
-            <a:r>
-              <a:rPr lang="en-US" sz="1600" b="1" dirty="0">
-                <a:solidFill>
-                  <a:schemeClr val="bg1"/>
-                </a:solidFill>
-              </a:rPr>
-              <a:t>驗證・合併・轉換</a:t>
-            </a:r>
-            <a:endParaRPr lang="en-US" sz="1600" dirty="0"/>
-          </a:p>
-        </p:txBody>
-      </p:sp>
-      <p:sp>
-        <p:nvSpPr>
-          <p:cNvPr id="22" name="card-356"/>
-          <p:cNvSpPr/>
-          <p:nvPr/>
-        </p:nvSpPr>
-        <p:spPr>
-          <a:xfrm>
-            <a:off x="3383280" y="2103120"/>
-            <a:ext cx="2651760" cy="713232"/>
-          </a:xfrm>
-          <a:prstGeom prst="roundRect">
-            <a:avLst>
-              <a:gd name="adj" fmla="val 10256"/>
-            </a:avLst>
-          </a:prstGeom>
-          <a:solidFill>
-            <a:srgbClr val="DCEFEA"/>
-          </a:solidFill>
-          <a:ln/>
-        </p:spPr>
-        <p:txBody>
-          <a:bodyPr/>
-          <a:lstStyle/>
-          <a:p>
-            <a:endParaRPr lang="zh-TW" altLang="en-US"/>
-          </a:p>
-        </p:txBody>
-      </p:sp>
-      <p:sp>
-        <p:nvSpPr>
-          <p:cNvPr id="23" name="txt-357"/>
-          <p:cNvSpPr txBox="1"/>
-          <p:nvPr/>
-        </p:nvSpPr>
-        <p:spPr>
-          <a:xfrm>
-            <a:off x="3520440" y="2157984"/>
-            <a:ext cx="2377440" cy="320040"/>
-          </a:xfrm>
-          <a:prstGeom prst="rect">
-            <a:avLst/>
-          </a:prstGeom>
-          <a:noFill/>
-          <a:ln/>
-        </p:spPr>
-        <p:txBody>
-          <a:bodyPr wrap="square" lIns="0" tIns="0" rIns="0" bIns="0" rtlCol="0" anchor="t"/>
-          <a:lstStyle/>
-          <a:p>
-            <a:pPr marL="0" indent="0">
-              <a:buNone/>
-            </a:pPr>
-            <a:r>
-              <a:rPr lang="en-US" sz="1400" b="1" dirty="0">
-                <a:solidFill>
-                  <a:schemeClr val="tx2"/>
-                </a:solidFill>
-              </a:rPr>
-              <a:t>★ cyclonedx-cli</a:t>
-            </a:r>
-            <a:endParaRPr lang="en-US" sz="1400" dirty="0"/>
-          </a:p>
-        </p:txBody>
-      </p:sp>
-      <p:sp>
-        <p:nvSpPr>
-          <p:cNvPr id="24" name="txt-358"/>
-          <p:cNvSpPr txBox="1"/>
-          <p:nvPr/>
-        </p:nvSpPr>
-        <p:spPr>
-          <a:xfrm>
-            <a:off x="3520440" y="2468880"/>
-            <a:ext cx="2377440" cy="301752"/>
-          </a:xfrm>
-          <a:prstGeom prst="rect">
-            <a:avLst/>
-          </a:prstGeom>
-          <a:noFill/>
-          <a:ln/>
-        </p:spPr>
-        <p:txBody>
-          <a:bodyPr wrap="square" lIns="0" tIns="0" rIns="0" bIns="0" rtlCol="0" anchor="t"/>
-          <a:lstStyle/>
-          <a:p>
-            <a:pPr marL="0" indent="0">
-              <a:buNone/>
-            </a:pPr>
-            <a:r>
-              <a:rPr lang="en-US" sz="1100" dirty="0">
-                <a:solidFill>
-                  <a:schemeClr val="accent6"/>
-                </a:solidFill>
-              </a:rPr>
-              <a:t>validate／merge／diff／convert／sign</a:t>
-            </a:r>
-            <a:endParaRPr lang="en-US" sz="1100" dirty="0"/>
-          </a:p>
-        </p:txBody>
-      </p:sp>
-      <p:sp>
-        <p:nvSpPr>
-          <p:cNvPr id="25" name="card-359"/>
-          <p:cNvSpPr/>
-          <p:nvPr/>
-        </p:nvSpPr>
-        <p:spPr>
-          <a:xfrm>
-            <a:off x="3383280" y="2907792"/>
-            <a:ext cx="2651760" cy="713232"/>
-          </a:xfrm>
-          <a:prstGeom prst="roundRect">
-            <a:avLst>
-              <a:gd name="adj" fmla="val 10256"/>
-            </a:avLst>
-          </a:prstGeom>
-          <a:solidFill>
-            <a:schemeClr val="bg2"/>
-          </a:solidFill>
-          <a:ln/>
-        </p:spPr>
-        <p:txBody>
-          <a:bodyPr/>
-          <a:lstStyle/>
-          <a:p>
-            <a:endParaRPr lang="zh-TW" altLang="en-US"/>
-          </a:p>
-        </p:txBody>
-      </p:sp>
-      <p:sp>
-        <p:nvSpPr>
-          <p:cNvPr id="26" name="txt-360"/>
-          <p:cNvSpPr txBox="1"/>
-          <p:nvPr/>
-        </p:nvSpPr>
-        <p:spPr>
-          <a:xfrm>
-            <a:off x="3520440" y="2962656"/>
-            <a:ext cx="2377440" cy="320040"/>
-          </a:xfrm>
-          <a:prstGeom prst="rect">
-            <a:avLst/>
-          </a:prstGeom>
-          <a:noFill/>
-          <a:ln/>
-        </p:spPr>
-        <p:txBody>
-          <a:bodyPr wrap="square" lIns="0" tIns="0" rIns="0" bIns="0" rtlCol="0" anchor="t"/>
-          <a:lstStyle/>
-          <a:p>
-            <a:pPr marL="0" indent="0">
-              <a:buNone/>
-            </a:pPr>
-            <a:r>
-              <a:rPr lang="en-US" sz="1400" b="1" dirty="0">
-                <a:solidFill>
-                  <a:schemeClr val="tx2"/>
-                </a:solidFill>
-              </a:rPr>
-              <a:t>sbom-tools</a:t>
-            </a:r>
-            <a:endParaRPr lang="en-US" sz="1400" dirty="0"/>
-          </a:p>
-        </p:txBody>
-      </p:sp>
-      <p:sp>
-        <p:nvSpPr>
-          <p:cNvPr id="27" name="txt-361"/>
-          <p:cNvSpPr txBox="1"/>
-          <p:nvPr/>
-        </p:nvSpPr>
-        <p:spPr>
-          <a:xfrm>
-            <a:off x="3520440" y="3273552"/>
-            <a:ext cx="2377440" cy="301752"/>
-          </a:xfrm>
-          <a:prstGeom prst="rect">
-            <a:avLst/>
-          </a:prstGeom>
-          <a:noFill/>
-          <a:ln/>
-        </p:spPr>
-        <p:txBody>
-          <a:bodyPr wrap="square" lIns="0" tIns="0" rIns="0" bIns="0" rtlCol="0" anchor="t"/>
-          <a:lstStyle/>
-          <a:p>
-            <a:pPr marL="0" indent="0">
-              <a:buNone/>
-            </a:pPr>
-            <a:r>
-              <a:rPr lang="en-US" sz="1100" dirty="0">
-                <a:solidFill>
-                  <a:schemeClr val="accent6"/>
-                </a:solidFill>
-              </a:rPr>
-              <a:t>語意 diff、品質分數、16 種合規檢查</a:t>
-            </a:r>
-            <a:endParaRPr lang="en-US" sz="1100" dirty="0"/>
-          </a:p>
-        </p:txBody>
-      </p:sp>
-      <p:sp>
-        <p:nvSpPr>
-          <p:cNvPr id="28" name="card-362"/>
-          <p:cNvSpPr/>
-          <p:nvPr/>
-        </p:nvSpPr>
-        <p:spPr>
-          <a:xfrm>
-            <a:off x="6217920" y="1371600"/>
-            <a:ext cx="2651760" cy="548640"/>
-          </a:xfrm>
-          <a:prstGeom prst="roundRect">
-            <a:avLst>
-              <a:gd name="adj" fmla="val 16667"/>
-            </a:avLst>
-          </a:prstGeom>
-          <a:solidFill>
-            <a:srgbClr val="C8424F"/>
-          </a:solidFill>
-          <a:ln/>
-        </p:spPr>
-        <p:txBody>
-          <a:bodyPr/>
-          <a:lstStyle/>
-          <a:p>
-            <a:endParaRPr lang="zh-TW" altLang="en-US"/>
-          </a:p>
-        </p:txBody>
-      </p:sp>
-      <p:sp>
-        <p:nvSpPr>
-          <p:cNvPr id="29" name="txt-363"/>
-          <p:cNvSpPr txBox="1"/>
-          <p:nvPr/>
-        </p:nvSpPr>
-        <p:spPr>
-          <a:xfrm>
-            <a:off x="6217920" y="1371600"/>
-            <a:ext cx="2651760" cy="548640"/>
-          </a:xfrm>
-          <a:prstGeom prst="rect">
-            <a:avLst/>
-          </a:prstGeom>
-          <a:noFill/>
-          <a:ln/>
-        </p:spPr>
-        <p:txBody>
-          <a:bodyPr wrap="square" lIns="0" tIns="0" rIns="0" bIns="0" rtlCol="0" anchor="ctr"/>
-          <a:lstStyle/>
-          <a:p>
-            <a:pPr marL="0" indent="0" algn="ctr">
-              <a:buNone/>
-            </a:pPr>
-            <a:r>
-              <a:rPr lang="en-US" sz="1600" b="1" dirty="0">
-                <a:solidFill>
-                  <a:schemeClr val="bg1"/>
-                </a:solidFill>
-              </a:rPr>
-              <a:t>掃描</a:t>
-            </a:r>
-            <a:endParaRPr lang="en-US" sz="1600" dirty="0"/>
-          </a:p>
-        </p:txBody>
-      </p:sp>
-      <p:sp>
-        <p:nvSpPr>
-          <p:cNvPr id="30" name="card-364"/>
-          <p:cNvSpPr/>
-          <p:nvPr/>
-        </p:nvSpPr>
-        <p:spPr>
-          <a:xfrm>
-            <a:off x="6217920" y="2103120"/>
-            <a:ext cx="2651760" cy="713232"/>
-          </a:xfrm>
-          <a:prstGeom prst="roundRect">
-            <a:avLst>
-              <a:gd name="adj" fmla="val 10256"/>
-            </a:avLst>
-          </a:prstGeom>
-          <a:solidFill>
-            <a:srgbClr val="DCEFEA"/>
-          </a:solidFill>
-          <a:ln/>
-        </p:spPr>
-        <p:txBody>
-          <a:bodyPr/>
-          <a:lstStyle/>
-          <a:p>
-            <a:endParaRPr lang="zh-TW" altLang="en-US"/>
-          </a:p>
-        </p:txBody>
-      </p:sp>
-      <p:sp>
-        <p:nvSpPr>
-          <p:cNvPr id="31" name="txt-365"/>
-          <p:cNvSpPr txBox="1"/>
-          <p:nvPr/>
-        </p:nvSpPr>
-        <p:spPr>
-          <a:xfrm>
-            <a:off x="6355080" y="2157984"/>
-            <a:ext cx="2377440" cy="320040"/>
-          </a:xfrm>
-          <a:prstGeom prst="rect">
-            <a:avLst/>
-          </a:prstGeom>
-          <a:noFill/>
-          <a:ln/>
-        </p:spPr>
-        <p:txBody>
-          <a:bodyPr wrap="square" lIns="0" tIns="0" rIns="0" bIns="0" rtlCol="0" anchor="t"/>
-          <a:lstStyle/>
-          <a:p>
-            <a:pPr marL="0" indent="0">
-              <a:buNone/>
-            </a:pPr>
-            <a:r>
-              <a:rPr lang="en-US" sz="1400" b="1" dirty="0">
-                <a:solidFill>
-                  <a:schemeClr val="tx2"/>
-                </a:solidFill>
-              </a:rPr>
-              <a:t>★ grype</a:t>
-            </a:r>
-            <a:endParaRPr lang="en-US" sz="1400" dirty="0"/>
-          </a:p>
-        </p:txBody>
-      </p:sp>
-      <p:sp>
-        <p:nvSpPr>
-          <p:cNvPr id="32" name="txt-366"/>
-          <p:cNvSpPr txBox="1"/>
-          <p:nvPr/>
-        </p:nvSpPr>
-        <p:spPr>
-          <a:xfrm>
-            <a:off x="6355080" y="2468880"/>
-            <a:ext cx="2377440" cy="301752"/>
-          </a:xfrm>
-          <a:prstGeom prst="rect">
-            <a:avLst/>
-          </a:prstGeom>
-          <a:noFill/>
-          <a:ln/>
-        </p:spPr>
-        <p:txBody>
-          <a:bodyPr wrap="square" lIns="0" tIns="0" rIns="0" bIns="0" rtlCol="0" anchor="t"/>
-          <a:lstStyle/>
-          <a:p>
-            <a:pPr marL="0" indent="0">
-              <a:buNone/>
-            </a:pPr>
-            <a:r>
-              <a:rPr lang="en-US" sz="1100" dirty="0">
-                <a:solidFill>
-                  <a:schemeClr val="accent6"/>
-                </a:solidFill>
-              </a:rPr>
-              <a:t>弱點；支援 OpenVEX</a:t>
-            </a:r>
-            <a:endParaRPr lang="en-US" sz="1100" dirty="0"/>
-          </a:p>
-        </p:txBody>
-      </p:sp>
-      <p:sp>
-        <p:nvSpPr>
-          <p:cNvPr id="33" name="card-367"/>
-          <p:cNvSpPr/>
-          <p:nvPr/>
-        </p:nvSpPr>
-        <p:spPr>
-          <a:xfrm>
-            <a:off x="6217920" y="2907792"/>
-            <a:ext cx="2651760" cy="713232"/>
-          </a:xfrm>
-          <a:prstGeom prst="roundRect">
-            <a:avLst>
-              <a:gd name="adj" fmla="val 10256"/>
-            </a:avLst>
-          </a:prstGeom>
-          <a:solidFill>
-            <a:srgbClr val="DCEFEA"/>
-          </a:solidFill>
-          <a:ln/>
-        </p:spPr>
-        <p:txBody>
-          <a:bodyPr/>
-          <a:lstStyle/>
-          <a:p>
-            <a:endParaRPr lang="zh-TW" altLang="en-US"/>
-          </a:p>
-        </p:txBody>
-      </p:sp>
-      <p:sp>
-        <p:nvSpPr>
-          <p:cNvPr id="34" name="txt-368"/>
-          <p:cNvSpPr txBox="1"/>
-          <p:nvPr/>
-        </p:nvSpPr>
-        <p:spPr>
-          <a:xfrm>
-            <a:off x="6355080" y="2962656"/>
-            <a:ext cx="2377440" cy="320040"/>
-          </a:xfrm>
-          <a:prstGeom prst="rect">
-            <a:avLst/>
-          </a:prstGeom>
-          <a:noFill/>
-          <a:ln/>
-        </p:spPr>
-        <p:txBody>
-          <a:bodyPr wrap="square" lIns="0" tIns="0" rIns="0" bIns="0" rtlCol="0" anchor="t"/>
-          <a:lstStyle/>
-          <a:p>
-            <a:pPr marL="0" indent="0">
-              <a:buNone/>
-            </a:pPr>
-            <a:r>
-              <a:rPr lang="en-US" sz="1400" b="1" dirty="0">
-                <a:solidFill>
-                  <a:schemeClr val="tx2"/>
-                </a:solidFill>
-              </a:rPr>
-              <a:t>★ trivy</a:t>
-            </a:r>
-            <a:endParaRPr lang="en-US" sz="1400" dirty="0"/>
-          </a:p>
-        </p:txBody>
-      </p:sp>
-      <p:sp>
-        <p:nvSpPr>
-          <p:cNvPr id="35" name="txt-369"/>
-          <p:cNvSpPr txBox="1"/>
-          <p:nvPr/>
-        </p:nvSpPr>
-        <p:spPr>
-          <a:xfrm>
-            <a:off x="6355080" y="3273552"/>
-            <a:ext cx="2377440" cy="301752"/>
-          </a:xfrm>
-          <a:prstGeom prst="rect">
-            <a:avLst/>
-          </a:prstGeom>
-          <a:noFill/>
-          <a:ln/>
-        </p:spPr>
-        <p:txBody>
-          <a:bodyPr wrap="square" lIns="0" tIns="0" rIns="0" bIns="0" rtlCol="0" anchor="t"/>
-          <a:lstStyle/>
-          <a:p>
-            <a:pPr marL="0" indent="0">
-              <a:buNone/>
-            </a:pPr>
-            <a:r>
-              <a:rPr lang="en-US" sz="1100" dirty="0">
-                <a:solidFill>
-                  <a:schemeClr val="accent6"/>
-                </a:solidFill>
-              </a:rPr>
-              <a:t>弱點 + 授權；--vex</a:t>
-            </a:r>
-            <a:endParaRPr lang="en-US" sz="1100" dirty="0"/>
-          </a:p>
-        </p:txBody>
-      </p:sp>
-      <p:sp>
-        <p:nvSpPr>
-          <p:cNvPr id="36" name="card-370"/>
-          <p:cNvSpPr/>
-          <p:nvPr/>
-        </p:nvSpPr>
-        <p:spPr>
-          <a:xfrm>
-            <a:off x="6217920" y="3712464"/>
-            <a:ext cx="2651760" cy="713232"/>
-          </a:xfrm>
-          <a:prstGeom prst="roundRect">
-            <a:avLst>
-              <a:gd name="adj" fmla="val 10256"/>
-            </a:avLst>
-          </a:prstGeom>
-          <a:solidFill>
-            <a:srgbClr val="DCEFEA"/>
-          </a:solidFill>
-          <a:ln/>
-        </p:spPr>
-        <p:txBody>
-          <a:bodyPr/>
-          <a:lstStyle/>
-          <a:p>
-            <a:endParaRPr lang="zh-TW" altLang="en-US"/>
-          </a:p>
-        </p:txBody>
-      </p:sp>
-      <p:sp>
-        <p:nvSpPr>
-          <p:cNvPr id="37" name="txt-371"/>
-          <p:cNvSpPr txBox="1"/>
-          <p:nvPr/>
-        </p:nvSpPr>
-        <p:spPr>
-          <a:xfrm>
-            <a:off x="6355080" y="3767328"/>
-            <a:ext cx="2377440" cy="320040"/>
-          </a:xfrm>
-          <a:prstGeom prst="rect">
-            <a:avLst/>
-          </a:prstGeom>
-          <a:noFill/>
-          <a:ln/>
-        </p:spPr>
-        <p:txBody>
-          <a:bodyPr wrap="square" lIns="0" tIns="0" rIns="0" bIns="0" rtlCol="0" anchor="t"/>
-          <a:lstStyle/>
-          <a:p>
-            <a:pPr marL="0" indent="0">
-              <a:buNone/>
-            </a:pPr>
-            <a:r>
-              <a:rPr lang="en-US" sz="1400" b="1" dirty="0">
-                <a:solidFill>
-                  <a:schemeClr val="tx2"/>
-                </a:solidFill>
-              </a:rPr>
-              <a:t>★ retire.js</a:t>
-            </a:r>
-            <a:endParaRPr lang="en-US" sz="1400" dirty="0"/>
-          </a:p>
-        </p:txBody>
-      </p:sp>
-      <p:sp>
-        <p:nvSpPr>
-          <p:cNvPr id="38" name="txt-372"/>
-          <p:cNvSpPr txBox="1"/>
-          <p:nvPr/>
-        </p:nvSpPr>
-        <p:spPr>
-          <a:xfrm>
-            <a:off x="6355080" y="4078224"/>
-            <a:ext cx="2377440" cy="301752"/>
-          </a:xfrm>
-          <a:prstGeom prst="rect">
-            <a:avLst/>
-          </a:prstGeom>
-          <a:noFill/>
-          <a:ln/>
-        </p:spPr>
-        <p:txBody>
-          <a:bodyPr wrap="square" lIns="0" tIns="0" rIns="0" bIns="0" rtlCol="0" anchor="t"/>
-          <a:lstStyle/>
-          <a:p>
-            <a:pPr marL="0" indent="0">
-              <a:buNone/>
-            </a:pPr>
-            <a:r>
-              <a:rPr lang="en-US" sz="1100" dirty="0">
-                <a:solidFill>
-                  <a:schemeClr val="accent6"/>
-                </a:solidFill>
-              </a:rPr>
-              <a:t>JS 函式庫弱點</a:t>
-            </a:r>
-            <a:endParaRPr lang="en-US" sz="1100" dirty="0"/>
-          </a:p>
-        </p:txBody>
-      </p:sp>
-      <p:sp>
-        <p:nvSpPr>
-          <p:cNvPr id="39" name="card-373"/>
-          <p:cNvSpPr/>
-          <p:nvPr/>
-        </p:nvSpPr>
-        <p:spPr>
-          <a:xfrm>
-            <a:off x="9052560" y="1371600"/>
-            <a:ext cx="2651760" cy="548640"/>
-          </a:xfrm>
-          <a:prstGeom prst="roundRect">
-            <a:avLst>
-              <a:gd name="adj" fmla="val 16667"/>
-            </a:avLst>
-          </a:prstGeom>
-          <a:solidFill>
-            <a:srgbClr val="E8A33D"/>
-          </a:solidFill>
-          <a:ln/>
-        </p:spPr>
-        <p:txBody>
-          <a:bodyPr/>
-          <a:lstStyle/>
-          <a:p>
-            <a:endParaRPr lang="zh-TW" altLang="en-US"/>
-          </a:p>
-        </p:txBody>
-      </p:sp>
-      <p:sp>
-        <p:nvSpPr>
-          <p:cNvPr id="40" name="txt-374"/>
-          <p:cNvSpPr txBox="1"/>
-          <p:nvPr/>
-        </p:nvSpPr>
-        <p:spPr>
-          <a:xfrm>
-            <a:off x="9052560" y="1371600"/>
-            <a:ext cx="2651760" cy="548640"/>
-          </a:xfrm>
-          <a:prstGeom prst="rect">
-            <a:avLst/>
-          </a:prstGeom>
-          <a:noFill/>
-          <a:ln/>
-        </p:spPr>
-        <p:txBody>
-          <a:bodyPr wrap="square" lIns="0" tIns="0" rIns="0" bIns="0" rtlCol="0" anchor="ctr"/>
-          <a:lstStyle/>
-          <a:p>
-            <a:pPr marL="0" indent="0" algn="ctr">
-              <a:buNone/>
-            </a:pPr>
-            <a:r>
-              <a:rPr lang="en-US" sz="1600" b="1" dirty="0">
-                <a:solidFill>
-                  <a:schemeClr val="tx2"/>
-                </a:solidFill>
-              </a:rPr>
-              <a:t>VEX</a:t>
-            </a:r>
-            <a:endParaRPr lang="en-US" sz="1600" dirty="0"/>
-          </a:p>
-        </p:txBody>
-      </p:sp>
-      <p:sp>
-        <p:nvSpPr>
-          <p:cNvPr id="41" name="card-375"/>
-          <p:cNvSpPr/>
-          <p:nvPr/>
-        </p:nvSpPr>
-        <p:spPr>
-          <a:xfrm>
-            <a:off x="9052560" y="2103120"/>
-            <a:ext cx="2651760" cy="713232"/>
-          </a:xfrm>
-          <a:prstGeom prst="roundRect">
-            <a:avLst>
-              <a:gd name="adj" fmla="val 10256"/>
-            </a:avLst>
-          </a:prstGeom>
-          <a:solidFill>
-            <a:schemeClr val="bg2"/>
-          </a:solidFill>
-          <a:ln/>
-        </p:spPr>
-        <p:txBody>
-          <a:bodyPr/>
-          <a:lstStyle/>
-          <a:p>
-            <a:endParaRPr lang="zh-TW" altLang="en-US"/>
-          </a:p>
-        </p:txBody>
-      </p:sp>
-      <p:sp>
-        <p:nvSpPr>
-          <p:cNvPr id="42" name="txt-376"/>
-          <p:cNvSpPr txBox="1"/>
-          <p:nvPr/>
-        </p:nvSpPr>
-        <p:spPr>
-          <a:xfrm>
-            <a:off x="9189720" y="2157984"/>
-            <a:ext cx="2377440" cy="320040"/>
-          </a:xfrm>
-          <a:prstGeom prst="rect">
-            <a:avLst/>
-          </a:prstGeom>
-          <a:noFill/>
-          <a:ln/>
-        </p:spPr>
-        <p:txBody>
-          <a:bodyPr wrap="square" lIns="0" tIns="0" rIns="0" bIns="0" rtlCol="0" anchor="t"/>
-          <a:lstStyle/>
-          <a:p>
-            <a:pPr marL="0" indent="0">
-              <a:buNone/>
-            </a:pPr>
-            <a:r>
-              <a:rPr lang="en-US" sz="1400" b="1" dirty="0">
-                <a:solidFill>
-                  <a:schemeClr val="tx2"/>
-                </a:solidFill>
-              </a:rPr>
-              <a:t>vexctl</a:t>
-            </a:r>
-            <a:endParaRPr lang="en-US" sz="1400" dirty="0"/>
-          </a:p>
-        </p:txBody>
-      </p:sp>
-      <p:sp>
-        <p:nvSpPr>
-          <p:cNvPr id="43" name="txt-377"/>
-          <p:cNvSpPr txBox="1"/>
-          <p:nvPr/>
-        </p:nvSpPr>
-        <p:spPr>
-          <a:xfrm>
-            <a:off x="9189720" y="2468880"/>
-            <a:ext cx="2377440" cy="301752"/>
-          </a:xfrm>
-          <a:prstGeom prst="rect">
-            <a:avLst/>
-          </a:prstGeom>
-          <a:noFill/>
-          <a:ln/>
-        </p:spPr>
-        <p:txBody>
-          <a:bodyPr wrap="square" lIns="0" tIns="0" rIns="0" bIns="0" rtlCol="0" anchor="t"/>
-          <a:lstStyle/>
-          <a:p>
-            <a:pPr marL="0" indent="0">
-              <a:buNone/>
-            </a:pPr>
-            <a:r>
-              <a:rPr lang="en-US" sz="1100" dirty="0">
-                <a:solidFill>
-                  <a:schemeClr val="accent6"/>
-                </a:solidFill>
-              </a:rPr>
-              <a:t>create／merge／validate／attest</a:t>
-            </a:r>
-            <a:endParaRPr lang="en-US" sz="1100" dirty="0"/>
-          </a:p>
-        </p:txBody>
-      </p:sp>
-      <p:sp>
-        <p:nvSpPr>
-          <p:cNvPr id="44" name="card-378"/>
-          <p:cNvSpPr/>
-          <p:nvPr/>
-        </p:nvSpPr>
-        <p:spPr>
-          <a:xfrm>
-            <a:off x="9052560" y="2907792"/>
-            <a:ext cx="2651760" cy="713232"/>
-          </a:xfrm>
-          <a:prstGeom prst="roundRect">
-            <a:avLst>
-              <a:gd name="adj" fmla="val 10256"/>
-            </a:avLst>
-          </a:prstGeom>
-          <a:solidFill>
-            <a:schemeClr val="bg2"/>
-          </a:solidFill>
-          <a:ln/>
-        </p:spPr>
-        <p:txBody>
-          <a:bodyPr/>
-          <a:lstStyle/>
-          <a:p>
-            <a:endParaRPr lang="zh-TW" altLang="en-US"/>
-          </a:p>
-        </p:txBody>
-      </p:sp>
-      <p:sp>
-        <p:nvSpPr>
-          <p:cNvPr id="45" name="txt-379"/>
-          <p:cNvSpPr txBox="1"/>
-          <p:nvPr/>
-        </p:nvSpPr>
-        <p:spPr>
-          <a:xfrm>
-            <a:off x="9189720" y="2962656"/>
-            <a:ext cx="2377440" cy="320040"/>
-          </a:xfrm>
-          <a:prstGeom prst="rect">
-            <a:avLst/>
-          </a:prstGeom>
-          <a:noFill/>
-          <a:ln/>
-        </p:spPr>
-        <p:txBody>
-          <a:bodyPr wrap="square" lIns="0" tIns="0" rIns="0" bIns="0" rtlCol="0" anchor="t"/>
-          <a:lstStyle/>
-          <a:p>
-            <a:pPr marL="0" indent="0">
-              <a:buNone/>
-            </a:pPr>
-            <a:r>
-              <a:rPr lang="en-US" sz="1400" b="1" dirty="0">
-                <a:solidFill>
-                  <a:schemeClr val="tx2"/>
-                </a:solidFill>
-              </a:rPr>
-              <a:t>trivy --vex</a:t>
-            </a:r>
-            <a:endParaRPr lang="en-US" sz="1400" dirty="0"/>
-          </a:p>
-        </p:txBody>
-      </p:sp>
-      <p:sp>
-        <p:nvSpPr>
-          <p:cNvPr id="46" name="txt-380"/>
-          <p:cNvSpPr txBox="1"/>
-          <p:nvPr/>
-        </p:nvSpPr>
-        <p:spPr>
-          <a:xfrm>
-            <a:off x="9189720" y="3273552"/>
-            <a:ext cx="2377440" cy="301752"/>
-          </a:xfrm>
-          <a:prstGeom prst="rect">
-            <a:avLst/>
-          </a:prstGeom>
-          <a:noFill/>
-          <a:ln/>
-        </p:spPr>
-        <p:txBody>
-          <a:bodyPr wrap="square" lIns="0" tIns="0" rIns="0" bIns="0" rtlCol="0" anchor="t"/>
-          <a:lstStyle/>
-          <a:p>
-            <a:pPr marL="0" indent="0">
-              <a:buNone/>
-            </a:pPr>
-            <a:r>
-              <a:rPr lang="en-US" sz="1100" dirty="0">
-                <a:solidFill>
-                  <a:schemeClr val="accent6"/>
-                </a:solidFill>
-              </a:rPr>
-              <a:t>套用 VEX 過濾</a:t>
-            </a:r>
-            <a:endParaRPr lang="en-US" sz="1100" dirty="0"/>
-          </a:p>
-        </p:txBody>
-      </p:sp>
-      <p:sp>
-        <p:nvSpPr>
-          <p:cNvPr id="47" name="txt-381"/>
-          <p:cNvSpPr txBox="1"/>
-          <p:nvPr/>
-        </p:nvSpPr>
-        <p:spPr>
-          <a:xfrm>
-            <a:off x="548640" y="6172200"/>
-            <a:ext cx="4572000" cy="274320"/>
-          </a:xfrm>
-          <a:prstGeom prst="rect">
-            <a:avLst/>
-          </a:prstGeom>
-          <a:noFill/>
-          <a:ln/>
-        </p:spPr>
-        <p:txBody>
-          <a:bodyPr wrap="square" lIns="0" tIns="0" rIns="0" bIns="0" rtlCol="0" anchor="t"/>
-          <a:lstStyle/>
-          <a:p>
-            <a:pPr marL="0" indent="0">
-              <a:buNone/>
-            </a:pPr>
-            <a:r>
-              <a:rPr lang="en-US" sz="1200" b="1" dirty="0">
-                <a:solidFill>
-                  <a:schemeClr val="accent1"/>
-                </a:solidFill>
-              </a:rPr>
-              <a:t>★ 本次實測或腳本中使用</a:t>
-            </a:r>
-            <a:endParaRPr lang="en-US" sz="1200" dirty="0"/>
-          </a:p>
-        </p:txBody>
-      </p:sp>
-      <p:sp>
-        <p:nvSpPr>
-          <p:cNvPr id="48" name="Slide Number Placeholder 0"/>
-          <p:cNvSpPr>
-            <a:spLocks noGrp="1"/>
-          </p:cNvSpPr>
-          <p:nvPr>
-            <p:ph type="sldNum" sz="quarter" idx="4294967295"/>
-          </p:nvPr>
-        </p:nvSpPr>
-        <p:spPr>
-          <a:xfrm>
-            <a:off x="11155680" y="6400800"/>
-            <a:ext cx="457200" cy="274320"/>
-          </a:xfrm>
-          <a:prstGeom prst="rect">
-            <a:avLst/>
-          </a:prstGeom>
-          <a:extLst>
-            <a:ext uri="{C572A759-6A51-4108-AA02-DFA0A04FC94B}">
-              <ma14:wrappingTextBoxFlag xmlns:ma14="http://schemas.microsoft.com/office/mac/drawingml/2011/main" xmlns="" val="0"/>
-            </a:ext>
-          </a:extLst>
-        </p:spPr>
-        <p:txBody>
-          <a:bodyPr/>
-          <a:lstStyle>
-            <a:lvl1pPr>
-              <a:defRPr sz="1000">
-                <a:solidFill>
-                  <a:schemeClr val="accent6"/>
-                </a:solidFill>
-              </a:defRPr>
-            </a:lvl1pPr>
-          </a:lstStyle>
-          <a:p>
-            <a:pPr algn="r"/>
-            <a:fld id="{F7021451-1387-4CA6-816F-3879F97B5CBC}" type="slidenum">
-              <a:rPr lang="en-US" b="0"/>
-              <a:t>19</a:t>
-            </a:fld>
-            <a:endParaRPr lang="en-US"/>
           </a:p>
         </p:txBody>
       </p:sp>
@@ -13652,22 +13141,7 @@
                   </a:extLst>
                 </a:hlinkClick>
               </a:rPr>
-              <a:t>資</a:t>
-            </a:r>
-            <a:r>
-              <a:rPr lang="zh-TW" altLang="zh-TW" sz="1500" b="1" dirty="0">
-                <a:solidFill>
-                  <a:srgbClr val="FF0000"/>
-                </a:solidFill>
-                <a:hlinkClick r:id="rId3">
-                  <a:extLst>
-                    <a:ext uri="{A12FA001-AC4F-418D-AE19-62706E023703}">
-                      <ahyp:hlinkClr xmlns:ahyp="http://schemas.microsoft.com/office/drawing/2018/hyperlinkcolor" val="tx"/>
-                    </a:ext>
-                  </a:extLst>
-                </a:hlinkClick>
-              </a:rPr>
-              <a:t>安日報】2021年12月17日，Log4Shell出現大量攻擊、間諜軟體攻擊全球工控系統</a:t>
+              <a:t>資安日報】2021年12月17日，Log4Shell出現大量攻擊、間諜軟體攻擊全球工控系統</a:t>
             </a:r>
             <a:endParaRPr lang="zh-TW" altLang="zh-TW" sz="1500" b="1" dirty="0">
               <a:solidFill>
@@ -13691,8 +13165,8 @@
         </p:nvSpPr>
         <p:spPr>
           <a:xfrm>
-            <a:off x="914400" y="2331720"/>
-            <a:ext cx="6035040" cy="1371600"/>
+            <a:off x="914400" y="2636520"/>
+            <a:ext cx="6035040" cy="1188720"/>
           </a:xfrm>
           <a:prstGeom prst="rect">
             <a:avLst/>
@@ -14321,7 +13795,7 @@
           </a:prstGeom>
           <a:extLst>
             <a:ext uri="{C572A759-6A51-4108-AA02-DFA0A04FC94B}">
-              <ma14:wrappingTextBoxFlag xmlns:ma14="http://schemas.microsoft.com/office/mac/drawingml/2011/main" xmlns="" val="0"/>
+              <ma14:wrappingTextBoxFlag xmlns="" xmlns:ma14="http://schemas.microsoft.com/office/mac/drawingml/2011/main" val="0"/>
             </a:ext>
           </a:extLst>
         </p:spPr>
@@ -14355,6 +13829,1855 @@
 </file>
 
 <file path=ppt/slides/slide20.xml><?xml version="1.0" encoding="utf-8"?>
+<p:sld xmlns:a="http://schemas.openxmlformats.org/drawingml/2006/main" xmlns:r="http://schemas.openxmlformats.org/officeDocument/2006/relationships" xmlns:p="http://schemas.openxmlformats.org/presentationml/2006/main">
+  <p:cSld name="Slide 18">
+    <p:spTree>
+      <p:nvGrpSpPr>
+        <p:cNvPr id="1" name=""/>
+        <p:cNvGrpSpPr/>
+        <p:nvPr/>
+      </p:nvGrpSpPr>
+      <p:grpSpPr>
+        <a:xfrm>
+          <a:off x="0" y="0"/>
+          <a:ext cx="0" cy="0"/>
+          <a:chOff x="0" y="0"/>
+          <a:chExt cx="0" cy="0"/>
+        </a:xfrm>
+      </p:grpSpPr>
+      <p:sp>
+        <p:nvSpPr>
+          <p:cNvPr id="2" name="Text 0"/>
+          <p:cNvSpPr>
+            <a:spLocks noGrp="1"/>
+          </p:cNvSpPr>
+          <p:nvPr>
+            <p:ph type="title" idx="100" hasCustomPrompt="1"/>
+          </p:nvPr>
+        </p:nvSpPr>
+        <p:spPr>
+          <a:xfrm>
+            <a:off x="548640" y="320040"/>
+            <a:ext cx="11064240" cy="777240"/>
+          </a:xfrm>
+          <a:prstGeom prst="rect">
+            <a:avLst/>
+          </a:prstGeom>
+          <a:noFill/>
+          <a:ln/>
+        </p:spPr>
+        <p:txBody>
+          <a:bodyPr wrap="square" lIns="0" tIns="0" rIns="0" bIns="0" rtlCol="0" anchor="ctr"/>
+          <a:lstStyle/>
+          <a:p>
+            <a:pPr marL="0" indent="0" algn="l">
+              <a:buNone/>
+            </a:pPr>
+            <a:r>
+              <a:rPr lang="en-US" sz="3200" b="1" dirty="0">
+                <a:solidFill>
+                  <a:schemeClr val="tx2"/>
+                </a:solidFill>
+              </a:rPr>
+              <a:t>SBOM </a:t>
+            </a:r>
+            <a:r>
+              <a:rPr lang="en-US" sz="3200" b="1" dirty="0" err="1">
+                <a:solidFill>
+                  <a:schemeClr val="tx2"/>
+                </a:solidFill>
+              </a:rPr>
+              <a:t>工具地圖</a:t>
+            </a:r>
+            <a:endParaRPr lang="en-US" sz="3200" dirty="0"/>
+          </a:p>
+        </p:txBody>
+      </p:sp>
+      <p:sp>
+        <p:nvSpPr>
+          <p:cNvPr id="3" name="card-337"/>
+          <p:cNvSpPr/>
+          <p:nvPr/>
+        </p:nvSpPr>
+        <p:spPr>
+          <a:xfrm>
+            <a:off x="548640" y="1371600"/>
+            <a:ext cx="2651760" cy="548640"/>
+          </a:xfrm>
+          <a:prstGeom prst="roundRect">
+            <a:avLst>
+              <a:gd name="adj" fmla="val 16667"/>
+            </a:avLst>
+          </a:prstGeom>
+          <a:solidFill>
+            <a:srgbClr val="0E7C6B"/>
+          </a:solidFill>
+          <a:ln/>
+        </p:spPr>
+        <p:txBody>
+          <a:bodyPr/>
+          <a:lstStyle/>
+          <a:p>
+            <a:endParaRPr lang="zh-TW" altLang="en-US"/>
+          </a:p>
+        </p:txBody>
+      </p:sp>
+      <p:sp>
+        <p:nvSpPr>
+          <p:cNvPr id="4" name="txt-338"/>
+          <p:cNvSpPr txBox="1"/>
+          <p:nvPr/>
+        </p:nvSpPr>
+        <p:spPr>
+          <a:xfrm>
+            <a:off x="548640" y="1371600"/>
+            <a:ext cx="2651760" cy="548640"/>
+          </a:xfrm>
+          <a:prstGeom prst="rect">
+            <a:avLst/>
+          </a:prstGeom>
+          <a:noFill/>
+          <a:ln/>
+        </p:spPr>
+        <p:txBody>
+          <a:bodyPr wrap="square" lIns="0" tIns="0" rIns="0" bIns="0" rtlCol="0" anchor="ctr"/>
+          <a:lstStyle/>
+          <a:p>
+            <a:pPr marL="0" indent="0" algn="ctr">
+              <a:buNone/>
+            </a:pPr>
+            <a:r>
+              <a:rPr lang="en-US" sz="1600" b="1" dirty="0">
+                <a:solidFill>
+                  <a:schemeClr val="bg1"/>
+                </a:solidFill>
+              </a:rPr>
+              <a:t>產生</a:t>
+            </a:r>
+            <a:endParaRPr lang="en-US" sz="1600" dirty="0"/>
+          </a:p>
+        </p:txBody>
+      </p:sp>
+      <p:sp>
+        <p:nvSpPr>
+          <p:cNvPr id="5" name="card-339"/>
+          <p:cNvSpPr/>
+          <p:nvPr/>
+        </p:nvSpPr>
+        <p:spPr>
+          <a:xfrm>
+            <a:off x="548640" y="2103120"/>
+            <a:ext cx="2651760" cy="713232"/>
+          </a:xfrm>
+          <a:prstGeom prst="roundRect">
+            <a:avLst>
+              <a:gd name="adj" fmla="val 10256"/>
+            </a:avLst>
+          </a:prstGeom>
+          <a:solidFill>
+            <a:srgbClr val="DCEFEA"/>
+          </a:solidFill>
+          <a:ln/>
+        </p:spPr>
+        <p:txBody>
+          <a:bodyPr/>
+          <a:lstStyle/>
+          <a:p>
+            <a:endParaRPr lang="zh-TW" altLang="en-US"/>
+          </a:p>
+        </p:txBody>
+      </p:sp>
+      <p:sp>
+        <p:nvSpPr>
+          <p:cNvPr id="6" name="txt-340"/>
+          <p:cNvSpPr txBox="1"/>
+          <p:nvPr/>
+        </p:nvSpPr>
+        <p:spPr>
+          <a:xfrm>
+            <a:off x="685800" y="2157984"/>
+            <a:ext cx="2377440" cy="320040"/>
+          </a:xfrm>
+          <a:prstGeom prst="rect">
+            <a:avLst/>
+          </a:prstGeom>
+          <a:noFill/>
+          <a:ln/>
+        </p:spPr>
+        <p:txBody>
+          <a:bodyPr wrap="square" lIns="0" tIns="0" rIns="0" bIns="0" rtlCol="0" anchor="t"/>
+          <a:lstStyle/>
+          <a:p>
+            <a:pPr marL="0" indent="0">
+              <a:buNone/>
+            </a:pPr>
+            <a:r>
+              <a:rPr lang="en-US" sz="1400" b="1" dirty="0">
+                <a:solidFill>
+                  <a:schemeClr val="tx2"/>
+                </a:solidFill>
+              </a:rPr>
+              <a:t>★ syft</a:t>
+            </a:r>
+            <a:endParaRPr lang="en-US" sz="1400" dirty="0"/>
+          </a:p>
+        </p:txBody>
+      </p:sp>
+      <p:sp>
+        <p:nvSpPr>
+          <p:cNvPr id="7" name="txt-341"/>
+          <p:cNvSpPr txBox="1"/>
+          <p:nvPr/>
+        </p:nvSpPr>
+        <p:spPr>
+          <a:xfrm>
+            <a:off x="685800" y="2468880"/>
+            <a:ext cx="2377440" cy="301752"/>
+          </a:xfrm>
+          <a:prstGeom prst="rect">
+            <a:avLst/>
+          </a:prstGeom>
+          <a:noFill/>
+          <a:ln/>
+        </p:spPr>
+        <p:txBody>
+          <a:bodyPr wrap="square" lIns="0" tIns="0" rIns="0" bIns="0" rtlCol="0" anchor="t"/>
+          <a:lstStyle/>
+          <a:p>
+            <a:pPr marL="0" indent="0">
+              <a:buNone/>
+            </a:pPr>
+            <a:r>
+              <a:rPr lang="en-US" sz="1100" dirty="0">
+                <a:solidFill>
+                  <a:schemeClr val="accent6"/>
+                </a:solidFill>
+              </a:rPr>
+              <a:t>多生態系；掃目錄／映像</a:t>
+            </a:r>
+            <a:endParaRPr lang="en-US" sz="1100" dirty="0"/>
+          </a:p>
+        </p:txBody>
+      </p:sp>
+      <p:sp>
+        <p:nvSpPr>
+          <p:cNvPr id="8" name="card-342"/>
+          <p:cNvSpPr/>
+          <p:nvPr/>
+        </p:nvSpPr>
+        <p:spPr>
+          <a:xfrm>
+            <a:off x="548640" y="2907792"/>
+            <a:ext cx="2651760" cy="713232"/>
+          </a:xfrm>
+          <a:prstGeom prst="roundRect">
+            <a:avLst>
+              <a:gd name="adj" fmla="val 10256"/>
+            </a:avLst>
+          </a:prstGeom>
+          <a:solidFill>
+            <a:srgbClr val="DCEFEA"/>
+          </a:solidFill>
+          <a:ln/>
+        </p:spPr>
+        <p:txBody>
+          <a:bodyPr/>
+          <a:lstStyle/>
+          <a:p>
+            <a:endParaRPr lang="zh-TW" altLang="en-US"/>
+          </a:p>
+        </p:txBody>
+      </p:sp>
+      <p:sp>
+        <p:nvSpPr>
+          <p:cNvPr id="9" name="txt-343"/>
+          <p:cNvSpPr txBox="1"/>
+          <p:nvPr/>
+        </p:nvSpPr>
+        <p:spPr>
+          <a:xfrm>
+            <a:off x="685800" y="2962656"/>
+            <a:ext cx="2377440" cy="320040"/>
+          </a:xfrm>
+          <a:prstGeom prst="rect">
+            <a:avLst/>
+          </a:prstGeom>
+          <a:noFill/>
+          <a:ln/>
+        </p:spPr>
+        <p:txBody>
+          <a:bodyPr wrap="square" lIns="0" tIns="0" rIns="0" bIns="0" rtlCol="0" anchor="t"/>
+          <a:lstStyle/>
+          <a:p>
+            <a:pPr marL="0" indent="0">
+              <a:buNone/>
+            </a:pPr>
+            <a:r>
+              <a:rPr lang="en-US" sz="1400" b="1" dirty="0">
+                <a:solidFill>
+                  <a:schemeClr val="tx2"/>
+                </a:solidFill>
+              </a:rPr>
+              <a:t>★ dotnet-CycloneDX</a:t>
+            </a:r>
+            <a:endParaRPr lang="en-US" sz="1400" dirty="0"/>
+          </a:p>
+        </p:txBody>
+      </p:sp>
+      <p:sp>
+        <p:nvSpPr>
+          <p:cNvPr id="10" name="txt-344"/>
+          <p:cNvSpPr txBox="1"/>
+          <p:nvPr/>
+        </p:nvSpPr>
+        <p:spPr>
+          <a:xfrm>
+            <a:off x="685800" y="3273552"/>
+            <a:ext cx="2377440" cy="301752"/>
+          </a:xfrm>
+          <a:prstGeom prst="rect">
+            <a:avLst/>
+          </a:prstGeom>
+          <a:noFill/>
+          <a:ln/>
+        </p:spPr>
+        <p:txBody>
+          <a:bodyPr wrap="square" lIns="0" tIns="0" rIns="0" bIns="0" rtlCol="0" anchor="t"/>
+          <a:lstStyle/>
+          <a:p>
+            <a:pPr marL="0" indent="0">
+              <a:buNone/>
+            </a:pPr>
+            <a:r>
+              <a:rPr lang="en-US" sz="1100" dirty="0">
+                <a:solidFill>
+                  <a:schemeClr val="accent6"/>
+                </a:solidFill>
+              </a:rPr>
+              <a:t>.NET 專案檔；含授權</a:t>
+            </a:r>
+            <a:endParaRPr lang="en-US" sz="1100" dirty="0"/>
+          </a:p>
+        </p:txBody>
+      </p:sp>
+      <p:sp>
+        <p:nvSpPr>
+          <p:cNvPr id="11" name="card-345"/>
+          <p:cNvSpPr/>
+          <p:nvPr/>
+        </p:nvSpPr>
+        <p:spPr>
+          <a:xfrm>
+            <a:off x="548640" y="3712464"/>
+            <a:ext cx="2651760" cy="713232"/>
+          </a:xfrm>
+          <a:prstGeom prst="roundRect">
+            <a:avLst>
+              <a:gd name="adj" fmla="val 10256"/>
+            </a:avLst>
+          </a:prstGeom>
+          <a:solidFill>
+            <a:schemeClr val="bg2"/>
+          </a:solidFill>
+          <a:ln/>
+        </p:spPr>
+        <p:txBody>
+          <a:bodyPr/>
+          <a:lstStyle/>
+          <a:p>
+            <a:endParaRPr lang="zh-TW" altLang="en-US"/>
+          </a:p>
+        </p:txBody>
+      </p:sp>
+      <p:sp>
+        <p:nvSpPr>
+          <p:cNvPr id="12" name="txt-346"/>
+          <p:cNvSpPr txBox="1"/>
+          <p:nvPr/>
+        </p:nvSpPr>
+        <p:spPr>
+          <a:xfrm>
+            <a:off x="685800" y="3767328"/>
+            <a:ext cx="2377440" cy="320040"/>
+          </a:xfrm>
+          <a:prstGeom prst="rect">
+            <a:avLst/>
+          </a:prstGeom>
+          <a:noFill/>
+          <a:ln/>
+        </p:spPr>
+        <p:txBody>
+          <a:bodyPr wrap="square" lIns="0" tIns="0" rIns="0" bIns="0" rtlCol="0" anchor="t"/>
+          <a:lstStyle/>
+          <a:p>
+            <a:pPr marL="0" indent="0">
+              <a:buNone/>
+            </a:pPr>
+            <a:r>
+              <a:rPr lang="en-US" sz="1400" b="1" dirty="0">
+                <a:solidFill>
+                  <a:schemeClr val="tx2"/>
+                </a:solidFill>
+              </a:rPr>
+              <a:t>cyclonedx-npm</a:t>
+            </a:r>
+            <a:endParaRPr lang="en-US" sz="1400" dirty="0"/>
+          </a:p>
+        </p:txBody>
+      </p:sp>
+      <p:sp>
+        <p:nvSpPr>
+          <p:cNvPr id="13" name="txt-347"/>
+          <p:cNvSpPr txBox="1"/>
+          <p:nvPr/>
+        </p:nvSpPr>
+        <p:spPr>
+          <a:xfrm>
+            <a:off x="685800" y="4078224"/>
+            <a:ext cx="2377440" cy="301752"/>
+          </a:xfrm>
+          <a:prstGeom prst="rect">
+            <a:avLst/>
+          </a:prstGeom>
+          <a:noFill/>
+          <a:ln/>
+        </p:spPr>
+        <p:txBody>
+          <a:bodyPr wrap="square" lIns="0" tIns="0" rIns="0" bIns="0" rtlCol="0" anchor="t"/>
+          <a:lstStyle/>
+          <a:p>
+            <a:pPr marL="0" indent="0">
+              <a:buNone/>
+            </a:pPr>
+            <a:r>
+              <a:rPr lang="en-US" sz="1100" dirty="0">
+                <a:solidFill>
+                  <a:schemeClr val="accent6"/>
+                </a:solidFill>
+              </a:rPr>
+              <a:t>npm 依賴樹／lockfile</a:t>
+            </a:r>
+            <a:endParaRPr lang="en-US" sz="1100" dirty="0"/>
+          </a:p>
+        </p:txBody>
+      </p:sp>
+      <p:sp>
+        <p:nvSpPr>
+          <p:cNvPr id="14" name="card-348"/>
+          <p:cNvSpPr/>
+          <p:nvPr/>
+        </p:nvSpPr>
+        <p:spPr>
+          <a:xfrm>
+            <a:off x="548640" y="4517136"/>
+            <a:ext cx="2651760" cy="713232"/>
+          </a:xfrm>
+          <a:prstGeom prst="roundRect">
+            <a:avLst>
+              <a:gd name="adj" fmla="val 10256"/>
+            </a:avLst>
+          </a:prstGeom>
+          <a:solidFill>
+            <a:schemeClr val="bg2"/>
+          </a:solidFill>
+          <a:ln/>
+        </p:spPr>
+        <p:txBody>
+          <a:bodyPr/>
+          <a:lstStyle/>
+          <a:p>
+            <a:endParaRPr lang="zh-TW" altLang="en-US"/>
+          </a:p>
+        </p:txBody>
+      </p:sp>
+      <p:sp>
+        <p:nvSpPr>
+          <p:cNvPr id="15" name="txt-349"/>
+          <p:cNvSpPr txBox="1"/>
+          <p:nvPr/>
+        </p:nvSpPr>
+        <p:spPr>
+          <a:xfrm>
+            <a:off x="685800" y="4572000"/>
+            <a:ext cx="2377440" cy="320040"/>
+          </a:xfrm>
+          <a:prstGeom prst="rect">
+            <a:avLst/>
+          </a:prstGeom>
+          <a:noFill/>
+          <a:ln/>
+        </p:spPr>
+        <p:txBody>
+          <a:bodyPr wrap="square" lIns="0" tIns="0" rIns="0" bIns="0" rtlCol="0" anchor="t"/>
+          <a:lstStyle/>
+          <a:p>
+            <a:pPr marL="0" indent="0">
+              <a:buNone/>
+            </a:pPr>
+            <a:r>
+              <a:rPr lang="en-US" sz="1400" b="1" dirty="0">
+                <a:solidFill>
+                  <a:schemeClr val="tx2"/>
+                </a:solidFill>
+              </a:rPr>
+              <a:t>Microsoft sbom-tool</a:t>
+            </a:r>
+            <a:endParaRPr lang="en-US" sz="1400" dirty="0"/>
+          </a:p>
+        </p:txBody>
+      </p:sp>
+      <p:sp>
+        <p:nvSpPr>
+          <p:cNvPr id="16" name="txt-350"/>
+          <p:cNvSpPr txBox="1"/>
+          <p:nvPr/>
+        </p:nvSpPr>
+        <p:spPr>
+          <a:xfrm>
+            <a:off x="685800" y="4882896"/>
+            <a:ext cx="2377440" cy="301752"/>
+          </a:xfrm>
+          <a:prstGeom prst="rect">
+            <a:avLst/>
+          </a:prstGeom>
+          <a:noFill/>
+          <a:ln/>
+        </p:spPr>
+        <p:txBody>
+          <a:bodyPr wrap="square" lIns="0" tIns="0" rIns="0" bIns="0" rtlCol="0" anchor="t"/>
+          <a:lstStyle/>
+          <a:p>
+            <a:pPr marL="0" indent="0">
+              <a:buNone/>
+            </a:pPr>
+            <a:r>
+              <a:rPr lang="en-US" sz="1100" dirty="0">
+                <a:solidFill>
+                  <a:schemeClr val="accent6"/>
+                </a:solidFill>
+              </a:rPr>
+              <a:t>只輸出 SPDX</a:t>
+            </a:r>
+            <a:endParaRPr lang="en-US" sz="1100" dirty="0"/>
+          </a:p>
+        </p:txBody>
+      </p:sp>
+      <p:sp>
+        <p:nvSpPr>
+          <p:cNvPr id="17" name="card-351"/>
+          <p:cNvSpPr/>
+          <p:nvPr/>
+        </p:nvSpPr>
+        <p:spPr>
+          <a:xfrm>
+            <a:off x="548640" y="5321808"/>
+            <a:ext cx="2651760" cy="713232"/>
+          </a:xfrm>
+          <a:prstGeom prst="roundRect">
+            <a:avLst>
+              <a:gd name="adj" fmla="val 10256"/>
+            </a:avLst>
+          </a:prstGeom>
+          <a:solidFill>
+            <a:srgbClr val="DCEFEA"/>
+          </a:solidFill>
+          <a:ln/>
+        </p:spPr>
+        <p:txBody>
+          <a:bodyPr/>
+          <a:lstStyle/>
+          <a:p>
+            <a:endParaRPr lang="zh-TW" altLang="en-US"/>
+          </a:p>
+        </p:txBody>
+      </p:sp>
+      <p:sp>
+        <p:nvSpPr>
+          <p:cNvPr id="18" name="txt-352"/>
+          <p:cNvSpPr txBox="1"/>
+          <p:nvPr/>
+        </p:nvSpPr>
+        <p:spPr>
+          <a:xfrm>
+            <a:off x="685800" y="5376672"/>
+            <a:ext cx="2377440" cy="320040"/>
+          </a:xfrm>
+          <a:prstGeom prst="rect">
+            <a:avLst/>
+          </a:prstGeom>
+          <a:noFill/>
+          <a:ln/>
+        </p:spPr>
+        <p:txBody>
+          <a:bodyPr wrap="square" lIns="0" tIns="0" rIns="0" bIns="0" rtlCol="0" anchor="t"/>
+          <a:lstStyle/>
+          <a:p>
+            <a:pPr marL="0" indent="0">
+              <a:buNone/>
+            </a:pPr>
+            <a:r>
+              <a:rPr lang="en-US" sz="1400" b="1" dirty="0">
+                <a:solidFill>
+                  <a:schemeClr val="tx2"/>
+                </a:solidFill>
+              </a:rPr>
+              <a:t>★ retire.js</a:t>
+            </a:r>
+            <a:endParaRPr lang="en-US" sz="1400" dirty="0"/>
+          </a:p>
+        </p:txBody>
+      </p:sp>
+      <p:sp>
+        <p:nvSpPr>
+          <p:cNvPr id="19" name="txt-353"/>
+          <p:cNvSpPr txBox="1"/>
+          <p:nvPr/>
+        </p:nvSpPr>
+        <p:spPr>
+          <a:xfrm>
+            <a:off x="685800" y="5687568"/>
+            <a:ext cx="2377440" cy="301752"/>
+          </a:xfrm>
+          <a:prstGeom prst="rect">
+            <a:avLst/>
+          </a:prstGeom>
+          <a:noFill/>
+          <a:ln/>
+        </p:spPr>
+        <p:txBody>
+          <a:bodyPr wrap="square" lIns="0" tIns="0" rIns="0" bIns="0" rtlCol="0" anchor="t"/>
+          <a:lstStyle/>
+          <a:p>
+            <a:pPr marL="0" indent="0">
+              <a:buNone/>
+            </a:pPr>
+            <a:r>
+              <a:rPr lang="en-US" sz="1100" dirty="0">
+                <a:solidFill>
+                  <a:schemeClr val="accent6"/>
+                </a:solidFill>
+              </a:rPr>
+              <a:t>前端 vendored JS</a:t>
+            </a:r>
+            <a:endParaRPr lang="en-US" sz="1100" dirty="0"/>
+          </a:p>
+        </p:txBody>
+      </p:sp>
+      <p:sp>
+        <p:nvSpPr>
+          <p:cNvPr id="20" name="card-354"/>
+          <p:cNvSpPr/>
+          <p:nvPr/>
+        </p:nvSpPr>
+        <p:spPr>
+          <a:xfrm>
+            <a:off x="3383280" y="1371600"/>
+            <a:ext cx="2651760" cy="548640"/>
+          </a:xfrm>
+          <a:prstGeom prst="roundRect">
+            <a:avLst>
+              <a:gd name="adj" fmla="val 16667"/>
+            </a:avLst>
+          </a:prstGeom>
+          <a:solidFill>
+            <a:srgbClr val="3D5A80"/>
+          </a:solidFill>
+          <a:ln/>
+        </p:spPr>
+        <p:txBody>
+          <a:bodyPr/>
+          <a:lstStyle/>
+          <a:p>
+            <a:endParaRPr lang="zh-TW" altLang="en-US"/>
+          </a:p>
+        </p:txBody>
+      </p:sp>
+      <p:sp>
+        <p:nvSpPr>
+          <p:cNvPr id="21" name="txt-355"/>
+          <p:cNvSpPr txBox="1"/>
+          <p:nvPr/>
+        </p:nvSpPr>
+        <p:spPr>
+          <a:xfrm>
+            <a:off x="3383280" y="1371600"/>
+            <a:ext cx="2651760" cy="548640"/>
+          </a:xfrm>
+          <a:prstGeom prst="rect">
+            <a:avLst/>
+          </a:prstGeom>
+          <a:noFill/>
+          <a:ln/>
+        </p:spPr>
+        <p:txBody>
+          <a:bodyPr wrap="square" lIns="0" tIns="0" rIns="0" bIns="0" rtlCol="0" anchor="ctr"/>
+          <a:lstStyle/>
+          <a:p>
+            <a:pPr marL="0" indent="0" algn="ctr">
+              <a:buNone/>
+            </a:pPr>
+            <a:r>
+              <a:rPr lang="en-US" sz="1600" b="1" dirty="0">
+                <a:solidFill>
+                  <a:schemeClr val="bg1"/>
+                </a:solidFill>
+              </a:rPr>
+              <a:t>驗證・合併・轉換</a:t>
+            </a:r>
+            <a:endParaRPr lang="en-US" sz="1600" dirty="0"/>
+          </a:p>
+        </p:txBody>
+      </p:sp>
+      <p:sp>
+        <p:nvSpPr>
+          <p:cNvPr id="22" name="card-356"/>
+          <p:cNvSpPr/>
+          <p:nvPr/>
+        </p:nvSpPr>
+        <p:spPr>
+          <a:xfrm>
+            <a:off x="3383280" y="2103120"/>
+            <a:ext cx="2651760" cy="713232"/>
+          </a:xfrm>
+          <a:prstGeom prst="roundRect">
+            <a:avLst>
+              <a:gd name="adj" fmla="val 10256"/>
+            </a:avLst>
+          </a:prstGeom>
+          <a:solidFill>
+            <a:srgbClr val="DCEFEA"/>
+          </a:solidFill>
+          <a:ln/>
+        </p:spPr>
+        <p:txBody>
+          <a:bodyPr/>
+          <a:lstStyle/>
+          <a:p>
+            <a:endParaRPr lang="zh-TW" altLang="en-US"/>
+          </a:p>
+        </p:txBody>
+      </p:sp>
+      <p:sp>
+        <p:nvSpPr>
+          <p:cNvPr id="23" name="txt-357"/>
+          <p:cNvSpPr txBox="1"/>
+          <p:nvPr/>
+        </p:nvSpPr>
+        <p:spPr>
+          <a:xfrm>
+            <a:off x="3520440" y="2157984"/>
+            <a:ext cx="2377440" cy="320040"/>
+          </a:xfrm>
+          <a:prstGeom prst="rect">
+            <a:avLst/>
+          </a:prstGeom>
+          <a:noFill/>
+          <a:ln/>
+        </p:spPr>
+        <p:txBody>
+          <a:bodyPr wrap="square" lIns="0" tIns="0" rIns="0" bIns="0" rtlCol="0" anchor="t"/>
+          <a:lstStyle/>
+          <a:p>
+            <a:pPr marL="0" indent="0">
+              <a:buNone/>
+            </a:pPr>
+            <a:r>
+              <a:rPr lang="en-US" sz="1400" b="1" dirty="0">
+                <a:solidFill>
+                  <a:schemeClr val="tx2"/>
+                </a:solidFill>
+              </a:rPr>
+              <a:t>★ cyclonedx-cli</a:t>
+            </a:r>
+            <a:endParaRPr lang="en-US" sz="1400" dirty="0"/>
+          </a:p>
+        </p:txBody>
+      </p:sp>
+      <p:sp>
+        <p:nvSpPr>
+          <p:cNvPr id="24" name="txt-358"/>
+          <p:cNvSpPr txBox="1"/>
+          <p:nvPr/>
+        </p:nvSpPr>
+        <p:spPr>
+          <a:xfrm>
+            <a:off x="3520440" y="2468880"/>
+            <a:ext cx="2377440" cy="301752"/>
+          </a:xfrm>
+          <a:prstGeom prst="rect">
+            <a:avLst/>
+          </a:prstGeom>
+          <a:noFill/>
+          <a:ln/>
+        </p:spPr>
+        <p:txBody>
+          <a:bodyPr wrap="square" lIns="0" tIns="0" rIns="0" bIns="0" rtlCol="0" anchor="t"/>
+          <a:lstStyle/>
+          <a:p>
+            <a:pPr marL="0" indent="0">
+              <a:buNone/>
+            </a:pPr>
+            <a:r>
+              <a:rPr lang="en-US" sz="1100" dirty="0">
+                <a:solidFill>
+                  <a:schemeClr val="accent6"/>
+                </a:solidFill>
+              </a:rPr>
+              <a:t>validate／merge／diff／convert／sign</a:t>
+            </a:r>
+            <a:endParaRPr lang="en-US" sz="1100" dirty="0"/>
+          </a:p>
+        </p:txBody>
+      </p:sp>
+      <p:sp>
+        <p:nvSpPr>
+          <p:cNvPr id="25" name="card-359"/>
+          <p:cNvSpPr/>
+          <p:nvPr/>
+        </p:nvSpPr>
+        <p:spPr>
+          <a:xfrm>
+            <a:off x="3383280" y="2907792"/>
+            <a:ext cx="2651760" cy="713232"/>
+          </a:xfrm>
+          <a:prstGeom prst="roundRect">
+            <a:avLst>
+              <a:gd name="adj" fmla="val 10256"/>
+            </a:avLst>
+          </a:prstGeom>
+          <a:solidFill>
+            <a:schemeClr val="bg2"/>
+          </a:solidFill>
+          <a:ln/>
+        </p:spPr>
+        <p:txBody>
+          <a:bodyPr/>
+          <a:lstStyle/>
+          <a:p>
+            <a:endParaRPr lang="zh-TW" altLang="en-US"/>
+          </a:p>
+        </p:txBody>
+      </p:sp>
+      <p:sp>
+        <p:nvSpPr>
+          <p:cNvPr id="26" name="txt-360"/>
+          <p:cNvSpPr txBox="1"/>
+          <p:nvPr/>
+        </p:nvSpPr>
+        <p:spPr>
+          <a:xfrm>
+            <a:off x="3520440" y="2962656"/>
+            <a:ext cx="2377440" cy="320040"/>
+          </a:xfrm>
+          <a:prstGeom prst="rect">
+            <a:avLst/>
+          </a:prstGeom>
+          <a:noFill/>
+          <a:ln/>
+        </p:spPr>
+        <p:txBody>
+          <a:bodyPr wrap="square" lIns="0" tIns="0" rIns="0" bIns="0" rtlCol="0" anchor="t"/>
+          <a:lstStyle/>
+          <a:p>
+            <a:pPr marL="0" indent="0">
+              <a:buNone/>
+            </a:pPr>
+            <a:r>
+              <a:rPr lang="en-US" sz="1400" b="1" dirty="0">
+                <a:solidFill>
+                  <a:schemeClr val="tx2"/>
+                </a:solidFill>
+              </a:rPr>
+              <a:t>sbom-tools</a:t>
+            </a:r>
+            <a:endParaRPr lang="en-US" sz="1400" dirty="0"/>
+          </a:p>
+        </p:txBody>
+      </p:sp>
+      <p:sp>
+        <p:nvSpPr>
+          <p:cNvPr id="27" name="txt-361"/>
+          <p:cNvSpPr txBox="1"/>
+          <p:nvPr/>
+        </p:nvSpPr>
+        <p:spPr>
+          <a:xfrm>
+            <a:off x="3520440" y="3273552"/>
+            <a:ext cx="2377440" cy="301752"/>
+          </a:xfrm>
+          <a:prstGeom prst="rect">
+            <a:avLst/>
+          </a:prstGeom>
+          <a:noFill/>
+          <a:ln/>
+        </p:spPr>
+        <p:txBody>
+          <a:bodyPr wrap="square" lIns="0" tIns="0" rIns="0" bIns="0" rtlCol="0" anchor="t"/>
+          <a:lstStyle/>
+          <a:p>
+            <a:pPr marL="0" indent="0">
+              <a:buNone/>
+            </a:pPr>
+            <a:r>
+              <a:rPr lang="en-US" sz="1100" dirty="0">
+                <a:solidFill>
+                  <a:schemeClr val="accent6"/>
+                </a:solidFill>
+              </a:rPr>
+              <a:t>語意 diff、品質分數、16 種合規檢查</a:t>
+            </a:r>
+            <a:endParaRPr lang="en-US" sz="1100" dirty="0"/>
+          </a:p>
+        </p:txBody>
+      </p:sp>
+      <p:sp>
+        <p:nvSpPr>
+          <p:cNvPr id="28" name="card-362"/>
+          <p:cNvSpPr/>
+          <p:nvPr/>
+        </p:nvSpPr>
+        <p:spPr>
+          <a:xfrm>
+            <a:off x="6217920" y="1371600"/>
+            <a:ext cx="2651760" cy="548640"/>
+          </a:xfrm>
+          <a:prstGeom prst="roundRect">
+            <a:avLst>
+              <a:gd name="adj" fmla="val 16667"/>
+            </a:avLst>
+          </a:prstGeom>
+          <a:solidFill>
+            <a:srgbClr val="C8424F"/>
+          </a:solidFill>
+          <a:ln/>
+        </p:spPr>
+        <p:txBody>
+          <a:bodyPr/>
+          <a:lstStyle/>
+          <a:p>
+            <a:endParaRPr lang="zh-TW" altLang="en-US"/>
+          </a:p>
+        </p:txBody>
+      </p:sp>
+      <p:sp>
+        <p:nvSpPr>
+          <p:cNvPr id="29" name="txt-363"/>
+          <p:cNvSpPr txBox="1"/>
+          <p:nvPr/>
+        </p:nvSpPr>
+        <p:spPr>
+          <a:xfrm>
+            <a:off x="6217920" y="1371600"/>
+            <a:ext cx="2651760" cy="548640"/>
+          </a:xfrm>
+          <a:prstGeom prst="rect">
+            <a:avLst/>
+          </a:prstGeom>
+          <a:noFill/>
+          <a:ln/>
+        </p:spPr>
+        <p:txBody>
+          <a:bodyPr wrap="square" lIns="0" tIns="0" rIns="0" bIns="0" rtlCol="0" anchor="ctr"/>
+          <a:lstStyle/>
+          <a:p>
+            <a:pPr marL="0" indent="0" algn="ctr">
+              <a:buNone/>
+            </a:pPr>
+            <a:r>
+              <a:rPr lang="en-US" sz="1600" b="1" dirty="0">
+                <a:solidFill>
+                  <a:schemeClr val="bg1"/>
+                </a:solidFill>
+              </a:rPr>
+              <a:t>掃描</a:t>
+            </a:r>
+            <a:endParaRPr lang="en-US" sz="1600" dirty="0"/>
+          </a:p>
+        </p:txBody>
+      </p:sp>
+      <p:sp>
+        <p:nvSpPr>
+          <p:cNvPr id="30" name="card-364"/>
+          <p:cNvSpPr/>
+          <p:nvPr/>
+        </p:nvSpPr>
+        <p:spPr>
+          <a:xfrm>
+            <a:off x="6217920" y="2103120"/>
+            <a:ext cx="2651760" cy="713232"/>
+          </a:xfrm>
+          <a:prstGeom prst="roundRect">
+            <a:avLst>
+              <a:gd name="adj" fmla="val 10256"/>
+            </a:avLst>
+          </a:prstGeom>
+          <a:solidFill>
+            <a:srgbClr val="DCEFEA"/>
+          </a:solidFill>
+          <a:ln/>
+        </p:spPr>
+        <p:txBody>
+          <a:bodyPr/>
+          <a:lstStyle/>
+          <a:p>
+            <a:endParaRPr lang="zh-TW" altLang="en-US"/>
+          </a:p>
+        </p:txBody>
+      </p:sp>
+      <p:sp>
+        <p:nvSpPr>
+          <p:cNvPr id="31" name="txt-365"/>
+          <p:cNvSpPr txBox="1"/>
+          <p:nvPr/>
+        </p:nvSpPr>
+        <p:spPr>
+          <a:xfrm>
+            <a:off x="6355080" y="2157984"/>
+            <a:ext cx="2377440" cy="320040"/>
+          </a:xfrm>
+          <a:prstGeom prst="rect">
+            <a:avLst/>
+          </a:prstGeom>
+          <a:noFill/>
+          <a:ln/>
+        </p:spPr>
+        <p:txBody>
+          <a:bodyPr wrap="square" lIns="0" tIns="0" rIns="0" bIns="0" rtlCol="0" anchor="t"/>
+          <a:lstStyle/>
+          <a:p>
+            <a:pPr marL="0" indent="0">
+              <a:buNone/>
+            </a:pPr>
+            <a:r>
+              <a:rPr lang="en-US" sz="1400" b="1" dirty="0">
+                <a:solidFill>
+                  <a:schemeClr val="tx2"/>
+                </a:solidFill>
+              </a:rPr>
+              <a:t>★ grype</a:t>
+            </a:r>
+            <a:endParaRPr lang="en-US" sz="1400" dirty="0"/>
+          </a:p>
+        </p:txBody>
+      </p:sp>
+      <p:sp>
+        <p:nvSpPr>
+          <p:cNvPr id="32" name="txt-366"/>
+          <p:cNvSpPr txBox="1"/>
+          <p:nvPr/>
+        </p:nvSpPr>
+        <p:spPr>
+          <a:xfrm>
+            <a:off x="6355080" y="2468880"/>
+            <a:ext cx="2377440" cy="301752"/>
+          </a:xfrm>
+          <a:prstGeom prst="rect">
+            <a:avLst/>
+          </a:prstGeom>
+          <a:noFill/>
+          <a:ln/>
+        </p:spPr>
+        <p:txBody>
+          <a:bodyPr wrap="square" lIns="0" tIns="0" rIns="0" bIns="0" rtlCol="0" anchor="t"/>
+          <a:lstStyle/>
+          <a:p>
+            <a:pPr marL="0" indent="0">
+              <a:buNone/>
+            </a:pPr>
+            <a:r>
+              <a:rPr lang="en-US" sz="1100" dirty="0">
+                <a:solidFill>
+                  <a:schemeClr val="accent6"/>
+                </a:solidFill>
+              </a:rPr>
+              <a:t>弱點；支援 OpenVEX</a:t>
+            </a:r>
+            <a:endParaRPr lang="en-US" sz="1100" dirty="0"/>
+          </a:p>
+        </p:txBody>
+      </p:sp>
+      <p:sp>
+        <p:nvSpPr>
+          <p:cNvPr id="33" name="card-367"/>
+          <p:cNvSpPr/>
+          <p:nvPr/>
+        </p:nvSpPr>
+        <p:spPr>
+          <a:xfrm>
+            <a:off x="6217920" y="2907792"/>
+            <a:ext cx="2651760" cy="713232"/>
+          </a:xfrm>
+          <a:prstGeom prst="roundRect">
+            <a:avLst>
+              <a:gd name="adj" fmla="val 10256"/>
+            </a:avLst>
+          </a:prstGeom>
+          <a:solidFill>
+            <a:srgbClr val="DCEFEA"/>
+          </a:solidFill>
+          <a:ln/>
+        </p:spPr>
+        <p:txBody>
+          <a:bodyPr/>
+          <a:lstStyle/>
+          <a:p>
+            <a:endParaRPr lang="zh-TW" altLang="en-US"/>
+          </a:p>
+        </p:txBody>
+      </p:sp>
+      <p:sp>
+        <p:nvSpPr>
+          <p:cNvPr id="34" name="txt-368"/>
+          <p:cNvSpPr txBox="1"/>
+          <p:nvPr/>
+        </p:nvSpPr>
+        <p:spPr>
+          <a:xfrm>
+            <a:off x="6355080" y="2962656"/>
+            <a:ext cx="2377440" cy="320040"/>
+          </a:xfrm>
+          <a:prstGeom prst="rect">
+            <a:avLst/>
+          </a:prstGeom>
+          <a:noFill/>
+          <a:ln/>
+        </p:spPr>
+        <p:txBody>
+          <a:bodyPr wrap="square" lIns="0" tIns="0" rIns="0" bIns="0" rtlCol="0" anchor="t"/>
+          <a:lstStyle/>
+          <a:p>
+            <a:pPr marL="0" indent="0">
+              <a:buNone/>
+            </a:pPr>
+            <a:r>
+              <a:rPr lang="en-US" sz="1400" b="1" dirty="0">
+                <a:solidFill>
+                  <a:schemeClr val="tx2"/>
+                </a:solidFill>
+              </a:rPr>
+              <a:t>★ trivy</a:t>
+            </a:r>
+            <a:endParaRPr lang="en-US" sz="1400" dirty="0"/>
+          </a:p>
+        </p:txBody>
+      </p:sp>
+      <p:sp>
+        <p:nvSpPr>
+          <p:cNvPr id="35" name="txt-369"/>
+          <p:cNvSpPr txBox="1"/>
+          <p:nvPr/>
+        </p:nvSpPr>
+        <p:spPr>
+          <a:xfrm>
+            <a:off x="6355080" y="3273552"/>
+            <a:ext cx="2377440" cy="301752"/>
+          </a:xfrm>
+          <a:prstGeom prst="rect">
+            <a:avLst/>
+          </a:prstGeom>
+          <a:noFill/>
+          <a:ln/>
+        </p:spPr>
+        <p:txBody>
+          <a:bodyPr wrap="square" lIns="0" tIns="0" rIns="0" bIns="0" rtlCol="0" anchor="t"/>
+          <a:lstStyle/>
+          <a:p>
+            <a:pPr marL="0" indent="0">
+              <a:buNone/>
+            </a:pPr>
+            <a:r>
+              <a:rPr lang="en-US" sz="1100" dirty="0">
+                <a:solidFill>
+                  <a:schemeClr val="accent6"/>
+                </a:solidFill>
+              </a:rPr>
+              <a:t>弱點 + 授權；--vex</a:t>
+            </a:r>
+            <a:endParaRPr lang="en-US" sz="1100" dirty="0"/>
+          </a:p>
+        </p:txBody>
+      </p:sp>
+      <p:sp>
+        <p:nvSpPr>
+          <p:cNvPr id="36" name="card-370"/>
+          <p:cNvSpPr/>
+          <p:nvPr/>
+        </p:nvSpPr>
+        <p:spPr>
+          <a:xfrm>
+            <a:off x="6217920" y="3712464"/>
+            <a:ext cx="2651760" cy="713232"/>
+          </a:xfrm>
+          <a:prstGeom prst="roundRect">
+            <a:avLst>
+              <a:gd name="adj" fmla="val 10256"/>
+            </a:avLst>
+          </a:prstGeom>
+          <a:solidFill>
+            <a:srgbClr val="DCEFEA"/>
+          </a:solidFill>
+          <a:ln/>
+        </p:spPr>
+        <p:txBody>
+          <a:bodyPr/>
+          <a:lstStyle/>
+          <a:p>
+            <a:endParaRPr lang="zh-TW" altLang="en-US"/>
+          </a:p>
+        </p:txBody>
+      </p:sp>
+      <p:sp>
+        <p:nvSpPr>
+          <p:cNvPr id="37" name="txt-371"/>
+          <p:cNvSpPr txBox="1"/>
+          <p:nvPr/>
+        </p:nvSpPr>
+        <p:spPr>
+          <a:xfrm>
+            <a:off x="6355080" y="3767328"/>
+            <a:ext cx="2377440" cy="320040"/>
+          </a:xfrm>
+          <a:prstGeom prst="rect">
+            <a:avLst/>
+          </a:prstGeom>
+          <a:noFill/>
+          <a:ln/>
+        </p:spPr>
+        <p:txBody>
+          <a:bodyPr wrap="square" lIns="0" tIns="0" rIns="0" bIns="0" rtlCol="0" anchor="t"/>
+          <a:lstStyle/>
+          <a:p>
+            <a:pPr marL="0" indent="0">
+              <a:buNone/>
+            </a:pPr>
+            <a:r>
+              <a:rPr lang="en-US" sz="1400" b="1" dirty="0">
+                <a:solidFill>
+                  <a:schemeClr val="tx2"/>
+                </a:solidFill>
+              </a:rPr>
+              <a:t>★ retire.js</a:t>
+            </a:r>
+            <a:endParaRPr lang="en-US" sz="1400" dirty="0"/>
+          </a:p>
+        </p:txBody>
+      </p:sp>
+      <p:sp>
+        <p:nvSpPr>
+          <p:cNvPr id="38" name="txt-372"/>
+          <p:cNvSpPr txBox="1"/>
+          <p:nvPr/>
+        </p:nvSpPr>
+        <p:spPr>
+          <a:xfrm>
+            <a:off x="6355080" y="4078224"/>
+            <a:ext cx="2377440" cy="301752"/>
+          </a:xfrm>
+          <a:prstGeom prst="rect">
+            <a:avLst/>
+          </a:prstGeom>
+          <a:noFill/>
+          <a:ln/>
+        </p:spPr>
+        <p:txBody>
+          <a:bodyPr wrap="square" lIns="0" tIns="0" rIns="0" bIns="0" rtlCol="0" anchor="t"/>
+          <a:lstStyle/>
+          <a:p>
+            <a:pPr marL="0" indent="0">
+              <a:buNone/>
+            </a:pPr>
+            <a:r>
+              <a:rPr lang="en-US" sz="1100" dirty="0">
+                <a:solidFill>
+                  <a:schemeClr val="accent6"/>
+                </a:solidFill>
+              </a:rPr>
+              <a:t>JS 函式庫弱點</a:t>
+            </a:r>
+            <a:endParaRPr lang="en-US" sz="1100" dirty="0"/>
+          </a:p>
+        </p:txBody>
+      </p:sp>
+      <p:sp>
+        <p:nvSpPr>
+          <p:cNvPr id="39" name="card-373"/>
+          <p:cNvSpPr/>
+          <p:nvPr/>
+        </p:nvSpPr>
+        <p:spPr>
+          <a:xfrm>
+            <a:off x="9052560" y="1371600"/>
+            <a:ext cx="2651760" cy="548640"/>
+          </a:xfrm>
+          <a:prstGeom prst="roundRect">
+            <a:avLst>
+              <a:gd name="adj" fmla="val 16667"/>
+            </a:avLst>
+          </a:prstGeom>
+          <a:solidFill>
+            <a:srgbClr val="E8A33D"/>
+          </a:solidFill>
+          <a:ln/>
+        </p:spPr>
+        <p:txBody>
+          <a:bodyPr/>
+          <a:lstStyle/>
+          <a:p>
+            <a:endParaRPr lang="zh-TW" altLang="en-US"/>
+          </a:p>
+        </p:txBody>
+      </p:sp>
+      <p:sp>
+        <p:nvSpPr>
+          <p:cNvPr id="40" name="txt-374"/>
+          <p:cNvSpPr txBox="1"/>
+          <p:nvPr/>
+        </p:nvSpPr>
+        <p:spPr>
+          <a:xfrm>
+            <a:off x="9052560" y="1371600"/>
+            <a:ext cx="2651760" cy="548640"/>
+          </a:xfrm>
+          <a:prstGeom prst="rect">
+            <a:avLst/>
+          </a:prstGeom>
+          <a:noFill/>
+          <a:ln/>
+        </p:spPr>
+        <p:txBody>
+          <a:bodyPr wrap="square" lIns="0" tIns="0" rIns="0" bIns="0" rtlCol="0" anchor="ctr"/>
+          <a:lstStyle/>
+          <a:p>
+            <a:pPr marL="0" indent="0" algn="ctr">
+              <a:buNone/>
+            </a:pPr>
+            <a:r>
+              <a:rPr lang="en-US" sz="1600" b="1" dirty="0">
+                <a:solidFill>
+                  <a:schemeClr val="tx2"/>
+                </a:solidFill>
+              </a:rPr>
+              <a:t>VEX</a:t>
+            </a:r>
+            <a:endParaRPr lang="en-US" sz="1600" dirty="0"/>
+          </a:p>
+        </p:txBody>
+      </p:sp>
+      <p:sp>
+        <p:nvSpPr>
+          <p:cNvPr id="41" name="card-375"/>
+          <p:cNvSpPr/>
+          <p:nvPr/>
+        </p:nvSpPr>
+        <p:spPr>
+          <a:xfrm>
+            <a:off x="9052560" y="2103120"/>
+            <a:ext cx="2651760" cy="713232"/>
+          </a:xfrm>
+          <a:prstGeom prst="roundRect">
+            <a:avLst>
+              <a:gd name="adj" fmla="val 10256"/>
+            </a:avLst>
+          </a:prstGeom>
+          <a:solidFill>
+            <a:schemeClr val="bg2"/>
+          </a:solidFill>
+          <a:ln/>
+        </p:spPr>
+        <p:txBody>
+          <a:bodyPr/>
+          <a:lstStyle/>
+          <a:p>
+            <a:endParaRPr lang="zh-TW" altLang="en-US"/>
+          </a:p>
+        </p:txBody>
+      </p:sp>
+      <p:sp>
+        <p:nvSpPr>
+          <p:cNvPr id="42" name="txt-376"/>
+          <p:cNvSpPr txBox="1"/>
+          <p:nvPr/>
+        </p:nvSpPr>
+        <p:spPr>
+          <a:xfrm>
+            <a:off x="9189720" y="2157984"/>
+            <a:ext cx="2377440" cy="320040"/>
+          </a:xfrm>
+          <a:prstGeom prst="rect">
+            <a:avLst/>
+          </a:prstGeom>
+          <a:noFill/>
+          <a:ln/>
+        </p:spPr>
+        <p:txBody>
+          <a:bodyPr wrap="square" lIns="0" tIns="0" rIns="0" bIns="0" rtlCol="0" anchor="t"/>
+          <a:lstStyle/>
+          <a:p>
+            <a:pPr marL="0" indent="0">
+              <a:buNone/>
+            </a:pPr>
+            <a:r>
+              <a:rPr lang="en-US" sz="1400" b="1" dirty="0">
+                <a:solidFill>
+                  <a:schemeClr val="tx2"/>
+                </a:solidFill>
+              </a:rPr>
+              <a:t>vexctl</a:t>
+            </a:r>
+            <a:endParaRPr lang="en-US" sz="1400" dirty="0"/>
+          </a:p>
+        </p:txBody>
+      </p:sp>
+      <p:sp>
+        <p:nvSpPr>
+          <p:cNvPr id="43" name="txt-377"/>
+          <p:cNvSpPr txBox="1"/>
+          <p:nvPr/>
+        </p:nvSpPr>
+        <p:spPr>
+          <a:xfrm>
+            <a:off x="9189720" y="2468880"/>
+            <a:ext cx="2377440" cy="301752"/>
+          </a:xfrm>
+          <a:prstGeom prst="rect">
+            <a:avLst/>
+          </a:prstGeom>
+          <a:noFill/>
+          <a:ln/>
+        </p:spPr>
+        <p:txBody>
+          <a:bodyPr wrap="square" lIns="0" tIns="0" rIns="0" bIns="0" rtlCol="0" anchor="t"/>
+          <a:lstStyle/>
+          <a:p>
+            <a:pPr marL="0" indent="0">
+              <a:buNone/>
+            </a:pPr>
+            <a:r>
+              <a:rPr lang="en-US" sz="1100" dirty="0">
+                <a:solidFill>
+                  <a:schemeClr val="accent6"/>
+                </a:solidFill>
+              </a:rPr>
+              <a:t>create／merge／validate／attest</a:t>
+            </a:r>
+            <a:endParaRPr lang="en-US" sz="1100" dirty="0"/>
+          </a:p>
+        </p:txBody>
+      </p:sp>
+      <p:sp>
+        <p:nvSpPr>
+          <p:cNvPr id="44" name="card-378"/>
+          <p:cNvSpPr/>
+          <p:nvPr/>
+        </p:nvSpPr>
+        <p:spPr>
+          <a:xfrm>
+            <a:off x="9052560" y="2907792"/>
+            <a:ext cx="2651760" cy="713232"/>
+          </a:xfrm>
+          <a:prstGeom prst="roundRect">
+            <a:avLst>
+              <a:gd name="adj" fmla="val 10256"/>
+            </a:avLst>
+          </a:prstGeom>
+          <a:solidFill>
+            <a:schemeClr val="bg2"/>
+          </a:solidFill>
+          <a:ln/>
+        </p:spPr>
+        <p:txBody>
+          <a:bodyPr/>
+          <a:lstStyle/>
+          <a:p>
+            <a:endParaRPr lang="zh-TW" altLang="en-US"/>
+          </a:p>
+        </p:txBody>
+      </p:sp>
+      <p:sp>
+        <p:nvSpPr>
+          <p:cNvPr id="45" name="txt-379"/>
+          <p:cNvSpPr txBox="1"/>
+          <p:nvPr/>
+        </p:nvSpPr>
+        <p:spPr>
+          <a:xfrm>
+            <a:off x="9189720" y="2962656"/>
+            <a:ext cx="2377440" cy="320040"/>
+          </a:xfrm>
+          <a:prstGeom prst="rect">
+            <a:avLst/>
+          </a:prstGeom>
+          <a:noFill/>
+          <a:ln/>
+        </p:spPr>
+        <p:txBody>
+          <a:bodyPr wrap="square" lIns="0" tIns="0" rIns="0" bIns="0" rtlCol="0" anchor="t"/>
+          <a:lstStyle/>
+          <a:p>
+            <a:pPr marL="0" indent="0">
+              <a:buNone/>
+            </a:pPr>
+            <a:r>
+              <a:rPr lang="en-US" sz="1400" b="1" dirty="0">
+                <a:solidFill>
+                  <a:schemeClr val="tx2"/>
+                </a:solidFill>
+              </a:rPr>
+              <a:t>trivy --vex</a:t>
+            </a:r>
+            <a:endParaRPr lang="en-US" sz="1400" dirty="0"/>
+          </a:p>
+        </p:txBody>
+      </p:sp>
+      <p:sp>
+        <p:nvSpPr>
+          <p:cNvPr id="46" name="txt-380"/>
+          <p:cNvSpPr txBox="1"/>
+          <p:nvPr/>
+        </p:nvSpPr>
+        <p:spPr>
+          <a:xfrm>
+            <a:off x="9189720" y="3273552"/>
+            <a:ext cx="2377440" cy="301752"/>
+          </a:xfrm>
+          <a:prstGeom prst="rect">
+            <a:avLst/>
+          </a:prstGeom>
+          <a:noFill/>
+          <a:ln/>
+        </p:spPr>
+        <p:txBody>
+          <a:bodyPr wrap="square" lIns="0" tIns="0" rIns="0" bIns="0" rtlCol="0" anchor="t"/>
+          <a:lstStyle/>
+          <a:p>
+            <a:pPr marL="0" indent="0">
+              <a:buNone/>
+            </a:pPr>
+            <a:r>
+              <a:rPr lang="en-US" sz="1100" dirty="0">
+                <a:solidFill>
+                  <a:schemeClr val="accent6"/>
+                </a:solidFill>
+              </a:rPr>
+              <a:t>套用 VEX 過濾</a:t>
+            </a:r>
+            <a:endParaRPr lang="en-US" sz="1100" dirty="0"/>
+          </a:p>
+        </p:txBody>
+      </p:sp>
+      <p:sp>
+        <p:nvSpPr>
+          <p:cNvPr id="47" name="txt-381"/>
+          <p:cNvSpPr txBox="1"/>
+          <p:nvPr/>
+        </p:nvSpPr>
+        <p:spPr>
+          <a:xfrm>
+            <a:off x="548640" y="6172200"/>
+            <a:ext cx="4572000" cy="274320"/>
+          </a:xfrm>
+          <a:prstGeom prst="rect">
+            <a:avLst/>
+          </a:prstGeom>
+          <a:noFill/>
+          <a:ln/>
+        </p:spPr>
+        <p:txBody>
+          <a:bodyPr wrap="square" lIns="0" tIns="0" rIns="0" bIns="0" rtlCol="0" anchor="t"/>
+          <a:lstStyle/>
+          <a:p>
+            <a:pPr marL="0" indent="0">
+              <a:buNone/>
+            </a:pPr>
+            <a:r>
+              <a:rPr lang="en-US" sz="1200" b="1" dirty="0">
+                <a:solidFill>
+                  <a:schemeClr val="accent1"/>
+                </a:solidFill>
+              </a:rPr>
+              <a:t>★ 本次實測或腳本中使用</a:t>
+            </a:r>
+            <a:endParaRPr lang="en-US" sz="1200" dirty="0"/>
+          </a:p>
+        </p:txBody>
+      </p:sp>
+      <p:sp>
+        <p:nvSpPr>
+          <p:cNvPr id="48" name="Slide Number Placeholder 0"/>
+          <p:cNvSpPr>
+            <a:spLocks noGrp="1"/>
+          </p:cNvSpPr>
+          <p:nvPr>
+            <p:ph type="sldNum" sz="quarter" idx="4294967295"/>
+          </p:nvPr>
+        </p:nvSpPr>
+        <p:spPr>
+          <a:xfrm>
+            <a:off x="11155680" y="6400800"/>
+            <a:ext cx="457200" cy="274320"/>
+          </a:xfrm>
+          <a:prstGeom prst="rect">
+            <a:avLst/>
+          </a:prstGeom>
+          <a:extLst>
+            <a:ext uri="{C572A759-6A51-4108-AA02-DFA0A04FC94B}">
+              <ma14:wrappingTextBoxFlag xmlns="" xmlns:ma14="http://schemas.microsoft.com/office/mac/drawingml/2011/main" val="0"/>
+            </a:ext>
+          </a:extLst>
+        </p:spPr>
+        <p:txBody>
+          <a:bodyPr/>
+          <a:lstStyle>
+            <a:lvl1pPr>
+              <a:defRPr sz="1000">
+                <a:solidFill>
+                  <a:schemeClr val="accent6"/>
+                </a:solidFill>
+              </a:defRPr>
+            </a:lvl1pPr>
+          </a:lstStyle>
+          <a:p>
+            <a:pPr algn="r"/>
+            <a:fld id="{F7021451-1387-4CA6-816F-3879F97B5CBC}" type="slidenum">
+              <a:rPr lang="en-US" b="0"/>
+              <a:t>20</a:t>
+            </a:fld>
+            <a:endParaRPr lang="en-US"/>
+          </a:p>
+        </p:txBody>
+      </p:sp>
+      <p:sp>
+        <p:nvSpPr>
+          <p:cNvPr id="50" name="txt-390">
+            <a:extLst>
+              <a:ext uri="{FF2B5EF4-FFF2-40B4-BE49-F238E27FC236}">
+                <a16:creationId xmlns:a16="http://schemas.microsoft.com/office/drawing/2014/main" id="{B29257C7-13E0-F4FA-DFE5-1F0FC7C92CEC}"/>
+              </a:ext>
+            </a:extLst>
+          </p:cNvPr>
+          <p:cNvSpPr txBox="1"/>
+          <p:nvPr/>
+        </p:nvSpPr>
+        <p:spPr>
+          <a:xfrm>
+            <a:off x="3589682" y="4766409"/>
+            <a:ext cx="7908235" cy="1280160"/>
+          </a:xfrm>
+          <a:prstGeom prst="rect">
+            <a:avLst/>
+          </a:prstGeom>
+          <a:noFill/>
+          <a:ln/>
+        </p:spPr>
+        <p:txBody>
+          <a:bodyPr wrap="square" lIns="0" tIns="0" rIns="0" bIns="0" rtlCol="0" anchor="t"/>
+          <a:lstStyle/>
+          <a:p>
+            <a:pPr>
+              <a:spcAft>
+                <a:spcPts val="600"/>
+              </a:spcAft>
+              <a:buSzPct val="100000"/>
+            </a:pPr>
+            <a:r>
+              <a:rPr lang="zh-TW" altLang="en-US" sz="1600" dirty="0">
+                <a:solidFill>
+                  <a:srgbClr val="002060"/>
+                </a:solidFill>
+              </a:rPr>
+              <a:t>考量工具能力程度與專案特性，可能需要不同組合。</a:t>
+            </a:r>
+            <a:endParaRPr lang="en-US" altLang="zh-TW" sz="1600" dirty="0">
+              <a:solidFill>
+                <a:srgbClr val="002060"/>
+              </a:solidFill>
+            </a:endParaRPr>
+          </a:p>
+          <a:p>
+            <a:pPr>
+              <a:spcAft>
+                <a:spcPts val="600"/>
+              </a:spcAft>
+              <a:buSzPct val="100000"/>
+            </a:pPr>
+            <a:r>
+              <a:rPr lang="zh-TW" altLang="en-US" sz="1600" dirty="0">
+                <a:solidFill>
+                  <a:srgbClr val="002060"/>
+                </a:solidFill>
+              </a:rPr>
+              <a:t>比如</a:t>
+            </a:r>
+            <a:r>
+              <a:rPr lang="en-US" altLang="zh-TW" sz="1600" dirty="0">
+                <a:solidFill>
+                  <a:srgbClr val="002060"/>
+                </a:solidFill>
+              </a:rPr>
+              <a:t>: </a:t>
+            </a:r>
+            <a:r>
+              <a:rPr lang="zh-TW" altLang="en-US" sz="1600" dirty="0">
+                <a:solidFill>
+                  <a:srgbClr val="002060"/>
+                </a:solidFill>
+              </a:rPr>
+              <a:t>大體上優先支援 </a:t>
+            </a:r>
+            <a:r>
+              <a:rPr lang="en-US" altLang="zh-TW" sz="1600" dirty="0" err="1">
+                <a:solidFill>
+                  <a:srgbClr val="002060"/>
+                </a:solidFill>
+              </a:rPr>
+              <a:t>linux</a:t>
+            </a:r>
+            <a:r>
+              <a:rPr lang="en-US" altLang="zh-TW" sz="1600" dirty="0">
+                <a:solidFill>
+                  <a:srgbClr val="002060"/>
+                </a:solidFill>
+              </a:rPr>
+              <a:t> </a:t>
+            </a:r>
+            <a:r>
+              <a:rPr lang="zh-TW" altLang="en-US" sz="1600" dirty="0">
+                <a:solidFill>
+                  <a:srgbClr val="002060"/>
+                </a:solidFill>
+              </a:rPr>
+              <a:t>平台，就是不支援 </a:t>
+            </a:r>
+            <a:r>
+              <a:rPr lang="en-US" altLang="zh-TW" sz="1600" dirty="0">
+                <a:solidFill>
+                  <a:srgbClr val="002060"/>
+                </a:solidFill>
+              </a:rPr>
+              <a:t>.NET / windows </a:t>
+            </a:r>
+            <a:r>
+              <a:rPr lang="zh-TW" altLang="en-US" sz="1600" dirty="0">
+                <a:solidFill>
+                  <a:srgbClr val="002060"/>
+                </a:solidFill>
+              </a:rPr>
+              <a:t>平台。</a:t>
+            </a:r>
+            <a:r>
+              <a:rPr lang="en-US" altLang="zh-TW" sz="1600" dirty="0">
+                <a:solidFill>
+                  <a:srgbClr val="002060"/>
+                </a:solidFill>
+              </a:rPr>
+              <a:t> </a:t>
+            </a:r>
+          </a:p>
+          <a:p>
+            <a:pPr>
+              <a:spcAft>
+                <a:spcPts val="600"/>
+              </a:spcAft>
+              <a:buSzPct val="100000"/>
+            </a:pPr>
+            <a:r>
+              <a:rPr lang="zh-TW" altLang="en-US" sz="1600" dirty="0">
+                <a:solidFill>
+                  <a:srgbClr val="002060"/>
+                </a:solidFill>
+              </a:rPr>
+              <a:t>老舊軟體專案沒有 </a:t>
+            </a:r>
+            <a:r>
+              <a:rPr lang="en-US" altLang="zh-TW" sz="1600" dirty="0" err="1">
+                <a:solidFill>
+                  <a:srgbClr val="002060"/>
+                </a:solidFill>
+              </a:rPr>
+              <a:t>package.json</a:t>
+            </a:r>
+            <a:r>
+              <a:rPr lang="en-US" altLang="zh-TW" sz="1600" dirty="0">
+                <a:solidFill>
+                  <a:srgbClr val="002060"/>
+                </a:solidFill>
+              </a:rPr>
+              <a:t>, </a:t>
+            </a:r>
+            <a:r>
+              <a:rPr lang="zh-TW" altLang="en-US" sz="1600" dirty="0">
+                <a:solidFill>
+                  <a:srgbClr val="002060"/>
+                </a:solidFill>
+              </a:rPr>
+              <a:t>沒有支援 </a:t>
+            </a:r>
+            <a:r>
+              <a:rPr lang="en-US" altLang="zh-TW" sz="1600" dirty="0" err="1">
+                <a:solidFill>
+                  <a:srgbClr val="002060"/>
+                </a:solidFill>
+              </a:rPr>
+              <a:t>npm</a:t>
+            </a:r>
+            <a:r>
+              <a:rPr lang="en-US" altLang="zh-TW" sz="1600" dirty="0">
+                <a:solidFill>
+                  <a:srgbClr val="002060"/>
+                </a:solidFill>
+              </a:rPr>
+              <a:t> / </a:t>
+            </a:r>
+            <a:r>
+              <a:rPr lang="en-US" altLang="zh-TW" sz="1600" dirty="0" err="1">
+                <a:solidFill>
+                  <a:srgbClr val="002060"/>
+                </a:solidFill>
+              </a:rPr>
+              <a:t>nuget</a:t>
+            </a:r>
+            <a:r>
+              <a:rPr lang="en-US" altLang="zh-TW" sz="1600" dirty="0">
+                <a:solidFill>
+                  <a:srgbClr val="002060"/>
+                </a:solidFill>
+              </a:rPr>
+              <a:t> package</a:t>
+            </a:r>
+            <a:r>
+              <a:rPr lang="zh-TW" altLang="en-US" sz="1600" dirty="0">
+                <a:solidFill>
+                  <a:srgbClr val="002060"/>
+                </a:solidFill>
+              </a:rPr>
+              <a:t> 管理。</a:t>
+            </a:r>
+            <a:endParaRPr lang="en-US" altLang="zh-TW" sz="1600" dirty="0">
+              <a:solidFill>
+                <a:srgbClr val="002060"/>
+              </a:solidFill>
+            </a:endParaRPr>
+          </a:p>
+          <a:p>
+            <a:pPr>
+              <a:spcAft>
+                <a:spcPts val="600"/>
+              </a:spcAft>
+              <a:buSzPct val="100000"/>
+            </a:pPr>
+            <a:endParaRPr lang="en-US" altLang="zh-TW" sz="1400" dirty="0"/>
+          </a:p>
+        </p:txBody>
+      </p:sp>
+    </p:spTree>
+  </p:cSld>
+  <p:clrMapOvr>
+    <a:masterClrMapping/>
+  </p:clrMapOvr>
+</p:sld>
+</file>
+
+<file path=ppt/slides/slide21.xml><?xml version="1.0" encoding="utf-8"?>
 <p:sld xmlns:a="http://schemas.openxmlformats.org/drawingml/2006/main" xmlns:r="http://schemas.openxmlformats.org/officeDocument/2006/relationships" xmlns:p="http://schemas.openxmlformats.org/presentationml/2006/main">
   <p:cSld name="Slide 19">
     <p:spTree>
@@ -15062,7 +16385,7 @@
           </a:prstGeom>
           <a:extLst>
             <a:ext uri="{C572A759-6A51-4108-AA02-DFA0A04FC94B}">
-              <ma14:wrappingTextBoxFlag xmlns:ma14="http://schemas.microsoft.com/office/mac/drawingml/2011/main" xmlns="" val="0"/>
+              <ma14:wrappingTextBoxFlag xmlns="" xmlns:ma14="http://schemas.microsoft.com/office/mac/drawingml/2011/main" val="0"/>
             </a:ext>
           </a:extLst>
         </p:spPr>
@@ -15081,7 +16404,7 @@
             <a:pPr algn="r"/>
             <a:fld id="{F7021451-1387-4CA6-816F-3879F97B5CBC}" type="slidenum">
               <a:rPr lang="en-US" b="0"/>
-              <a:t>20</a:t>
+              <a:t>21</a:t>
             </a:fld>
             <a:endParaRPr lang="en-US"/>
           </a:p>
@@ -15095,7 +16418,7 @@
 </p:sld>
 </file>
 
-<file path=ppt/slides/slide21.xml><?xml version="1.0" encoding="utf-8"?>
+<file path=ppt/slides/slide22.xml><?xml version="1.0" encoding="utf-8"?>
 <p:sld xmlns:a="http://schemas.openxmlformats.org/drawingml/2006/main" xmlns:r="http://schemas.openxmlformats.org/officeDocument/2006/relationships" xmlns:p="http://schemas.openxmlformats.org/presentationml/2006/main">
   <p:cSld name="Slide 20">
     <p:spTree>
@@ -15748,7 +17071,7 @@
           </a:prstGeom>
           <a:extLst>
             <a:ext uri="{C572A759-6A51-4108-AA02-DFA0A04FC94B}">
-              <ma14:wrappingTextBoxFlag xmlns:ma14="http://schemas.microsoft.com/office/mac/drawingml/2011/main" xmlns="" val="0"/>
+              <ma14:wrappingTextBoxFlag xmlns="" xmlns:ma14="http://schemas.microsoft.com/office/mac/drawingml/2011/main" val="0"/>
             </a:ext>
           </a:extLst>
         </p:spPr>
@@ -15767,7 +17090,7 @@
             <a:pPr algn="r"/>
             <a:fld id="{F7021451-1387-4CA6-816F-3879F97B5CBC}" type="slidenum">
               <a:rPr lang="en-US" b="0"/>
-              <a:t>21</a:t>
+              <a:t>22</a:t>
             </a:fld>
             <a:endParaRPr lang="en-US"/>
           </a:p>
@@ -15781,7 +17104,7 @@
 </p:sld>
 </file>
 
-<file path=ppt/slides/slide22.xml><?xml version="1.0" encoding="utf-8"?>
+<file path=ppt/slides/slide23.xml><?xml version="1.0" encoding="utf-8"?>
 <p:sld xmlns:a="http://schemas.openxmlformats.org/drawingml/2006/main" xmlns:r="http://schemas.openxmlformats.org/officeDocument/2006/relationships" xmlns:p="http://schemas.openxmlformats.org/presentationml/2006/main">
   <p:cSld name="Slide 21">
     <p:spTree>
@@ -16705,7 +18028,7 @@
           </a:prstGeom>
           <a:extLst>
             <a:ext uri="{C572A759-6A51-4108-AA02-DFA0A04FC94B}">
-              <ma14:wrappingTextBoxFlag xmlns:ma14="http://schemas.microsoft.com/office/mac/drawingml/2011/main" xmlns="" val="0"/>
+              <ma14:wrappingTextBoxFlag xmlns="" xmlns:ma14="http://schemas.microsoft.com/office/mac/drawingml/2011/main" val="0"/>
             </a:ext>
           </a:extLst>
         </p:spPr>
@@ -16724,7 +18047,7 @@
             <a:pPr algn="r"/>
             <a:fld id="{F7021451-1387-4CA6-816F-3879F97B5CBC}" type="slidenum">
               <a:rPr lang="en-US" b="0"/>
-              <a:t>22</a:t>
+              <a:t>23</a:t>
             </a:fld>
             <a:endParaRPr lang="en-US"/>
           </a:p>
@@ -16738,7 +18061,7 @@
 </p:sld>
 </file>
 
-<file path=ppt/slides/slide23.xml><?xml version="1.0" encoding="utf-8"?>
+<file path=ppt/slides/slide24.xml><?xml version="1.0" encoding="utf-8"?>
 <p:sld xmlns:a="http://schemas.openxmlformats.org/drawingml/2006/main" xmlns:r="http://schemas.openxmlformats.org/officeDocument/2006/relationships" xmlns:p="http://schemas.openxmlformats.org/presentationml/2006/main">
   <p:cSld name="Slide 22">
     <p:spTree>
@@ -17557,7 +18880,7 @@
           </a:prstGeom>
           <a:extLst>
             <a:ext uri="{C572A759-6A51-4108-AA02-DFA0A04FC94B}">
-              <ma14:wrappingTextBoxFlag xmlns:ma14="http://schemas.microsoft.com/office/mac/drawingml/2011/main" xmlns="" val="0"/>
+              <ma14:wrappingTextBoxFlag xmlns="" xmlns:ma14="http://schemas.microsoft.com/office/mac/drawingml/2011/main" val="0"/>
             </a:ext>
           </a:extLst>
         </p:spPr>
@@ -17576,7 +18899,7 @@
             <a:pPr algn="r"/>
             <a:fld id="{F7021451-1387-4CA6-816F-3879F97B5CBC}" type="slidenum">
               <a:rPr lang="en-US" b="0"/>
-              <a:t>23</a:t>
+              <a:t>24</a:t>
             </a:fld>
             <a:endParaRPr lang="en-US"/>
           </a:p>
@@ -17590,7 +18913,7 @@
 </p:sld>
 </file>
 
-<file path=ppt/slides/slide24.xml><?xml version="1.0" encoding="utf-8"?>
+<file path=ppt/slides/slide25.xml><?xml version="1.0" encoding="utf-8"?>
 <p:sld xmlns:a="http://schemas.openxmlformats.org/drawingml/2006/main" xmlns:r="http://schemas.openxmlformats.org/officeDocument/2006/relationships" xmlns:p="http://schemas.openxmlformats.org/presentationml/2006/main">
   <p:cSld name="Slide 23">
     <p:spTree>
@@ -18671,7 +19994,7 @@
           </a:prstGeom>
           <a:extLst>
             <a:ext uri="{C572A759-6A51-4108-AA02-DFA0A04FC94B}">
-              <ma14:wrappingTextBoxFlag xmlns:ma14="http://schemas.microsoft.com/office/mac/drawingml/2011/main" xmlns="" val="0"/>
+              <ma14:wrappingTextBoxFlag xmlns="" xmlns:ma14="http://schemas.microsoft.com/office/mac/drawingml/2011/main" val="0"/>
             </a:ext>
           </a:extLst>
         </p:spPr>
@@ -18690,7 +20013,7 @@
             <a:pPr algn="r"/>
             <a:fld id="{F7021451-1387-4CA6-816F-3879F97B5CBC}" type="slidenum">
               <a:rPr lang="en-US" b="0"/>
-              <a:t>24</a:t>
+              <a:t>25</a:t>
             </a:fld>
             <a:endParaRPr lang="en-US"/>
           </a:p>
@@ -18704,7 +20027,7 @@
 </p:sld>
 </file>
 
-<file path=ppt/slides/slide25.xml><?xml version="1.0" encoding="utf-8"?>
+<file path=ppt/slides/slide26.xml><?xml version="1.0" encoding="utf-8"?>
 <p:sld xmlns:a="http://schemas.openxmlformats.org/drawingml/2006/main" xmlns:r="http://schemas.openxmlformats.org/officeDocument/2006/relationships" xmlns:p="http://schemas.openxmlformats.org/presentationml/2006/main">
   <p:cSld name="Slide 24">
     <p:spTree>
@@ -20185,7 +21508,7 @@
           </a:prstGeom>
           <a:extLst>
             <a:ext uri="{C572A759-6A51-4108-AA02-DFA0A04FC94B}">
-              <ma14:wrappingTextBoxFlag xmlns:ma14="http://schemas.microsoft.com/office/mac/drawingml/2011/main" xmlns="" val="0"/>
+              <ma14:wrappingTextBoxFlag xmlns="" xmlns:ma14="http://schemas.microsoft.com/office/mac/drawingml/2011/main" val="0"/>
             </a:ext>
           </a:extLst>
         </p:spPr>
@@ -20204,7 +21527,7 @@
             <a:pPr algn="r"/>
             <a:fld id="{F7021451-1387-4CA6-816F-3879F97B5CBC}" type="slidenum">
               <a:rPr lang="en-US" b="0"/>
-              <a:t>25</a:t>
+              <a:t>26</a:t>
             </a:fld>
             <a:endParaRPr lang="en-US"/>
           </a:p>
@@ -20218,7 +21541,7 @@
 </p:sld>
 </file>
 
-<file path=ppt/slides/slide26.xml><?xml version="1.0" encoding="utf-8"?>
+<file path=ppt/slides/slide27.xml><?xml version="1.0" encoding="utf-8"?>
 <p:sld xmlns:a="http://schemas.openxmlformats.org/drawingml/2006/main" xmlns:r="http://schemas.openxmlformats.org/officeDocument/2006/relationships" xmlns:p="http://schemas.openxmlformats.org/presentationml/2006/main">
   <p:cSld name="Slide 25">
     <p:spTree>
@@ -21025,7 +22348,7 @@
           </a:prstGeom>
           <a:extLst>
             <a:ext uri="{C572A759-6A51-4108-AA02-DFA0A04FC94B}">
-              <ma14:wrappingTextBoxFlag xmlns:ma14="http://schemas.microsoft.com/office/mac/drawingml/2011/main" xmlns="" val="0"/>
+              <ma14:wrappingTextBoxFlag xmlns="" xmlns:ma14="http://schemas.microsoft.com/office/mac/drawingml/2011/main" val="0"/>
             </a:ext>
           </a:extLst>
         </p:spPr>
@@ -21044,7 +22367,7 @@
             <a:pPr algn="r"/>
             <a:fld id="{F7021451-1387-4CA6-816F-3879F97B5CBC}" type="slidenum">
               <a:rPr lang="en-US" b="0"/>
-              <a:t>26</a:t>
+              <a:t>27</a:t>
             </a:fld>
             <a:endParaRPr lang="en-US"/>
           </a:p>
@@ -21058,7 +22381,7 @@
 </p:sld>
 </file>
 
-<file path=ppt/slides/slide27.xml><?xml version="1.0" encoding="utf-8"?>
+<file path=ppt/slides/slide28.xml><?xml version="1.0" encoding="utf-8"?>
 <p:sld xmlns:a="http://schemas.openxmlformats.org/drawingml/2006/main" xmlns:r="http://schemas.openxmlformats.org/officeDocument/2006/relationships" xmlns:p="http://schemas.openxmlformats.org/presentationml/2006/main">
   <p:cSld name="Slide 26">
     <p:spTree>
@@ -21771,7 +23094,7 @@
           </a:prstGeom>
           <a:extLst>
             <a:ext uri="{C572A759-6A51-4108-AA02-DFA0A04FC94B}">
-              <ma14:wrappingTextBoxFlag xmlns:ma14="http://schemas.microsoft.com/office/mac/drawingml/2011/main" xmlns="" val="0"/>
+              <ma14:wrappingTextBoxFlag xmlns="" xmlns:ma14="http://schemas.microsoft.com/office/mac/drawingml/2011/main" val="0"/>
             </a:ext>
           </a:extLst>
         </p:spPr>
@@ -21790,7 +23113,7 @@
             <a:pPr algn="r"/>
             <a:fld id="{F7021451-1387-4CA6-816F-3879F97B5CBC}" type="slidenum">
               <a:rPr lang="en-US" b="0"/>
-              <a:t>27</a:t>
+              <a:t>28</a:t>
             </a:fld>
             <a:endParaRPr lang="en-US"/>
           </a:p>
@@ -21804,7 +23127,7 @@
 </p:sld>
 </file>
 
-<file path=ppt/slides/slide28.xml><?xml version="1.0" encoding="utf-8"?>
+<file path=ppt/slides/slide29.xml><?xml version="1.0" encoding="utf-8"?>
 <p:sld xmlns:a="http://schemas.openxmlformats.org/drawingml/2006/main" xmlns:r="http://schemas.openxmlformats.org/officeDocument/2006/relationships" xmlns:p="http://schemas.openxmlformats.org/presentationml/2006/main">
   <p:cSld name="Slide 27">
     <p:spTree>
@@ -21886,24 +23209,25 @@
           <a:bodyPr wrap="square" lIns="0" tIns="0" rIns="0" bIns="0" rtlCol="0" anchor="t"/>
           <a:lstStyle/>
           <a:p>
-            <a:pPr marL="0" indent="0" algn="l">
-              <a:buNone/>
-            </a:pPr>
             <a:r>
               <a:rPr lang="zh-TW" altLang="en-US" sz="2000" dirty="0"/>
               <a:t>重點回顧</a:t>
             </a:r>
             <a:r>
               <a:rPr lang="en-US" altLang="zh-TW" sz="2000" dirty="0"/>
-              <a:t>: purl, CVE, SBOM (</a:t>
-            </a:r>
-            <a:r>
-              <a:rPr lang="zh-TW" altLang="en-US" sz="2000" dirty="0"/>
-              <a:t>軟體用料表</a:t>
+              <a:t>: purl, CVE, </a:t>
+            </a:r>
+            <a:r>
+              <a:rPr lang="en-US" altLang="zh-TW" dirty="0" err="1"/>
+              <a:t>CycloneDX</a:t>
+            </a:r>
+            <a:r>
+              <a:rPr lang="en-US" altLang="zh-TW" dirty="0"/>
+              <a:t>, </a:t>
             </a:r>
             <a:r>
               <a:rPr lang="en-US" altLang="zh-TW" sz="2000" dirty="0"/>
-              <a:t>)</a:t>
+              <a:t>SBOM</a:t>
             </a:r>
             <a:endParaRPr lang="en-US" sz="2000" dirty="0"/>
           </a:p>
@@ -21969,6 +23293,94 @@
 </file>
 
 <file path=ppt/slides/slide3.xml><?xml version="1.0" encoding="utf-8"?>
+<p:sld xmlns:a="http://schemas.openxmlformats.org/drawingml/2006/main" xmlns:r="http://schemas.openxmlformats.org/officeDocument/2006/relationships" xmlns:p="http://schemas.openxmlformats.org/presentationml/2006/main">
+  <p:cSld>
+    <p:spTree>
+      <p:nvGrpSpPr>
+        <p:cNvPr id="1" name=""/>
+        <p:cNvGrpSpPr/>
+        <p:nvPr/>
+      </p:nvGrpSpPr>
+      <p:grpSpPr>
+        <a:xfrm>
+          <a:off x="0" y="0"/>
+          <a:ext cx="0" cy="0"/>
+          <a:chOff x="0" y="0"/>
+          <a:chExt cx="0" cy="0"/>
+        </a:xfrm>
+      </p:grpSpPr>
+      <p:sp>
+        <p:nvSpPr>
+          <p:cNvPr id="2" name="標題 1">
+            <a:extLst>
+              <a:ext uri="{FF2B5EF4-FFF2-40B4-BE49-F238E27FC236}">
+                <a16:creationId xmlns:a16="http://schemas.microsoft.com/office/drawing/2014/main" id="{A08F2417-8FF7-CA97-F357-0988DE135599}"/>
+              </a:ext>
+            </a:extLst>
+          </p:cNvPr>
+          <p:cNvSpPr>
+            <a:spLocks noGrp="1"/>
+          </p:cNvSpPr>
+          <p:nvPr>
+            <p:ph type="title" idx="100"/>
+          </p:nvPr>
+        </p:nvSpPr>
+        <p:spPr/>
+        <p:txBody>
+          <a:bodyPr/>
+          <a:lstStyle/>
+          <a:p>
+            <a:r>
+              <a:rPr lang="zh-TW" altLang="en-US" dirty="0"/>
+              <a:t>零日攻擊</a:t>
+            </a:r>
+          </a:p>
+        </p:txBody>
+      </p:sp>
+      <p:pic>
+        <p:nvPicPr>
+          <p:cNvPr id="4" name="圖片 3">
+            <a:extLst>
+              <a:ext uri="{FF2B5EF4-FFF2-40B4-BE49-F238E27FC236}">
+                <a16:creationId xmlns:a16="http://schemas.microsoft.com/office/drawing/2014/main" id="{216C323F-E803-FD04-4DF1-3B615BBDA9DC}"/>
+              </a:ext>
+            </a:extLst>
+          </p:cNvPr>
+          <p:cNvPicPr>
+            <a:picLocks noChangeAspect="1"/>
+          </p:cNvPicPr>
+          <p:nvPr/>
+        </p:nvPicPr>
+        <p:blipFill>
+          <a:blip r:embed="rId2"/>
+          <a:stretch>
+            <a:fillRect/>
+          </a:stretch>
+        </p:blipFill>
+        <p:spPr>
+          <a:xfrm>
+            <a:off x="2504574" y="1166497"/>
+            <a:ext cx="7182852" cy="4525006"/>
+          </a:xfrm>
+          <a:prstGeom prst="rect">
+            <a:avLst/>
+          </a:prstGeom>
+        </p:spPr>
+      </p:pic>
+    </p:spTree>
+    <p:extLst>
+      <p:ext uri="{BB962C8B-B14F-4D97-AF65-F5344CB8AC3E}">
+        <p14:creationId xmlns:p14="http://schemas.microsoft.com/office/powerpoint/2010/main" val="2905096338"/>
+      </p:ext>
+    </p:extLst>
+  </p:cSld>
+  <p:clrMapOvr>
+    <a:masterClrMapping/>
+  </p:clrMapOvr>
+</p:sld>
+</file>
+
+<file path=ppt/slides/slide4.xml><?xml version="1.0" encoding="utf-8"?>
 <p:sld xmlns:a="http://schemas.openxmlformats.org/drawingml/2006/main" xmlns:r="http://schemas.openxmlformats.org/officeDocument/2006/relationships" xmlns:p="http://schemas.openxmlformats.org/presentationml/2006/main">
   <p:cSld name="Slide 3">
     <p:spTree>
@@ -22109,7 +23521,7 @@
 </p:sld>
 </file>
 
-<file path=ppt/slides/slide4.xml><?xml version="1.0" encoding="utf-8"?>
+<file path=ppt/slides/slide5.xml><?xml version="1.0" encoding="utf-8"?>
 <p:sld xmlns:a="http://schemas.openxmlformats.org/drawingml/2006/main" xmlns:r="http://schemas.openxmlformats.org/officeDocument/2006/relationships" xmlns:p="http://schemas.openxmlformats.org/presentationml/2006/main">
   <p:cSld>
     <p:spTree>
@@ -22142,29 +23554,62 @@
             <p:ph type="title" idx="100"/>
           </p:nvPr>
         </p:nvSpPr>
-        <p:spPr/>
-        <p:txBody>
-          <a:bodyPr/>
-          <a:lstStyle/>
-          <a:p>
-            <a:r>
-              <a:rPr lang="en-US" altLang="zh-TW" dirty="0"/>
+        <p:spPr>
+          <a:xfrm>
+            <a:off x="548640" y="320040"/>
+            <a:ext cx="11064240" cy="777240"/>
+          </a:xfrm>
+          <a:prstGeom prst="rect">
+            <a:avLst/>
+          </a:prstGeom>
+          <a:noFill/>
+          <a:ln/>
+        </p:spPr>
+        <p:txBody>
+          <a:bodyPr wrap="square" lIns="0" tIns="0" rIns="0" bIns="0" rtlCol="0" anchor="ctr"/>
+          <a:lstStyle/>
+          <a:p>
+            <a:pPr marL="0" indent="0" algn="l">
+              <a:buNone/>
+            </a:pPr>
+            <a:r>
+              <a:rPr lang="en-US" altLang="zh-TW" sz="3200" b="1" dirty="0">
+                <a:solidFill>
+                  <a:schemeClr val="tx2"/>
+                </a:solidFill>
+              </a:rPr>
               <a:t>SBOM,</a:t>
             </a:r>
             <a:r>
-              <a:rPr lang="zh-TW" altLang="en-US" dirty="0"/>
+              <a:rPr lang="zh-TW" altLang="en-US" sz="3200" b="1" dirty="0">
+                <a:solidFill>
+                  <a:schemeClr val="tx2"/>
+                </a:solidFill>
+              </a:rPr>
               <a:t> </a:t>
             </a:r>
             <a:r>
-              <a:rPr lang="zh-TW" altLang="zh-TW" dirty="0"/>
+              <a:rPr lang="zh-TW" altLang="zh-TW" sz="3200" b="1" dirty="0">
+                <a:solidFill>
+                  <a:schemeClr val="tx2"/>
+                </a:solidFill>
+              </a:rPr>
               <a:t>Software Bill of Materials</a:t>
             </a:r>
             <a:r>
-              <a:rPr lang="en-US" altLang="zh-TW" dirty="0"/>
+              <a:rPr lang="en-US" altLang="zh-TW" sz="3200" b="1" dirty="0">
+                <a:solidFill>
+                  <a:schemeClr val="tx2"/>
+                </a:solidFill>
+              </a:rPr>
               <a:t> – </a:t>
             </a:r>
             <a:r>
-              <a:rPr lang="zh-TW" altLang="en-US" dirty="0"/>
+              <a:rPr lang="zh-TW" altLang="en-US" sz="3200" b="1" dirty="0">
+                <a:solidFill>
+                  <a:schemeClr val="tx2"/>
+                </a:solidFill>
+              </a:rPr>
               <a:t>說文解字</a:t>
             </a:r>
           </a:p>
@@ -22185,7 +23630,7 @@
         <p:spPr>
           <a:xfrm>
             <a:off x="548640" y="1371600"/>
-            <a:ext cx="10932160" cy="4800600"/>
+            <a:ext cx="11064240" cy="4754880"/>
           </a:xfrm>
           <a:prstGeom prst="roundRect">
             <a:avLst>
@@ -22198,216 +23643,321 @@
           <a:ln/>
         </p:spPr>
         <p:txBody>
+          <a:bodyPr wrap="square" lIns="365760" tIns="274320" rIns="365760" bIns="274320" rtlCol="0" anchor="t"/>
+          <a:lstStyle/>
+          <a:p>
+            <a:r>
+              <a:rPr lang="zh-TW" altLang="zh-TW" sz="1600" dirty="0"/>
+              <a:t>SBOM 全名為 </a:t>
+            </a:r>
+            <a:r>
+              <a:rPr lang="zh-TW" altLang="zh-TW" sz="1600" b="1" dirty="0"/>
+              <a:t>Software Bill of Materials</a:t>
+            </a:r>
+            <a:r>
+              <a:rPr lang="zh-TW" altLang="zh-TW" sz="1600" dirty="0"/>
+              <a:t>，軟體物料清單。</a:t>
+            </a:r>
+          </a:p>
+          <a:p>
+            <a:pPr>
+              <a:spcBef>
+                <a:spcPts val="1800"/>
+              </a:spcBef>
+              <a:spcAft>
+                <a:spcPts val="600"/>
+              </a:spcAft>
+            </a:pPr>
+            <a:r>
+              <a:rPr lang="zh-TW" altLang="en-US" sz="1800" b="1" dirty="0">
+                <a:solidFill>
+                  <a:schemeClr val="tx2"/>
+                </a:solidFill>
+              </a:rPr>
+              <a:t>來自製造業</a:t>
+            </a:r>
+            <a:endParaRPr lang="en-US" altLang="zh-TW" sz="1800" b="1" dirty="0"/>
+          </a:p>
+          <a:p>
+            <a:r>
+              <a:rPr lang="zh-TW" altLang="zh-TW" sz="1600" dirty="0"/>
+              <a:t>製造業的物料清單</a:t>
+            </a:r>
+            <a:r>
+              <a:rPr lang="zh-TW" altLang="en-US" sz="1600" dirty="0"/>
+              <a:t>（</a:t>
+            </a:r>
+            <a:r>
+              <a:rPr lang="en-US" altLang="zh-TW" sz="1600" dirty="0"/>
+              <a:t>BOM</a:t>
+            </a:r>
+            <a:r>
+              <a:rPr lang="zh-TW" altLang="en-US" sz="1600" dirty="0"/>
+              <a:t>），電腦就是 </a:t>
+            </a:r>
+            <a:r>
+              <a:rPr lang="en-US" altLang="zh-TW" sz="1600" dirty="0"/>
+              <a:t>CPU</a:t>
+            </a:r>
+            <a:r>
+              <a:rPr lang="zh-TW" altLang="en-US" sz="1600" dirty="0"/>
+              <a:t>、記憶體、主機版等等型號資訊</a:t>
+            </a:r>
+            <a:r>
+              <a:rPr lang="zh-TW" altLang="zh-TW" sz="1600" dirty="0"/>
+              <a:t>。</a:t>
+            </a:r>
+            <a:endParaRPr lang="en-US" altLang="zh-TW" sz="1600" dirty="0"/>
+          </a:p>
+          <a:p>
+            <a:r>
+              <a:rPr lang="zh-TW" altLang="zh-TW" sz="1600" dirty="0"/>
+              <a:t>食品</a:t>
+            </a:r>
+            <a:r>
+              <a:rPr lang="zh-TW" altLang="en-US" sz="1600" dirty="0"/>
+              <a:t>業就像</a:t>
+            </a:r>
+            <a:r>
+              <a:rPr lang="zh-TW" altLang="zh-TW" sz="1600" dirty="0"/>
+              <a:t>食品包裝上的成分標示</a:t>
+            </a:r>
+            <a:r>
+              <a:rPr lang="zh-TW" altLang="en-US" sz="1600" dirty="0"/>
+              <a:t>。</a:t>
+            </a:r>
+            <a:endParaRPr lang="en-US" altLang="zh-TW" sz="1600" dirty="0"/>
+          </a:p>
+          <a:p>
+            <a:r>
+              <a:rPr lang="en-US" altLang="zh-TW" sz="1600" dirty="0"/>
+              <a:t>BOM </a:t>
+            </a:r>
+            <a:r>
+              <a:rPr lang="zh-TW" altLang="zh-TW" sz="1600" dirty="0"/>
+              <a:t>全名為 Bill of Materials</a:t>
+            </a:r>
+            <a:r>
+              <a:rPr lang="en-US" altLang="zh-TW" sz="1600" dirty="0"/>
+              <a:t> (</a:t>
+            </a:r>
+            <a:r>
+              <a:rPr lang="zh-TW" altLang="zh-TW" sz="1600" dirty="0"/>
+              <a:t>物料清單</a:t>
+            </a:r>
+            <a:r>
+              <a:rPr lang="en-US" altLang="zh-TW" sz="1600" dirty="0"/>
+              <a:t> or </a:t>
+            </a:r>
+            <a:r>
+              <a:rPr lang="zh-TW" altLang="en-US" sz="1600" dirty="0"/>
+              <a:t>用料表</a:t>
+            </a:r>
+            <a:r>
+              <a:rPr lang="en-US" altLang="zh-TW" sz="1600" dirty="0"/>
+              <a:t>)</a:t>
+            </a:r>
+            <a:r>
+              <a:rPr lang="zh-TW" altLang="en-US" sz="1600" dirty="0"/>
+              <a:t>。</a:t>
+            </a:r>
+            <a:endParaRPr lang="en-US" altLang="zh-TW" sz="1600" dirty="0"/>
+          </a:p>
+          <a:p>
+            <a:pPr>
+              <a:spcBef>
+                <a:spcPts val="1800"/>
+              </a:spcBef>
+              <a:spcAft>
+                <a:spcPts val="600"/>
+              </a:spcAft>
+            </a:pPr>
+            <a:r>
+              <a:rPr lang="zh-TW" altLang="en-US" sz="1800" b="1" dirty="0">
+                <a:solidFill>
+                  <a:schemeClr val="tx2"/>
+                </a:solidFill>
+              </a:rPr>
+              <a:t>軟體業 → </a:t>
+            </a:r>
+            <a:r>
+              <a:rPr lang="en-US" altLang="zh-TW" sz="1800" b="1" dirty="0">
+                <a:solidFill>
+                  <a:schemeClr val="tx2"/>
+                </a:solidFill>
+              </a:rPr>
+              <a:t>Software-</a:t>
+            </a:r>
+            <a:r>
+              <a:rPr lang="zh-TW" altLang="zh-TW" sz="1800" b="1" dirty="0">
+                <a:solidFill>
+                  <a:schemeClr val="tx2"/>
+                </a:solidFill>
+              </a:rPr>
+              <a:t>BOM</a:t>
+            </a:r>
+            <a:r>
+              <a:rPr lang="en-US" altLang="zh-TW" sz="1800" b="1" dirty="0">
+                <a:solidFill>
+                  <a:schemeClr val="tx2"/>
+                </a:solidFill>
+              </a:rPr>
+              <a:t> </a:t>
+            </a:r>
+            <a:r>
+              <a:rPr lang="zh-TW" altLang="en-US" sz="1800" b="1" dirty="0">
+                <a:solidFill>
+                  <a:schemeClr val="tx2"/>
+                </a:solidFill>
+              </a:rPr>
+              <a:t>→ </a:t>
+            </a:r>
+            <a:r>
+              <a:rPr lang="en-US" altLang="zh-TW" sz="1800" b="1" dirty="0">
+                <a:solidFill>
+                  <a:schemeClr val="tx2"/>
+                </a:solidFill>
+              </a:rPr>
+              <a:t>SBOM</a:t>
+            </a:r>
+            <a:r>
+              <a:rPr lang="zh-TW" altLang="zh-TW" sz="1800" b="1" dirty="0">
+                <a:solidFill>
+                  <a:schemeClr val="tx2"/>
+                </a:solidFill>
+              </a:rPr>
+              <a:t>？</a:t>
+            </a:r>
+            <a:endParaRPr lang="en-US" altLang="zh-TW" sz="1800" b="1" dirty="0"/>
+          </a:p>
+          <a:p>
+            <a:pPr lvl="0"/>
+            <a:r>
+              <a:rPr lang="zh-TW" altLang="zh-TW" sz="1600" dirty="0"/>
+              <a:t>應用程式中使用的所有開放原始碼、閉源元件、程式庫（Library）、韌體與相依性的詳細結構化清單。</a:t>
+            </a:r>
+            <a:br>
+              <a:rPr lang="en-US" altLang="zh-TW" sz="1600" dirty="0"/>
+            </a:br>
+            <a:r>
+              <a:rPr lang="zh-TW" altLang="en-US" sz="1600" dirty="0"/>
+              <a:t>儲存型式有 </a:t>
+            </a:r>
+            <a:r>
+              <a:rPr lang="en-US" altLang="zh-TW" sz="1600" dirty="0"/>
+              <a:t>JSON </a:t>
+            </a:r>
+            <a:r>
+              <a:rPr lang="zh-TW" altLang="en-US" sz="1600" dirty="0"/>
+              <a:t>也有 </a:t>
+            </a:r>
+            <a:r>
+              <a:rPr lang="en-US" altLang="zh-TW" sz="1600" dirty="0"/>
+              <a:t>XML</a:t>
+            </a:r>
+            <a:r>
+              <a:rPr lang="zh-TW" altLang="en-US" sz="1600" dirty="0"/>
+              <a:t>。</a:t>
+            </a:r>
+            <a:endParaRPr lang="zh-TW" altLang="zh-TW" sz="1600" dirty="0"/>
+          </a:p>
+          <a:p>
+            <a:pPr>
+              <a:spcBef>
+                <a:spcPts val="1800"/>
+              </a:spcBef>
+              <a:spcAft>
+                <a:spcPts val="600"/>
+              </a:spcAft>
+            </a:pPr>
+            <a:r>
+              <a:rPr lang="zh-TW" altLang="zh-TW" sz="1800" b="1" dirty="0">
+                <a:solidFill>
+                  <a:schemeClr val="tx2"/>
+                </a:solidFill>
+              </a:rPr>
+              <a:t>主要用途</a:t>
+            </a:r>
+            <a:endParaRPr lang="en-US" altLang="zh-TW" sz="1800" b="1" dirty="0"/>
+          </a:p>
+          <a:p>
+            <a:pPr lvl="0"/>
+            <a:r>
+              <a:rPr lang="zh-TW" altLang="zh-TW" sz="1600" b="1" dirty="0"/>
+              <a:t>資安與漏洞管理</a:t>
+            </a:r>
+            <a:r>
+              <a:rPr lang="zh-TW" altLang="zh-TW" sz="1600" dirty="0"/>
+              <a:t>：當某個第三方套件被爆出安全漏洞時，可以快速查出自家軟體是否受到影響。</a:t>
+            </a:r>
+          </a:p>
+          <a:p>
+            <a:pPr lvl="0"/>
+            <a:r>
+              <a:rPr lang="zh-TW" altLang="zh-TW" sz="1600" b="1" dirty="0"/>
+              <a:t>法規遵循</a:t>
+            </a:r>
+            <a:r>
+              <a:rPr lang="zh-TW" altLang="zh-TW" sz="1600" dirty="0"/>
+              <a:t>：符合美國行政命令（如 EO 14028）以及歐盟網路韌性法案（CRA）等資安要求。</a:t>
+            </a:r>
+            <a:endParaRPr lang="en-US" altLang="zh-TW" sz="1600" dirty="0"/>
+          </a:p>
+          <a:p>
+            <a:pPr lvl="0"/>
+            <a:r>
+              <a:rPr lang="zh-TW" altLang="en-US" sz="1600" b="1" dirty="0"/>
+              <a:t>整合 </a:t>
+            </a:r>
+            <a:r>
+              <a:rPr lang="en-US" altLang="zh-TW" sz="1600" b="1" dirty="0"/>
+              <a:t>SDLC</a:t>
+            </a:r>
+            <a:r>
+              <a:rPr lang="zh-TW" altLang="en-US" sz="1600" dirty="0"/>
+              <a:t>：可整合軟體發展生命週期的論述。</a:t>
+            </a:r>
+            <a:endParaRPr lang="zh-TW" altLang="zh-TW" sz="1600" dirty="0"/>
+          </a:p>
+        </p:txBody>
+      </p:sp>
+      <p:sp>
+        <p:nvSpPr>
+          <p:cNvPr id="25" name="Slide Number Placeholder 0"/>
+          <p:cNvSpPr>
+            <a:spLocks noGrp="1"/>
+          </p:cNvSpPr>
+          <p:nvPr>
+            <p:ph type="sldNum" sz="quarter" idx="4294967295"/>
+          </p:nvPr>
+        </p:nvSpPr>
+        <p:spPr>
+          <a:xfrm>
+            <a:off x="11155680" y="6400800"/>
+            <a:ext cx="457200" cy="274320"/>
+          </a:xfrm>
+          <a:prstGeom prst="rect">
+            <a:avLst/>
+          </a:prstGeom>
+        </p:spPr>
+        <p:txBody>
           <a:bodyPr/>
-          <a:lstStyle/>
-          <a:p>
-            <a:r>
-              <a:rPr lang="zh-TW" altLang="zh-TW" dirty="0"/>
-              <a:t>SBOM 全名為 </a:t>
-            </a:r>
-            <a:r>
-              <a:rPr lang="zh-TW" altLang="zh-TW" b="1" dirty="0"/>
-              <a:t>Software Bill of Materials</a:t>
-            </a:r>
-            <a:r>
-              <a:rPr lang="zh-TW" altLang="zh-TW" dirty="0"/>
-              <a:t>，軟體物料清單。</a:t>
-            </a:r>
-          </a:p>
-          <a:p>
-            <a:endParaRPr lang="en-US" altLang="zh-TW" b="1" dirty="0"/>
-          </a:p>
-          <a:p>
-            <a:r>
-              <a:rPr lang="en-US" altLang="zh-TW" b="1" dirty="0"/>
-              <a:t>### </a:t>
-            </a:r>
-            <a:r>
-              <a:rPr lang="zh-TW" altLang="en-US" b="1" dirty="0"/>
-              <a:t>來自製造業</a:t>
-            </a:r>
-            <a:r>
-              <a:rPr lang="zh-TW" altLang="zh-TW" b="1" dirty="0"/>
-              <a:t>物料清單（BOM）</a:t>
-            </a:r>
-            <a:endParaRPr lang="en-US" altLang="zh-TW" b="1" dirty="0"/>
-          </a:p>
-          <a:p>
-            <a:endParaRPr lang="en-US" altLang="zh-TW" b="1" dirty="0"/>
-          </a:p>
-          <a:p>
-            <a:r>
-              <a:rPr lang="zh-TW" altLang="zh-TW" dirty="0"/>
-              <a:t>製造業的物料清單。食品</a:t>
-            </a:r>
-            <a:r>
-              <a:rPr lang="zh-TW" altLang="en-US" dirty="0"/>
-              <a:t>業：</a:t>
-            </a:r>
-            <a:r>
-              <a:rPr lang="zh-TW" altLang="zh-TW" dirty="0"/>
-              <a:t>食品包裝上的成分標示</a:t>
-            </a:r>
-            <a:r>
-              <a:rPr lang="zh-TW" altLang="en-US" dirty="0"/>
-              <a:t>。</a:t>
-            </a:r>
-            <a:endParaRPr lang="en-US" altLang="zh-TW" dirty="0"/>
-          </a:p>
-          <a:p>
-            <a:r>
-              <a:rPr lang="en-US" altLang="zh-TW" dirty="0"/>
-              <a:t>BOM </a:t>
-            </a:r>
-            <a:r>
-              <a:rPr lang="zh-TW" altLang="zh-TW" dirty="0"/>
-              <a:t>全名為 Bill of Materials</a:t>
-            </a:r>
-            <a:r>
-              <a:rPr lang="en-US" altLang="zh-TW" dirty="0"/>
-              <a:t> (</a:t>
-            </a:r>
-            <a:r>
-              <a:rPr lang="zh-TW" altLang="zh-TW" dirty="0"/>
-              <a:t>物料清單</a:t>
-            </a:r>
-            <a:r>
-              <a:rPr lang="en-US" altLang="zh-TW" dirty="0"/>
-              <a:t> or </a:t>
-            </a:r>
-            <a:r>
-              <a:rPr lang="zh-TW" altLang="en-US" dirty="0"/>
-              <a:t>用料表</a:t>
-            </a:r>
-            <a:r>
-              <a:rPr lang="en-US" altLang="zh-TW" dirty="0"/>
-              <a:t>)</a:t>
-            </a:r>
-            <a:r>
-              <a:rPr lang="zh-TW" altLang="en-US" dirty="0"/>
-              <a:t>。</a:t>
-            </a:r>
-            <a:endParaRPr lang="en-US" altLang="zh-TW" dirty="0"/>
-          </a:p>
-          <a:p>
-            <a:endParaRPr lang="en-US" altLang="zh-TW" b="1" dirty="0"/>
-          </a:p>
-          <a:p>
-            <a:r>
-              <a:rPr lang="en-US" altLang="zh-TW" b="1" dirty="0"/>
-              <a:t>### </a:t>
-            </a:r>
-            <a:r>
-              <a:rPr lang="zh-TW" altLang="en-US" b="1" dirty="0"/>
-              <a:t>軟體業 → </a:t>
-            </a:r>
-            <a:r>
-              <a:rPr lang="zh-TW" altLang="zh-TW" b="1" dirty="0"/>
-              <a:t>S</a:t>
-            </a:r>
-            <a:r>
-              <a:rPr lang="en-US" altLang="zh-TW" b="1" dirty="0" err="1"/>
-              <a:t>oftware</a:t>
-            </a:r>
-            <a:r>
-              <a:rPr lang="en-US" altLang="zh-TW" b="1" dirty="0"/>
-              <a:t>-</a:t>
-            </a:r>
-            <a:r>
-              <a:rPr lang="zh-TW" altLang="zh-TW" b="1" dirty="0"/>
-              <a:t>BOM</a:t>
-            </a:r>
-            <a:r>
-              <a:rPr lang="en-US" altLang="zh-TW" b="1" dirty="0"/>
-              <a:t> </a:t>
-            </a:r>
-            <a:r>
-              <a:rPr lang="zh-TW" altLang="en-US" b="1" dirty="0"/>
-              <a:t>→ </a:t>
-            </a:r>
-            <a:r>
-              <a:rPr lang="en-US" altLang="zh-TW" b="1" dirty="0"/>
-              <a:t>SBOM</a:t>
-            </a:r>
-            <a:r>
-              <a:rPr lang="zh-TW" altLang="zh-TW" b="1" dirty="0"/>
-              <a:t>？</a:t>
-            </a:r>
-            <a:endParaRPr lang="en-US" altLang="zh-TW" b="1" dirty="0"/>
-          </a:p>
-          <a:p>
-            <a:endParaRPr lang="zh-TW" altLang="zh-TW" b="1" dirty="0"/>
-          </a:p>
-          <a:p>
-            <a:pPr lvl="0"/>
-            <a:r>
-              <a:rPr lang="zh-TW" altLang="zh-TW" dirty="0"/>
-              <a:t>它是應用程式中使用的所有開放原始碼、閉源元件、程式庫（Library）、韌體與相依性的詳細結構化清單。</a:t>
-            </a:r>
-          </a:p>
-          <a:p>
-            <a:pPr lvl="0"/>
-            <a:r>
-              <a:rPr lang="zh-TW" altLang="zh-TW" dirty="0"/>
-              <a:t>內容通常包含元件名稱、版本號、授權條款以及供應鏈來源等資訊。</a:t>
-            </a:r>
-            <a:endParaRPr lang="en-US" altLang="zh-TW" b="1" dirty="0"/>
-          </a:p>
-          <a:p>
-            <a:endParaRPr lang="en-US" altLang="zh-TW" b="1" dirty="0"/>
-          </a:p>
-          <a:p>
-            <a:r>
-              <a:rPr lang="en-US" altLang="zh-TW" b="1" dirty="0"/>
-              <a:t>### </a:t>
-            </a:r>
-            <a:r>
-              <a:rPr lang="zh-TW" altLang="zh-TW" b="1" dirty="0"/>
-              <a:t>主要用途</a:t>
-            </a:r>
-            <a:endParaRPr lang="en-US" altLang="zh-TW" b="1" dirty="0"/>
-          </a:p>
-          <a:p>
-            <a:endParaRPr lang="zh-TW" altLang="zh-TW" b="1" dirty="0"/>
-          </a:p>
-          <a:p>
-            <a:pPr lvl="0"/>
-            <a:r>
-              <a:rPr lang="zh-TW" altLang="zh-TW" b="1" dirty="0"/>
-              <a:t>資安與漏洞管理</a:t>
-            </a:r>
-            <a:r>
-              <a:rPr lang="zh-TW" altLang="zh-TW" dirty="0"/>
-              <a:t>：當某個第三方套件被爆出安全漏洞時，可以快速查出自家軟體是否受到影響。</a:t>
-            </a:r>
-          </a:p>
-          <a:p>
-            <a:pPr lvl="0"/>
-            <a:r>
-              <a:rPr lang="zh-TW" altLang="zh-TW" b="1" dirty="0"/>
-              <a:t>法規遵循</a:t>
-            </a:r>
-            <a:r>
-              <a:rPr lang="zh-TW" altLang="zh-TW" dirty="0"/>
-              <a:t>：符合美國行政命令（如 EO 14028）以及歐盟網路韌性法案（CRA）等資安要求。</a:t>
-            </a:r>
-            <a:endParaRPr lang="en-US" altLang="zh-TW" dirty="0"/>
-          </a:p>
-          <a:p>
-            <a:pPr lvl="0"/>
-            <a:r>
-              <a:rPr lang="zh-TW" altLang="en-US" dirty="0"/>
-              <a:t>整合 </a:t>
-            </a:r>
-            <a:r>
-              <a:rPr lang="en-US" altLang="zh-TW" dirty="0"/>
-              <a:t>SDLC</a:t>
-            </a:r>
-            <a:r>
-              <a:rPr lang="zh-TW" altLang="en-US" dirty="0"/>
-              <a:t>：可整合軟體發展生命週期的論述。</a:t>
-            </a:r>
-            <a:endParaRPr lang="zh-TW" altLang="zh-TW" dirty="0"/>
+          <a:lstStyle>
+            <a:lvl1pPr>
+              <a:defRPr sz="1000">
+                <a:solidFill>
+                  <a:schemeClr val="accent6"/>
+                </a:solidFill>
+              </a:defRPr>
+            </a:lvl1pPr>
+          </a:lstStyle>
+          <a:p>
+            <a:pPr algn="r"/>
+            <a:fld id="{F7021451-1387-4CA6-816F-3879F97B5CBC}" type="slidenum">
+              <a:rPr lang="en-US" b="0"/>
+              <a:t>5</a:t>
+            </a:fld>
+            <a:endParaRPr lang="en-US"/>
           </a:p>
         </p:txBody>
       </p:sp>
@@ -22424,7 +23974,7 @@
 </p:sld>
 </file>
 
-<file path=ppt/slides/slide5.xml><?xml version="1.0" encoding="utf-8"?>
+<file path=ppt/slides/slide6.xml><?xml version="1.0" encoding="utf-8"?>
 <p:sld xmlns:a="http://schemas.openxmlformats.org/drawingml/2006/main" xmlns:r="http://schemas.openxmlformats.org/officeDocument/2006/relationships" xmlns:p="http://schemas.openxmlformats.org/presentationml/2006/main">
   <p:cSld name="Slide 4">
     <p:spTree>
@@ -24052,7 +25602,7 @@
           </a:prstGeom>
           <a:extLst>
             <a:ext uri="{C572A759-6A51-4108-AA02-DFA0A04FC94B}">
-              <ma14:wrappingTextBoxFlag xmlns:ma14="http://schemas.microsoft.com/office/mac/drawingml/2011/main" xmlns="" val="0"/>
+              <ma14:wrappingTextBoxFlag xmlns="" xmlns:ma14="http://schemas.microsoft.com/office/mac/drawingml/2011/main" val="0"/>
             </a:ext>
           </a:extLst>
         </p:spPr>
@@ -24071,7 +25621,7 @@
             <a:pPr algn="r"/>
             <a:fld id="{F7021451-1387-4CA6-816F-3879F97B5CBC}" type="slidenum">
               <a:rPr lang="en-US" b="0"/>
-              <a:t>5</a:t>
+              <a:t>6</a:t>
             </a:fld>
             <a:endParaRPr lang="en-US"/>
           </a:p>
@@ -24085,7 +25635,7 @@
 </p:sld>
 </file>
 
-<file path=ppt/slides/slide6.xml><?xml version="1.0" encoding="utf-8"?>
+<file path=ppt/slides/slide7.xml><?xml version="1.0" encoding="utf-8"?>
 <p:sld xmlns:a="http://schemas.openxmlformats.org/drawingml/2006/main" xmlns:r="http://schemas.openxmlformats.org/officeDocument/2006/relationships" xmlns:p="http://schemas.openxmlformats.org/presentationml/2006/main">
   <p:cSld name="Slide 5">
     <p:spTree>
@@ -25446,7 +26996,7 @@
           </a:prstGeom>
           <a:extLst>
             <a:ext uri="{C572A759-6A51-4108-AA02-DFA0A04FC94B}">
-              <ma14:wrappingTextBoxFlag xmlns:ma14="http://schemas.microsoft.com/office/mac/drawingml/2011/main" xmlns="" val="0"/>
+              <ma14:wrappingTextBoxFlag xmlns="" xmlns:ma14="http://schemas.microsoft.com/office/mac/drawingml/2011/main" val="0"/>
             </a:ext>
           </a:extLst>
         </p:spPr>
@@ -25465,7 +27015,7 @@
             <a:pPr algn="r"/>
             <a:fld id="{F7021451-1387-4CA6-816F-3879F97B5CBC}" type="slidenum">
               <a:rPr lang="en-US" b="0"/>
-              <a:t>6</a:t>
+              <a:t>7</a:t>
             </a:fld>
             <a:endParaRPr lang="en-US"/>
           </a:p>
@@ -25479,7 +27029,7 @@
 </p:sld>
 </file>
 
-<file path=ppt/slides/slide7.xml><?xml version="1.0" encoding="utf-8"?>
+<file path=ppt/slides/slide8.xml><?xml version="1.0" encoding="utf-8"?>
 <p:sld xmlns:a="http://schemas.openxmlformats.org/drawingml/2006/main" xmlns:r="http://schemas.openxmlformats.org/officeDocument/2006/relationships" xmlns:p="http://schemas.openxmlformats.org/presentationml/2006/main">
   <p:cSld name="Slide 6">
     <p:spTree>
@@ -26811,7 +28361,7 @@
           </a:prstGeom>
           <a:extLst>
             <a:ext uri="{C572A759-6A51-4108-AA02-DFA0A04FC94B}">
-              <ma14:wrappingTextBoxFlag xmlns:ma14="http://schemas.microsoft.com/office/mac/drawingml/2011/main" xmlns="" val="0"/>
+              <ma14:wrappingTextBoxFlag xmlns="" xmlns:ma14="http://schemas.microsoft.com/office/mac/drawingml/2011/main" val="0"/>
             </a:ext>
           </a:extLst>
         </p:spPr>
@@ -26830,7 +28380,7 @@
             <a:pPr algn="r"/>
             <a:fld id="{F7021451-1387-4CA6-816F-3879F97B5CBC}" type="slidenum">
               <a:rPr lang="en-US" b="0"/>
-              <a:t>7</a:t>
+              <a:t>8</a:t>
             </a:fld>
             <a:endParaRPr lang="en-US"/>
           </a:p>
@@ -26844,7 +28394,7 @@
 </p:sld>
 </file>
 
-<file path=ppt/slides/slide8.xml><?xml version="1.0" encoding="utf-8"?>
+<file path=ppt/slides/slide9.xml><?xml version="1.0" encoding="utf-8"?>
 <p:sld xmlns:a="http://schemas.openxmlformats.org/drawingml/2006/main" xmlns:r="http://schemas.openxmlformats.org/officeDocument/2006/relationships" xmlns:p="http://schemas.openxmlformats.org/presentationml/2006/main">
   <p:cSld name="Slide 7">
     <p:spTree>
@@ -27589,1070 +29139,7 @@
           </a:prstGeom>
           <a:extLst>
             <a:ext uri="{C572A759-6A51-4108-AA02-DFA0A04FC94B}">
-              <ma14:wrappingTextBoxFlag xmlns:ma14="http://schemas.microsoft.com/office/mac/drawingml/2011/main" xmlns="" val="0"/>
-            </a:ext>
-          </a:extLst>
-        </p:spPr>
-        <p:txBody>
-          <a:bodyPr/>
-          <a:lstStyle>
-            <a:lvl1pPr>
-              <a:defRPr sz="1000">
-                <a:solidFill>
-                  <a:schemeClr val="accent6"/>
-                </a:solidFill>
-              </a:defRPr>
-            </a:lvl1pPr>
-          </a:lstStyle>
-          <a:p>
-            <a:pPr algn="r"/>
-            <a:fld id="{F7021451-1387-4CA6-816F-3879F97B5CBC}" type="slidenum">
-              <a:rPr lang="en-US" b="0"/>
-              <a:t>8</a:t>
-            </a:fld>
-            <a:endParaRPr lang="en-US"/>
-          </a:p>
-        </p:txBody>
-      </p:sp>
-    </p:spTree>
-  </p:cSld>
-  <p:clrMapOvr>
-    <a:masterClrMapping/>
-  </p:clrMapOvr>
-</p:sld>
-</file>
-
-<file path=ppt/slides/slide9.xml><?xml version="1.0" encoding="utf-8"?>
-<p:sld xmlns:a="http://schemas.openxmlformats.org/drawingml/2006/main" xmlns:r="http://schemas.openxmlformats.org/officeDocument/2006/relationships" xmlns:p="http://schemas.openxmlformats.org/presentationml/2006/main">
-  <p:cSld name="Slide 8">
-    <p:spTree>
-      <p:nvGrpSpPr>
-        <p:cNvPr id="1" name=""/>
-        <p:cNvGrpSpPr/>
-        <p:nvPr/>
-      </p:nvGrpSpPr>
-      <p:grpSpPr>
-        <a:xfrm>
-          <a:off x="0" y="0"/>
-          <a:ext cx="0" cy="0"/>
-          <a:chOff x="0" y="0"/>
-          <a:chExt cx="0" cy="0"/>
-        </a:xfrm>
-      </p:grpSpPr>
-      <p:sp>
-        <p:nvSpPr>
-          <p:cNvPr id="2" name="Text 0"/>
-          <p:cNvSpPr>
-            <a:spLocks noGrp="1"/>
-          </p:cNvSpPr>
-          <p:nvPr>
-            <p:ph type="title" idx="100" hasCustomPrompt="1"/>
-          </p:nvPr>
-        </p:nvSpPr>
-        <p:spPr>
-          <a:xfrm>
-            <a:off x="548640" y="320040"/>
-            <a:ext cx="11064240" cy="777240"/>
-          </a:xfrm>
-          <a:prstGeom prst="rect">
-            <a:avLst/>
-          </a:prstGeom>
-          <a:noFill/>
-          <a:ln/>
-        </p:spPr>
-        <p:txBody>
-          <a:bodyPr wrap="square" lIns="0" tIns="0" rIns="0" bIns="0" rtlCol="0" anchor="ctr"/>
-          <a:lstStyle/>
-          <a:p>
-            <a:pPr marL="0" indent="0" algn="l">
-              <a:buNone/>
-            </a:pPr>
-            <a:r>
-              <a:rPr lang="en-US" altLang="zh-TW" sz="3200" b="1" dirty="0">
-                <a:solidFill>
-                  <a:srgbClr val="FF0000"/>
-                </a:solidFill>
-              </a:rPr>
-              <a:t>※</a:t>
-            </a:r>
-            <a:r>
-              <a:rPr lang="en-US" altLang="zh-TW" sz="3200" b="1" dirty="0">
-                <a:solidFill>
-                  <a:schemeClr val="tx2"/>
-                </a:solidFill>
-              </a:rPr>
-              <a:t> </a:t>
-            </a:r>
-            <a:r>
-              <a:rPr lang="en-US" sz="3200" b="1" dirty="0" err="1">
-                <a:solidFill>
-                  <a:schemeClr val="tx2"/>
-                </a:solidFill>
-              </a:rPr>
-              <a:t>比對靠什麼：purl</a:t>
-            </a:r>
-            <a:r>
-              <a:rPr lang="en-US" sz="3200" b="1" dirty="0">
-                <a:solidFill>
-                  <a:schemeClr val="tx2"/>
-                </a:solidFill>
-              </a:rPr>
-              <a:t> 對上 CVE</a:t>
-            </a:r>
-            <a:endParaRPr lang="en-US" sz="3200" dirty="0"/>
-          </a:p>
-        </p:txBody>
-      </p:sp>
-      <p:sp>
-        <p:nvSpPr>
-          <p:cNvPr id="3" name="card-114"/>
-          <p:cNvSpPr/>
-          <p:nvPr/>
-        </p:nvSpPr>
-        <p:spPr>
-          <a:xfrm>
-            <a:off x="548640" y="1371600"/>
-            <a:ext cx="11064240" cy="2057400"/>
-          </a:xfrm>
-          <a:prstGeom prst="roundRect">
-            <a:avLst>
-              <a:gd name="adj" fmla="val 5333"/>
-            </a:avLst>
-          </a:prstGeom>
-          <a:solidFill>
-            <a:schemeClr val="bg2"/>
-          </a:solidFill>
-          <a:ln/>
-        </p:spPr>
-        <p:txBody>
-          <a:bodyPr/>
-          <a:lstStyle/>
-          <a:p>
-            <a:endParaRPr lang="zh-TW" altLang="en-US"/>
-          </a:p>
-        </p:txBody>
-      </p:sp>
-      <p:sp>
-        <p:nvSpPr>
-          <p:cNvPr id="4" name="txt-115"/>
-          <p:cNvSpPr txBox="1"/>
-          <p:nvPr/>
-        </p:nvSpPr>
-        <p:spPr>
-          <a:xfrm>
-            <a:off x="822960" y="1508760"/>
-            <a:ext cx="7315200" cy="365760"/>
-          </a:xfrm>
-          <a:prstGeom prst="rect">
-            <a:avLst/>
-          </a:prstGeom>
-          <a:noFill/>
-          <a:ln/>
-        </p:spPr>
-        <p:txBody>
-          <a:bodyPr wrap="square" lIns="0" tIns="0" rIns="0" bIns="0" rtlCol="0" anchor="t"/>
-          <a:lstStyle/>
-          <a:p>
-            <a:pPr marL="0" indent="0">
-              <a:buNone/>
-            </a:pPr>
-            <a:r>
-              <a:rPr lang="en-US" sz="1600" b="1" dirty="0">
-                <a:solidFill>
-                  <a:schemeClr val="tx2"/>
-                </a:solidFill>
-              </a:rPr>
-              <a:t>purl（Package URL）：元件的身分證</a:t>
-            </a:r>
-            <a:endParaRPr lang="en-US" sz="1600" dirty="0"/>
-          </a:p>
-        </p:txBody>
-      </p:sp>
-      <p:sp>
-        <p:nvSpPr>
-          <p:cNvPr id="5" name="txt-116"/>
-          <p:cNvSpPr txBox="1"/>
-          <p:nvPr/>
-        </p:nvSpPr>
-        <p:spPr>
-          <a:xfrm>
-            <a:off x="822960" y="1965960"/>
-            <a:ext cx="6858000" cy="640080"/>
-          </a:xfrm>
-          <a:prstGeom prst="rect">
-            <a:avLst/>
-          </a:prstGeom>
-          <a:noFill/>
-          <a:ln/>
-        </p:spPr>
-        <p:txBody>
-          <a:bodyPr wrap="square" lIns="0" tIns="0" rIns="0" bIns="0" rtlCol="0" anchor="ctr"/>
-          <a:lstStyle/>
-          <a:p>
-            <a:pPr marL="0" indent="0">
-              <a:buNone/>
-            </a:pPr>
-            <a:r>
-              <a:rPr lang="en-US" sz="2800" b="1" dirty="0">
-                <a:solidFill>
-                  <a:srgbClr val="0F3B3A"/>
-                </a:solidFill>
-                <a:latin typeface="Courier New" pitchFamily="34" charset="0"/>
-                <a:ea typeface="Courier New" pitchFamily="34" charset="-122"/>
-                <a:cs typeface="Courier New" pitchFamily="34" charset="-120"/>
-              </a:rPr>
-              <a:t>pkg:</a:t>
-            </a:r>
-            <a:r>
-              <a:rPr lang="en-US" sz="2800" b="1" dirty="0">
-                <a:solidFill>
-                  <a:srgbClr val="3D5A80"/>
-                </a:solidFill>
-                <a:latin typeface="Courier New" pitchFamily="34" charset="0"/>
-                <a:ea typeface="Courier New" pitchFamily="34" charset="-122"/>
-                <a:cs typeface="Courier New" pitchFamily="34" charset="-120"/>
-              </a:rPr>
-              <a:t>nuget</a:t>
-            </a:r>
-            <a:r>
-              <a:rPr lang="en-US" sz="2800" b="1" dirty="0">
-                <a:solidFill>
-                  <a:srgbClr val="0F3B3A"/>
-                </a:solidFill>
-                <a:latin typeface="Courier New" pitchFamily="34" charset="0"/>
-                <a:ea typeface="Courier New" pitchFamily="34" charset="-122"/>
-                <a:cs typeface="Courier New" pitchFamily="34" charset="-120"/>
-              </a:rPr>
-              <a:t>/</a:t>
-            </a:r>
-            <a:r>
-              <a:rPr lang="en-US" sz="2800" b="1" dirty="0">
-                <a:solidFill>
-                  <a:srgbClr val="0E7C6B"/>
-                </a:solidFill>
-                <a:latin typeface="Courier New" pitchFamily="34" charset="0"/>
-                <a:ea typeface="Courier New" pitchFamily="34" charset="-122"/>
-                <a:cs typeface="Courier New" pitchFamily="34" charset="-120"/>
-              </a:rPr>
-              <a:t>Newtonsoft.Json</a:t>
-            </a:r>
-            <a:r>
-              <a:rPr lang="en-US" sz="2800" b="1" dirty="0">
-                <a:solidFill>
-                  <a:srgbClr val="0F3B3A"/>
-                </a:solidFill>
-                <a:latin typeface="Courier New" pitchFamily="34" charset="0"/>
-                <a:ea typeface="Courier New" pitchFamily="34" charset="-122"/>
-                <a:cs typeface="Courier New" pitchFamily="34" charset="-120"/>
-              </a:rPr>
-              <a:t>@</a:t>
-            </a:r>
-            <a:r>
-              <a:rPr lang="en-US" sz="2800" b="1" dirty="0">
-                <a:solidFill>
-                  <a:srgbClr val="B7791F"/>
-                </a:solidFill>
-                <a:latin typeface="Courier New" pitchFamily="34" charset="0"/>
-                <a:ea typeface="Courier New" pitchFamily="34" charset="-122"/>
-                <a:cs typeface="Courier New" pitchFamily="34" charset="-120"/>
-              </a:rPr>
-              <a:t>13.0.3</a:t>
-            </a:r>
-            <a:endParaRPr lang="en-US" sz="2800" dirty="0"/>
-          </a:p>
-        </p:txBody>
-      </p:sp>
-      <p:sp>
-        <p:nvSpPr>
-          <p:cNvPr id="6" name="txt-117"/>
-          <p:cNvSpPr txBox="1"/>
-          <p:nvPr/>
-        </p:nvSpPr>
-        <p:spPr>
-          <a:xfrm>
-            <a:off x="822960" y="2697480"/>
-            <a:ext cx="6858000" cy="365760"/>
-          </a:xfrm>
-          <a:prstGeom prst="rect">
-            <a:avLst/>
-          </a:prstGeom>
-          <a:noFill/>
-          <a:ln/>
-        </p:spPr>
-        <p:txBody>
-          <a:bodyPr wrap="square" lIns="0" tIns="0" rIns="0" bIns="0" rtlCol="0" anchor="t"/>
-          <a:lstStyle/>
-          <a:p>
-            <a:pPr marL="0" indent="0">
-              <a:buNone/>
-            </a:pPr>
-            <a:r>
-              <a:rPr lang="en-US" sz="1400" b="1" dirty="0">
-                <a:solidFill>
-                  <a:srgbClr val="3D5A80"/>
-                </a:solidFill>
-              </a:rPr>
-              <a:t>type</a:t>
-            </a:r>
-            <a:r>
-              <a:rPr lang="en-US" sz="1400" dirty="0">
-                <a:solidFill>
-                  <a:schemeClr val="accent6"/>
-                </a:solidFill>
-              </a:rPr>
-              <a:t> 生態系　　</a:t>
-            </a:r>
-            <a:r>
-              <a:rPr lang="en-US" sz="1400" b="1" dirty="0">
-                <a:solidFill>
-                  <a:srgbClr val="0E7C6B"/>
-                </a:solidFill>
-              </a:rPr>
-              <a:t>name</a:t>
-            </a:r>
-            <a:r>
-              <a:rPr lang="en-US" sz="1400" dirty="0">
-                <a:solidFill>
-                  <a:schemeClr val="accent6"/>
-                </a:solidFill>
-              </a:rPr>
-              <a:t> 套件名稱　　</a:t>
-            </a:r>
-            <a:r>
-              <a:rPr lang="en-US" sz="1400" b="1" dirty="0">
-                <a:solidFill>
-                  <a:srgbClr val="B7791F"/>
-                </a:solidFill>
-              </a:rPr>
-              <a:t>version</a:t>
-            </a:r>
-            <a:r>
-              <a:rPr lang="en-US" sz="1400" dirty="0">
-                <a:solidFill>
-                  <a:schemeClr val="accent6"/>
-                </a:solidFill>
-              </a:rPr>
-              <a:t> 版本</a:t>
-            </a:r>
-            <a:endParaRPr lang="en-US" sz="1400" dirty="0"/>
-          </a:p>
-        </p:txBody>
-      </p:sp>
-      <p:sp>
-        <p:nvSpPr>
-          <p:cNvPr id="7" name="txt-118"/>
-          <p:cNvSpPr txBox="1"/>
-          <p:nvPr/>
-        </p:nvSpPr>
-        <p:spPr>
-          <a:xfrm>
-            <a:off x="7863840" y="1965960"/>
-            <a:ext cx="3474720" cy="1097280"/>
-          </a:xfrm>
-          <a:prstGeom prst="rect">
-            <a:avLst/>
-          </a:prstGeom>
-          <a:noFill/>
-          <a:ln/>
-        </p:spPr>
-        <p:txBody>
-          <a:bodyPr wrap="square" lIns="0" tIns="0" rIns="0" bIns="0" rtlCol="0" anchor="ctr"/>
-          <a:lstStyle/>
-          <a:p>
-            <a:pPr marL="0" indent="0">
-              <a:buNone/>
-            </a:pPr>
-            <a:r>
-              <a:rPr lang="en-US" sz="1300" dirty="0">
-                <a:solidFill>
-                  <a:schemeClr val="accent6"/>
-                </a:solidFill>
-              </a:rPr>
-              <a:t>完整結構還可帶 namespace、?qualifiers、#subpath；空白等字元需百分比編碼</a:t>
-            </a:r>
-            <a:endParaRPr lang="en-US" sz="1300" dirty="0"/>
-          </a:p>
-        </p:txBody>
-      </p:sp>
-      <p:sp>
-        <p:nvSpPr>
-          <p:cNvPr id="8" name="iconbg-119"/>
-          <p:cNvSpPr/>
-          <p:nvPr/>
-        </p:nvSpPr>
-        <p:spPr>
-          <a:xfrm>
-            <a:off x="1417320" y="3749040"/>
-            <a:ext cx="777240" cy="777240"/>
-          </a:xfrm>
-          <a:prstGeom prst="ellipse">
-            <a:avLst/>
-          </a:prstGeom>
-          <a:solidFill>
-            <a:srgbClr val="0E7C6B"/>
-          </a:solidFill>
-          <a:ln/>
-        </p:spPr>
-        <p:txBody>
-          <a:bodyPr/>
-          <a:lstStyle/>
-          <a:p>
-            <a:endParaRPr lang="zh-TW" altLang="en-US"/>
-          </a:p>
-        </p:txBody>
-      </p:sp>
-      <p:pic>
-        <p:nvPicPr>
-          <p:cNvPr id="9" name="icon-120" descr="preencoded.png"/>
-          <p:cNvPicPr>
-            <a:picLocks noChangeAspect="1"/>
-          </p:cNvPicPr>
-          <p:nvPr/>
-        </p:nvPicPr>
-        <p:blipFill>
-          <a:blip r:embed="rId3"/>
-          <a:stretch>
-            <a:fillRect/>
-          </a:stretch>
-        </p:blipFill>
-        <p:spPr>
-          <a:xfrm>
-            <a:off x="1611630" y="3943350"/>
-            <a:ext cx="388620" cy="388620"/>
-          </a:xfrm>
-          <a:prstGeom prst="rect">
-            <a:avLst/>
-          </a:prstGeom>
-        </p:spPr>
-      </p:pic>
-      <p:sp>
-        <p:nvSpPr>
-          <p:cNvPr id="10" name="txt-121"/>
-          <p:cNvSpPr txBox="1"/>
-          <p:nvPr/>
-        </p:nvSpPr>
-        <p:spPr>
-          <a:xfrm>
-            <a:off x="548640" y="4617720"/>
-            <a:ext cx="2514600" cy="365760"/>
-          </a:xfrm>
-          <a:prstGeom prst="rect">
-            <a:avLst/>
-          </a:prstGeom>
-          <a:noFill/>
-          <a:ln/>
-        </p:spPr>
-        <p:txBody>
-          <a:bodyPr wrap="square" lIns="0" tIns="0" rIns="0" bIns="0" rtlCol="0" anchor="t"/>
-          <a:lstStyle/>
-          <a:p>
-            <a:pPr marL="0" indent="0" algn="ctr">
-              <a:buNone/>
-            </a:pPr>
-            <a:r>
-              <a:rPr lang="en-US" sz="1600" b="1" dirty="0">
-                <a:solidFill>
-                  <a:schemeClr val="tx2"/>
-                </a:solidFill>
-              </a:rPr>
-              <a:t>SBOM 元件</a:t>
-            </a:r>
-            <a:endParaRPr lang="en-US" sz="1600" dirty="0"/>
-          </a:p>
-        </p:txBody>
-      </p:sp>
-      <p:sp>
-        <p:nvSpPr>
-          <p:cNvPr id="11" name="txt-122"/>
-          <p:cNvSpPr txBox="1"/>
-          <p:nvPr/>
-        </p:nvSpPr>
-        <p:spPr>
-          <a:xfrm>
-            <a:off x="548640" y="4983480"/>
-            <a:ext cx="2514600" cy="365760"/>
-          </a:xfrm>
-          <a:prstGeom prst="rect">
-            <a:avLst/>
-          </a:prstGeom>
-          <a:noFill/>
-          <a:ln/>
-        </p:spPr>
-        <p:txBody>
-          <a:bodyPr wrap="square" lIns="0" tIns="0" rIns="0" bIns="0" rtlCol="0" anchor="t"/>
-          <a:lstStyle/>
-          <a:p>
-            <a:pPr marL="0" indent="0" algn="ctr">
-              <a:buNone/>
-            </a:pPr>
-            <a:r>
-              <a:rPr lang="en-US" sz="1300" dirty="0">
-                <a:solidFill>
-                  <a:schemeClr val="accent6"/>
-                </a:solidFill>
-              </a:rPr>
-              <a:t>每個元件帶 purl</a:t>
-            </a:r>
-            <a:endParaRPr lang="en-US" sz="1300" dirty="0"/>
-          </a:p>
-        </p:txBody>
-      </p:sp>
-      <p:sp>
-        <p:nvSpPr>
-          <p:cNvPr id="12" name="arrow-123"/>
-          <p:cNvSpPr/>
-          <p:nvPr/>
-        </p:nvSpPr>
-        <p:spPr>
-          <a:xfrm>
-            <a:off x="2697480" y="4133088"/>
-            <a:ext cx="1005840" cy="914"/>
-          </a:xfrm>
-          <a:prstGeom prst="line">
-            <a:avLst/>
-          </a:prstGeom>
-          <a:noFill/>
-          <a:ln w="25400">
-            <a:solidFill>
-              <a:srgbClr val="5C6B73"/>
-            </a:solidFill>
-            <a:prstDash val="solid"/>
-            <a:tailEnd type="triangle"/>
-          </a:ln>
-        </p:spPr>
-        <p:txBody>
-          <a:bodyPr/>
-          <a:lstStyle/>
-          <a:p>
-            <a:endParaRPr lang="zh-TW" altLang="en-US"/>
-          </a:p>
-        </p:txBody>
-      </p:sp>
-      <p:sp>
-        <p:nvSpPr>
-          <p:cNvPr id="13" name="iconbg-124"/>
-          <p:cNvSpPr/>
-          <p:nvPr/>
-        </p:nvSpPr>
-        <p:spPr>
-          <a:xfrm>
-            <a:off x="4251960" y="3749040"/>
-            <a:ext cx="777240" cy="777240"/>
-          </a:xfrm>
-          <a:prstGeom prst="ellipse">
-            <a:avLst/>
-          </a:prstGeom>
-          <a:solidFill>
-            <a:srgbClr val="0E7C6B"/>
-          </a:solidFill>
-          <a:ln/>
-        </p:spPr>
-        <p:txBody>
-          <a:bodyPr/>
-          <a:lstStyle/>
-          <a:p>
-            <a:endParaRPr lang="zh-TW" altLang="en-US"/>
-          </a:p>
-        </p:txBody>
-      </p:sp>
-      <p:pic>
-        <p:nvPicPr>
-          <p:cNvPr id="14" name="icon-125" descr="preencoded.png"/>
-          <p:cNvPicPr>
-            <a:picLocks noChangeAspect="1"/>
-          </p:cNvPicPr>
-          <p:nvPr/>
-        </p:nvPicPr>
-        <p:blipFill>
-          <a:blip r:embed="rId4"/>
-          <a:stretch>
-            <a:fillRect/>
-          </a:stretch>
-        </p:blipFill>
-        <p:spPr>
-          <a:xfrm>
-            <a:off x="4446270" y="3943350"/>
-            <a:ext cx="388620" cy="388620"/>
-          </a:xfrm>
-          <a:prstGeom prst="rect">
-            <a:avLst/>
-          </a:prstGeom>
-        </p:spPr>
-      </p:pic>
-      <p:sp>
-        <p:nvSpPr>
-          <p:cNvPr id="15" name="txt-126"/>
-          <p:cNvSpPr txBox="1"/>
-          <p:nvPr/>
-        </p:nvSpPr>
-        <p:spPr>
-          <a:xfrm>
-            <a:off x="3383280" y="4617720"/>
-            <a:ext cx="2514600" cy="365760"/>
-          </a:xfrm>
-          <a:prstGeom prst="rect">
-            <a:avLst/>
-          </a:prstGeom>
-          <a:noFill/>
-          <a:ln/>
-        </p:spPr>
-        <p:txBody>
-          <a:bodyPr wrap="square" lIns="0" tIns="0" rIns="0" bIns="0" rtlCol="0" anchor="t"/>
-          <a:lstStyle/>
-          <a:p>
-            <a:pPr marL="0" indent="0" algn="ctr">
-              <a:buNone/>
-            </a:pPr>
-            <a:r>
-              <a:rPr lang="en-US" sz="1600" b="1" dirty="0">
-                <a:solidFill>
-                  <a:schemeClr val="tx2"/>
-                </a:solidFill>
-              </a:rPr>
-              <a:t>弱點資料庫</a:t>
-            </a:r>
-            <a:endParaRPr lang="en-US" sz="1600" dirty="0"/>
-          </a:p>
-        </p:txBody>
-      </p:sp>
-      <p:sp>
-        <p:nvSpPr>
-          <p:cNvPr id="16" name="txt-127"/>
-          <p:cNvSpPr txBox="1"/>
-          <p:nvPr/>
-        </p:nvSpPr>
-        <p:spPr>
-          <a:xfrm>
-            <a:off x="3383280" y="4983480"/>
-            <a:ext cx="2514600" cy="365760"/>
-          </a:xfrm>
-          <a:prstGeom prst="rect">
-            <a:avLst/>
-          </a:prstGeom>
-          <a:noFill/>
-          <a:ln/>
-        </p:spPr>
-        <p:txBody>
-          <a:bodyPr wrap="square" lIns="0" tIns="0" rIns="0" bIns="0" rtlCol="0" anchor="t"/>
-          <a:lstStyle/>
-          <a:p>
-            <a:pPr marL="0" indent="0" algn="ctr">
-              <a:buNone/>
-            </a:pPr>
-            <a:r>
-              <a:rPr lang="en-US" sz="1300" dirty="0">
-                <a:solidFill>
-                  <a:schemeClr val="accent6"/>
-                </a:solidFill>
-              </a:rPr>
-              <a:t>OSV、GHSA、NVD</a:t>
-            </a:r>
-            <a:endParaRPr lang="en-US" sz="1300" dirty="0"/>
-          </a:p>
-        </p:txBody>
-      </p:sp>
-      <p:sp>
-        <p:nvSpPr>
-          <p:cNvPr id="17" name="arrow-128"/>
-          <p:cNvSpPr/>
-          <p:nvPr/>
-        </p:nvSpPr>
-        <p:spPr>
-          <a:xfrm>
-            <a:off x="5532120" y="4133088"/>
-            <a:ext cx="1005840" cy="914"/>
-          </a:xfrm>
-          <a:prstGeom prst="line">
-            <a:avLst/>
-          </a:prstGeom>
-          <a:noFill/>
-          <a:ln w="25400">
-            <a:solidFill>
-              <a:srgbClr val="5C6B73"/>
-            </a:solidFill>
-            <a:prstDash val="solid"/>
-            <a:tailEnd type="triangle"/>
-          </a:ln>
-        </p:spPr>
-        <p:txBody>
-          <a:bodyPr/>
-          <a:lstStyle/>
-          <a:p>
-            <a:endParaRPr lang="zh-TW" altLang="en-US"/>
-          </a:p>
-        </p:txBody>
-      </p:sp>
-      <p:sp>
-        <p:nvSpPr>
-          <p:cNvPr id="18" name="iconbg-129"/>
-          <p:cNvSpPr/>
-          <p:nvPr/>
-        </p:nvSpPr>
-        <p:spPr>
-          <a:xfrm>
-            <a:off x="7086600" y="3749040"/>
-            <a:ext cx="777240" cy="777240"/>
-          </a:xfrm>
-          <a:prstGeom prst="ellipse">
-            <a:avLst/>
-          </a:prstGeom>
-          <a:solidFill>
-            <a:srgbClr val="0E7C6B"/>
-          </a:solidFill>
-          <a:ln/>
-        </p:spPr>
-        <p:txBody>
-          <a:bodyPr/>
-          <a:lstStyle/>
-          <a:p>
-            <a:endParaRPr lang="zh-TW" altLang="en-US"/>
-          </a:p>
-        </p:txBody>
-      </p:sp>
-      <p:pic>
-        <p:nvPicPr>
-          <p:cNvPr id="19" name="icon-130" descr="preencoded.png"/>
-          <p:cNvPicPr>
-            <a:picLocks noChangeAspect="1"/>
-          </p:cNvPicPr>
-          <p:nvPr/>
-        </p:nvPicPr>
-        <p:blipFill>
-          <a:blip r:embed="rId5"/>
-          <a:stretch>
-            <a:fillRect/>
-          </a:stretch>
-        </p:blipFill>
-        <p:spPr>
-          <a:xfrm>
-            <a:off x="7280910" y="3943350"/>
-            <a:ext cx="388620" cy="388620"/>
-          </a:xfrm>
-          <a:prstGeom prst="rect">
-            <a:avLst/>
-          </a:prstGeom>
-        </p:spPr>
-      </p:pic>
-      <p:sp>
-        <p:nvSpPr>
-          <p:cNvPr id="20" name="txt-131"/>
-          <p:cNvSpPr txBox="1"/>
-          <p:nvPr/>
-        </p:nvSpPr>
-        <p:spPr>
-          <a:xfrm>
-            <a:off x="6217920" y="4617720"/>
-            <a:ext cx="2514600" cy="365760"/>
-          </a:xfrm>
-          <a:prstGeom prst="rect">
-            <a:avLst/>
-          </a:prstGeom>
-          <a:noFill/>
-          <a:ln/>
-        </p:spPr>
-        <p:txBody>
-          <a:bodyPr wrap="square" lIns="0" tIns="0" rIns="0" bIns="0" rtlCol="0" anchor="t"/>
-          <a:lstStyle/>
-          <a:p>
-            <a:pPr marL="0" indent="0" algn="ctr">
-              <a:buNone/>
-            </a:pPr>
-            <a:r>
-              <a:rPr lang="en-US" sz="1600" b="1" dirty="0">
-                <a:solidFill>
-                  <a:schemeClr val="tx2"/>
-                </a:solidFill>
-              </a:rPr>
-              <a:t>CVE 編號</a:t>
-            </a:r>
-            <a:endParaRPr lang="en-US" sz="1600" dirty="0"/>
-          </a:p>
-        </p:txBody>
-      </p:sp>
-      <p:sp>
-        <p:nvSpPr>
-          <p:cNvPr id="21" name="txt-132"/>
-          <p:cNvSpPr txBox="1"/>
-          <p:nvPr/>
-        </p:nvSpPr>
-        <p:spPr>
-          <a:xfrm>
-            <a:off x="6217920" y="4983480"/>
-            <a:ext cx="2514600" cy="365760"/>
-          </a:xfrm>
-          <a:prstGeom prst="rect">
-            <a:avLst/>
-          </a:prstGeom>
-          <a:noFill/>
-          <a:ln/>
-        </p:spPr>
-        <p:txBody>
-          <a:bodyPr wrap="square" lIns="0" tIns="0" rIns="0" bIns="0" rtlCol="0" anchor="t"/>
-          <a:lstStyle/>
-          <a:p>
-            <a:pPr marL="0" indent="0" algn="ctr">
-              <a:buNone/>
-            </a:pPr>
-            <a:r>
-              <a:rPr lang="en-US" sz="1300" dirty="0">
-                <a:solidFill>
-                  <a:schemeClr val="accent6"/>
-                </a:solidFill>
-              </a:rPr>
-              <a:t>MITRE 營運，CNA 分派</a:t>
-            </a:r>
-            <a:endParaRPr lang="en-US" sz="1300" dirty="0"/>
-          </a:p>
-        </p:txBody>
-      </p:sp>
-      <p:sp>
-        <p:nvSpPr>
-          <p:cNvPr id="22" name="arrow-133"/>
-          <p:cNvSpPr/>
-          <p:nvPr/>
-        </p:nvSpPr>
-        <p:spPr>
-          <a:xfrm>
-            <a:off x="8366760" y="4133088"/>
-            <a:ext cx="1005840" cy="914"/>
-          </a:xfrm>
-          <a:prstGeom prst="line">
-            <a:avLst/>
-          </a:prstGeom>
-          <a:noFill/>
-          <a:ln w="25400">
-            <a:solidFill>
-              <a:srgbClr val="5C6B73"/>
-            </a:solidFill>
-            <a:prstDash val="solid"/>
-            <a:tailEnd type="triangle"/>
-          </a:ln>
-        </p:spPr>
-        <p:txBody>
-          <a:bodyPr/>
-          <a:lstStyle/>
-          <a:p>
-            <a:endParaRPr lang="zh-TW" altLang="en-US"/>
-          </a:p>
-        </p:txBody>
-      </p:sp>
-      <p:sp>
-        <p:nvSpPr>
-          <p:cNvPr id="23" name="iconbg-134"/>
-          <p:cNvSpPr/>
-          <p:nvPr/>
-        </p:nvSpPr>
-        <p:spPr>
-          <a:xfrm>
-            <a:off x="9921240" y="3749040"/>
-            <a:ext cx="777240" cy="777240"/>
-          </a:xfrm>
-          <a:prstGeom prst="ellipse">
-            <a:avLst/>
-          </a:prstGeom>
-          <a:solidFill>
-            <a:srgbClr val="E8A33D"/>
-          </a:solidFill>
-          <a:ln/>
-        </p:spPr>
-        <p:txBody>
-          <a:bodyPr/>
-          <a:lstStyle/>
-          <a:p>
-            <a:endParaRPr lang="zh-TW" altLang="en-US"/>
-          </a:p>
-        </p:txBody>
-      </p:sp>
-      <p:pic>
-        <p:nvPicPr>
-          <p:cNvPr id="24" name="icon-135" descr="preencoded.png"/>
-          <p:cNvPicPr>
-            <a:picLocks noChangeAspect="1"/>
-          </p:cNvPicPr>
-          <p:nvPr/>
-        </p:nvPicPr>
-        <p:blipFill>
-          <a:blip r:embed="rId6"/>
-          <a:stretch>
-            <a:fillRect/>
-          </a:stretch>
-        </p:blipFill>
-        <p:spPr>
-          <a:xfrm>
-            <a:off x="10115550" y="3943350"/>
-            <a:ext cx="388620" cy="388620"/>
-          </a:xfrm>
-          <a:prstGeom prst="rect">
-            <a:avLst/>
-          </a:prstGeom>
-        </p:spPr>
-      </p:pic>
-      <p:sp>
-        <p:nvSpPr>
-          <p:cNvPr id="25" name="txt-136"/>
-          <p:cNvSpPr txBox="1"/>
-          <p:nvPr/>
-        </p:nvSpPr>
-        <p:spPr>
-          <a:xfrm>
-            <a:off x="9052560" y="4617720"/>
-            <a:ext cx="2514600" cy="365760"/>
-          </a:xfrm>
-          <a:prstGeom prst="rect">
-            <a:avLst/>
-          </a:prstGeom>
-          <a:noFill/>
-          <a:ln/>
-        </p:spPr>
-        <p:txBody>
-          <a:bodyPr wrap="square" lIns="0" tIns="0" rIns="0" bIns="0" rtlCol="0" anchor="t"/>
-          <a:lstStyle/>
-          <a:p>
-            <a:pPr marL="0" indent="0" algn="ctr">
-              <a:buNone/>
-            </a:pPr>
-            <a:r>
-              <a:rPr lang="en-US" sz="1600" b="1" dirty="0">
-                <a:solidFill>
-                  <a:schemeClr val="tx2"/>
-                </a:solidFill>
-              </a:rPr>
-              <a:t>VEX 研判</a:t>
-            </a:r>
-            <a:endParaRPr lang="en-US" sz="1600" dirty="0"/>
-          </a:p>
-        </p:txBody>
-      </p:sp>
-      <p:sp>
-        <p:nvSpPr>
-          <p:cNvPr id="26" name="txt-137"/>
-          <p:cNvSpPr txBox="1"/>
-          <p:nvPr/>
-        </p:nvSpPr>
-        <p:spPr>
-          <a:xfrm>
-            <a:off x="9052560" y="4983480"/>
-            <a:ext cx="2514600" cy="365760"/>
-          </a:xfrm>
-          <a:prstGeom prst="rect">
-            <a:avLst/>
-          </a:prstGeom>
-          <a:noFill/>
-          <a:ln/>
-        </p:spPr>
-        <p:txBody>
-          <a:bodyPr wrap="square" lIns="0" tIns="0" rIns="0" bIns="0" rtlCol="0" anchor="t"/>
-          <a:lstStyle/>
-          <a:p>
-            <a:pPr marL="0" indent="0" algn="ctr">
-              <a:buNone/>
-            </a:pPr>
-            <a:r>
-              <a:rPr lang="en-US" sz="1300" dirty="0">
-                <a:solidFill>
-                  <a:schemeClr val="accent6"/>
-                </a:solidFill>
-              </a:rPr>
-              <a:t>對我是否可利用？</a:t>
-            </a:r>
-            <a:endParaRPr lang="en-US" sz="1300" dirty="0"/>
-          </a:p>
-        </p:txBody>
-      </p:sp>
-      <p:sp>
-        <p:nvSpPr>
-          <p:cNvPr id="27" name="card-138"/>
-          <p:cNvSpPr/>
-          <p:nvPr/>
-        </p:nvSpPr>
-        <p:spPr>
-          <a:xfrm>
-            <a:off x="548640" y="5532120"/>
-            <a:ext cx="11064240" cy="685800"/>
-          </a:xfrm>
-          <a:prstGeom prst="roundRect">
-            <a:avLst>
-              <a:gd name="adj" fmla="val 16000"/>
-            </a:avLst>
-          </a:prstGeom>
-          <a:solidFill>
-            <a:srgbClr val="FBEDEE"/>
-          </a:solidFill>
-          <a:ln/>
-        </p:spPr>
-        <p:txBody>
-          <a:bodyPr/>
-          <a:lstStyle/>
-          <a:p>
-            <a:endParaRPr lang="zh-TW" altLang="en-US"/>
-          </a:p>
-        </p:txBody>
-      </p:sp>
-      <p:sp>
-        <p:nvSpPr>
-          <p:cNvPr id="28" name="txt-139"/>
-          <p:cNvSpPr txBox="1"/>
-          <p:nvPr/>
-        </p:nvSpPr>
-        <p:spPr>
-          <a:xfrm>
-            <a:off x="777240" y="5532120"/>
-            <a:ext cx="10607040" cy="685800"/>
-          </a:xfrm>
-          <a:prstGeom prst="rect">
-            <a:avLst/>
-          </a:prstGeom>
-          <a:noFill/>
-          <a:ln/>
-        </p:spPr>
-        <p:txBody>
-          <a:bodyPr wrap="square" lIns="0" tIns="0" rIns="0" bIns="0" rtlCol="0" anchor="ctr"/>
-          <a:lstStyle/>
-          <a:p>
-            <a:pPr marL="0" indent="0">
-              <a:buNone/>
-            </a:pPr>
-            <a:r>
-              <a:rPr lang="en-US" sz="1400" b="1" dirty="0">
-                <a:solidFill>
-                  <a:srgbClr val="C8424F"/>
-                </a:solidFill>
-              </a:rPr>
-              <a:t>沒有 purl → 掃描器不會比對 → 「0 漏洞」不代表安全。</a:t>
-            </a:r>
-            <a:r>
-              <a:rPr lang="en-US" sz="1400" dirty="0">
-                <a:solidFill>
-                  <a:schemeClr val="tx1"/>
-                </a:solidFill>
-              </a:rPr>
-              <a:t>　實測 SBOM 中 6 個 application 元件就沒有 purl。</a:t>
-            </a:r>
-            <a:endParaRPr lang="en-US" sz="1400" dirty="0"/>
-          </a:p>
-        </p:txBody>
-      </p:sp>
-      <p:sp>
-        <p:nvSpPr>
-          <p:cNvPr id="29" name="Slide Number Placeholder 0"/>
-          <p:cNvSpPr>
-            <a:spLocks noGrp="1"/>
-          </p:cNvSpPr>
-          <p:nvPr>
-            <p:ph type="sldNum" sz="quarter" idx="4294967295"/>
-          </p:nvPr>
-        </p:nvSpPr>
-        <p:spPr>
-          <a:xfrm>
-            <a:off x="11155680" y="6400800"/>
-            <a:ext cx="457200" cy="274320"/>
-          </a:xfrm>
-          <a:prstGeom prst="rect">
-            <a:avLst/>
-          </a:prstGeom>
-          <a:extLst>
-            <a:ext uri="{C572A759-6A51-4108-AA02-DFA0A04FC94B}">
-              <ma14:wrappingTextBoxFlag xmlns:ma14="http://schemas.microsoft.com/office/mac/drawingml/2011/main" xmlns="" val="0"/>
+              <ma14:wrappingTextBoxFlag xmlns="" xmlns:ma14="http://schemas.microsoft.com/office/mac/drawingml/2011/main" val="0"/>
             </a:ext>
           </a:extLst>
         </p:spPr>
@@ -28734,7 +29221,7 @@
         <a:font script="Jpan" typeface="游ゴシック Light"/>
         <a:font script="Hang" typeface="맑은 고딕"/>
         <a:font script="Hans" typeface="等线 Light"/>
-        <a:font script="Hant" typeface="新細明體"/>
+        <a:font script="Hant" typeface="Microsoft JhengHei"/>
         <a:font script="Arab" typeface="Times New Roman"/>
         <a:font script="Hebr" typeface="Times New Roman"/>
         <a:font script="Thai" typeface="Angsana New"/>
@@ -28786,7 +29273,7 @@
         <a:font script="Jpan" typeface="游ゴシック"/>
         <a:font script="Hang" typeface="맑은 고딕"/>
         <a:font script="Hans" typeface="等线"/>
-        <a:font script="Hant" typeface="新細明體"/>
+        <a:font script="Hant" typeface="Microsoft JhengHei"/>
         <a:font script="Arab" typeface="Arial"/>
         <a:font script="Hebr" typeface="Arial"/>
         <a:font script="Thai" typeface="Cordia New"/>
